--- a/icbb-website/materials/research-methods/unit-03-slides.pptx
+++ b/icbb-website/materials/research-methods/unit-03-slides.pptx
@@ -967,7 +967,7 @@
           <a:p>
             <a:r>
               <a:rPr lang="en-US" dirty="0"/>
-              <a:t>Take-away: Synthesis is what you see reading down the columns. Summary is what you get reading across the rows. Reviewers can tell instantly which one you did.</a:t>
+              <a:t>The point: Synthesis is what you see reading down the columns. Summary is what you get reading across the rows. Reviewers can tell instantly which one you did.</a:t>
             </a:r>
             <a:endParaRPr lang="en-US" dirty="0"/>
           </a:p>
@@ -1055,7 +1055,7 @@
           <a:p>
             <a:r>
               <a:rPr lang="en-US" dirty="0"/>
-              <a:t>Take-away: Pick the review type from your resources and question, not from which label sounds most impressive. A finished scoping review beats an abandoned systematic one.</a:t>
+              <a:t>The point: Pick the review type from your resources and question, not from which label sounds most impressive. A finished scoping review beats an abandoned systematic one.</a:t>
             </a:r>
             <a:endParaRPr lang="en-US" dirty="0"/>
           </a:p>
@@ -1407,7 +1407,7 @@
           <a:p>
             <a:r>
               <a:rPr lang="en-US" dirty="0"/>
-              <a:t>Read these out at the start and return to them at the end of the unit.</a:t>
+              <a:t>Read these at the start, and return to them at the end of the unit.</a:t>
             </a:r>
             <a:endParaRPr lang="en-US" dirty="0"/>
           </a:p>
@@ -2127,14 +2127,14 @@
         </p:nvSpPr>
         <p:spPr>
           <a:xfrm>
-            <a:off x="0" y="0"/>
-            <a:ext cx="118872" cy="5148072"/>
+            <a:off x="566928" y="4590288"/>
+            <a:ext cx="8010144" cy="10973"/>
           </a:xfrm>
           <a:prstGeom prst="rect">
             <a:avLst/>
           </a:prstGeom>
           <a:solidFill>
-            <a:srgbClr val="0066CC"/>
+            <a:srgbClr val="D8D3CB"/>
           </a:solidFill>
           <a:ln/>
         </p:spPr>
@@ -2149,7 +2149,7 @@
         </p:nvPicPr>
         <p:blipFill>
           <a:blip r:embed="rId1">
-            <a:alphaModFix amt="18000"/>
+            <a:alphaModFix amt="38000"/>
           </a:blip>
           <a:stretch>
             <a:fillRect/>
@@ -2157,8 +2157,8 @@
         </p:blipFill>
         <p:spPr>
           <a:xfrm>
-            <a:off x="6903720" y="3977640"/>
-            <a:ext cx="1920240" cy="1280160"/>
+            <a:off x="7973568" y="4709160"/>
+            <a:ext cx="566928" cy="374904"/>
           </a:xfrm>
           <a:prstGeom prst="rect">
             <a:avLst/>
@@ -2177,8 +2177,8 @@
         </p:nvSpPr>
         <p:spPr>
           <a:xfrm>
-            <a:off x="8503920" y="4709160"/>
-            <a:ext cx="800000" cy="300000"/>
+            <a:off x="566928" y="4700016"/>
+            <a:ext cx="914400" cy="274320"/>
           </a:xfrm>
           <a:prstGeom prst="rect">
             <a:avLst/>
@@ -2193,10 +2193,13 @@
           <a:bodyPr/>
           <a:lstStyle>
             <a:lvl1pPr>
-              <a:defRPr sz="1000">
-                <a:solidFill>
-                  <a:srgbClr val="6B7280"/>
-                </a:solidFill>
+              <a:defRPr sz="900">
+                <a:solidFill>
+                  <a:srgbClr val="5F6B76"/>
+                </a:solidFill>
+                <a:latin typeface="Corbel"/>
+                <a:ea typeface="Corbel"/>
+                <a:cs typeface="Corbel"/>
               </a:defRPr>
             </a:lvl1pPr>
           </a:lstStyle>
@@ -2224,7 +2227,7 @@
     <p:bg>
       <p:bgPr>
         <a:solidFill>
-          <a:srgbClr val="004D99"/>
+          <a:srgbClr val="132330"/>
         </a:solidFill>
       </p:bgPr>
     </p:bg>
@@ -2250,14 +2253,14 @@
         </p:nvSpPr>
         <p:spPr>
           <a:xfrm>
-            <a:off x="0" y="4526280"/>
-            <a:ext cx="9144000" cy="621792"/>
+            <a:off x="685800" y="1481328"/>
+            <a:ext cx="1051560" cy="25603"/>
           </a:xfrm>
           <a:prstGeom prst="rect">
             <a:avLst/>
           </a:prstGeom>
           <a:solidFill>
-            <a:srgbClr val="00A86B"/>
+            <a:srgbClr val="9A6A3C"/>
           </a:solidFill>
           <a:ln/>
         </p:spPr>
@@ -2272,7 +2275,7 @@
         </p:nvPicPr>
         <p:blipFill>
           <a:blip r:embed="rId1">
-            <a:alphaModFix amt="75000"/>
+            <a:alphaModFix amt="45000"/>
           </a:blip>
           <a:stretch>
             <a:fillRect/>
@@ -2280,8 +2283,8 @@
         </p:blipFill>
         <p:spPr>
           <a:xfrm>
-            <a:off x="7452360" y="384048"/>
-            <a:ext cx="1371600" cy="914400"/>
+            <a:off x="7863840" y="4315968"/>
+            <a:ext cx="676656" cy="448056"/>
           </a:xfrm>
           <a:prstGeom prst="rect">
             <a:avLst/>
@@ -2325,8 +2328,8 @@
         </p:nvSpPr>
         <p:spPr>
           <a:xfrm>
-            <a:off x="8503920" y="4709160"/>
-            <a:ext cx="800000" cy="300000"/>
+            <a:off x="566928" y="4700016"/>
+            <a:ext cx="914400" cy="274320"/>
           </a:xfrm>
           <a:prstGeom prst="rect">
             <a:avLst/>
@@ -2341,10 +2344,13 @@
           <a:bodyPr/>
           <a:lstStyle>
             <a:lvl1pPr>
-              <a:defRPr sz="1000">
-                <a:solidFill>
-                  <a:srgbClr val="6B7280"/>
-                </a:solidFill>
+              <a:defRPr sz="900">
+                <a:solidFill>
+                  <a:srgbClr val="5F6B76"/>
+                </a:solidFill>
+                <a:latin typeface="Corbel"/>
+                <a:ea typeface="Corbel"/>
+                <a:cs typeface="Corbel"/>
               </a:defRPr>
             </a:lvl1pPr>
           </a:lstStyle>
@@ -2645,8 +2651,8 @@
         </p:nvSpPr>
         <p:spPr>
           <a:xfrm>
-            <a:off x="548640" y="1005840"/>
-            <a:ext cx="6675120" cy="274320"/>
+            <a:off x="685800" y="1024128"/>
+            <a:ext cx="6766560" cy="292608"/>
           </a:xfrm>
           <a:prstGeom prst="rect">
             <a:avLst/>
@@ -2662,14 +2668,17 @@
               <a:buNone/>
             </a:pPr>
             <a:r>
-              <a:rPr lang="en-US" sz="1200" b="1" spc="200" kern="0" dirty="0">
-                <a:solidFill>
-                  <a:srgbClr val="00A86B"/>
-                </a:solidFill>
-              </a:rPr>
-              <a:t>ICBB-RM101  ·  UNIT 3 OF 10</a:t>
-            </a:r>
-            <a:endParaRPr lang="en-US" sz="1200" dirty="0"/>
+              <a:rPr lang="en-US" sz="1150" spc="240" kern="0" dirty="0">
+                <a:solidFill>
+                  <a:srgbClr val="C8A67B"/>
+                </a:solidFill>
+                <a:latin typeface="Corbel" pitchFamily="34" charset="0"/>
+                <a:ea typeface="Corbel" pitchFamily="34" charset="-122"/>
+                <a:cs typeface="Corbel" pitchFamily="34" charset="-120"/>
+              </a:rPr>
+              <a:t>ICBB-RM101   ·   Unit 3 of 10</a:t>
+            </a:r>
+            <a:endParaRPr lang="en-US" sz="1150" dirty="0"/>
           </a:p>
         </p:txBody>
       </p:sp>
@@ -2681,8 +2690,8 @@
         </p:nvSpPr>
         <p:spPr>
           <a:xfrm>
-            <a:off x="548640" y="1371600"/>
-            <a:ext cx="6766560" cy="1371600"/>
+            <a:off x="685800" y="1700784"/>
+            <a:ext cx="6858000" cy="1417320"/>
           </a:xfrm>
           <a:prstGeom prst="rect">
             <a:avLst/>
@@ -2695,17 +2704,23 @@
           <a:lstStyle/>
           <a:p>
             <a:pPr indent="0" marL="0">
+              <a:lnSpc>
+                <a:spcPct val="102000"/>
+              </a:lnSpc>
               <a:buNone/>
             </a:pPr>
             <a:r>
-              <a:rPr lang="en-US" sz="3400" b="1" dirty="0">
+              <a:rPr lang="en-US" sz="3300" dirty="0">
                 <a:solidFill>
                   <a:srgbClr val="FFFFFF"/>
                 </a:solidFill>
+                <a:latin typeface="Constantia" pitchFamily="34" charset="0"/>
+                <a:ea typeface="Constantia" pitchFamily="34" charset="-122"/>
+                <a:cs typeface="Constantia" pitchFamily="34" charset="-120"/>
               </a:rPr>
               <a:t>The Literature Review</a:t>
             </a:r>
-            <a:endParaRPr lang="en-US" sz="3400" dirty="0"/>
+            <a:endParaRPr lang="en-US" sz="3300" dirty="0"/>
           </a:p>
         </p:txBody>
       </p:sp>
@@ -2717,8 +2732,8 @@
         </p:nvSpPr>
         <p:spPr>
           <a:xfrm>
-            <a:off x="548640" y="2788920"/>
-            <a:ext cx="6766560" cy="1188720"/>
+            <a:off x="685800" y="3127248"/>
+            <a:ext cx="6309360" cy="1051560"/>
           </a:xfrm>
           <a:prstGeom prst="rect">
             <a:avLst/>
@@ -2732,19 +2747,22 @@
           <a:p>
             <a:pPr indent="0" marL="0">
               <a:lnSpc>
-                <a:spcPct val="120000"/>
+                <a:spcPct val="128000"/>
               </a:lnSpc>
               <a:buNone/>
             </a:pPr>
             <a:r>
-              <a:rPr lang="en-US" sz="1400" dirty="0">
-                <a:solidFill>
-                  <a:srgbClr val="DCE7F5"/>
-                </a:solidFill>
+              <a:rPr lang="en-US" sz="1350" dirty="0">
+                <a:solidFill>
+                  <a:srgbClr val="B9C2CB"/>
+                </a:solidFill>
+                <a:latin typeface="Corbel" pitchFamily="34" charset="0"/>
+                <a:ea typeface="Corbel" pitchFamily="34" charset="-122"/>
+                <a:cs typeface="Corbel" pitchFamily="34" charset="-120"/>
               </a:rPr>
               <a:t>What a literature review is for, the main types and when each is appropriate, and how to build one that argues rather than merely lists.</a:t>
             </a:r>
-            <a:endParaRPr lang="en-US" sz="1400" dirty="0"/>
+            <a:endParaRPr lang="en-US" sz="1350" dirty="0"/>
           </a:p>
         </p:txBody>
       </p:sp>
@@ -2756,8 +2774,8 @@
         </p:nvSpPr>
         <p:spPr>
           <a:xfrm>
-            <a:off x="548640" y="4645152"/>
-            <a:ext cx="5486400" cy="365760"/>
+            <a:off x="685800" y="4407408"/>
+            <a:ext cx="4572000" cy="274320"/>
           </a:xfrm>
           <a:prstGeom prst="rect">
             <a:avLst/>
@@ -2773,14 +2791,17 @@
               <a:buNone/>
             </a:pPr>
             <a:r>
-              <a:rPr lang="en-US" sz="1200" b="1" dirty="0">
-                <a:solidFill>
-                  <a:srgbClr val="FFFFFF"/>
-                </a:solidFill>
-              </a:rPr>
-              <a:t>Jesse Anak  ·  ICBB</a:t>
-            </a:r>
-            <a:endParaRPr lang="en-US" sz="1200" dirty="0"/>
+              <a:rPr lang="en-US" sz="1050" spc="120" kern="0" dirty="0">
+                <a:solidFill>
+                  <a:srgbClr val="8894A0"/>
+                </a:solidFill>
+                <a:latin typeface="Corbel" pitchFamily="34" charset="0"/>
+                <a:ea typeface="Corbel" pitchFamily="34" charset="-122"/>
+                <a:cs typeface="Corbel" pitchFamily="34" charset="-120"/>
+              </a:rPr>
+              <a:t>Jesse Anak   ·   ICBB</a:t>
+            </a:r>
+            <a:endParaRPr lang="en-US" sz="1050" dirty="0"/>
           </a:p>
         </p:txBody>
       </p:sp>
@@ -2817,8 +2838,8 @@
         </p:nvSpPr>
         <p:spPr>
           <a:xfrm>
-            <a:off x="502920" y="292608"/>
-            <a:ext cx="8046720" cy="228600"/>
+            <a:off x="566928" y="384048"/>
+            <a:ext cx="7772400" cy="237744"/>
           </a:xfrm>
           <a:prstGeom prst="rect">
             <a:avLst/>
@@ -2834,14 +2855,17 @@
               <a:buNone/>
             </a:pPr>
             <a:r>
-              <a:rPr lang="en-US" sz="1100" b="1" spc="150" kern="0" dirty="0">
-                <a:solidFill>
-                  <a:srgbClr val="0066CC"/>
-                </a:solidFill>
+              <a:rPr lang="en-US" sz="1000" spc="200" kern="0" dirty="0">
+                <a:solidFill>
+                  <a:srgbClr val="9A6A3C"/>
+                </a:solidFill>
+                <a:latin typeface="Corbel" pitchFamily="34" charset="0"/>
+                <a:ea typeface="Corbel" pitchFamily="34" charset="-122"/>
+                <a:cs typeface="Corbel" pitchFamily="34" charset="-120"/>
               </a:rPr>
               <a:t>UNIT 3</a:t>
             </a:r>
-            <a:endParaRPr lang="en-US" sz="1100" dirty="0"/>
+            <a:endParaRPr lang="en-US" sz="1000" dirty="0"/>
           </a:p>
         </p:txBody>
       </p:sp>
@@ -2853,8 +2877,8 @@
         </p:nvSpPr>
         <p:spPr>
           <a:xfrm>
-            <a:off x="502920" y="548640"/>
-            <a:ext cx="8046720" cy="640080"/>
+            <a:off x="566928" y="658368"/>
+            <a:ext cx="7772400" cy="658368"/>
           </a:xfrm>
           <a:prstGeom prst="rect">
             <a:avLst/>
@@ -2867,30 +2891,56 @@
           <a:lstStyle/>
           <a:p>
             <a:pPr indent="0" marL="0">
+              <a:lnSpc>
+                <a:spcPct val="100000"/>
+              </a:lnSpc>
               <a:buNone/>
             </a:pPr>
             <a:r>
-              <a:rPr lang="en-US" sz="2400" b="1" dirty="0">
-                <a:solidFill>
-                  <a:srgbClr val="111827"/>
-                </a:solidFill>
+              <a:rPr lang="en-US" sz="2500" dirty="0">
+                <a:solidFill>
+                  <a:srgbClr val="1C3140"/>
+                </a:solidFill>
+                <a:latin typeface="Constantia" pitchFamily="34" charset="0"/>
+                <a:ea typeface="Constantia" pitchFamily="34" charset="-122"/>
+                <a:cs typeface="Constantia" pitchFamily="34" charset="-120"/>
               </a:rPr>
               <a:t>Appraising what you find (1/2)</a:t>
             </a:r>
-            <a:endParaRPr lang="en-US" sz="2400" dirty="0"/>
-          </a:p>
-        </p:txBody>
-      </p:sp>
-      <p:sp>
-        <p:nvSpPr>
-          <p:cNvPr id="4" name="Text 2"/>
+            <a:endParaRPr lang="en-US" sz="2500" dirty="0"/>
+          </a:p>
+        </p:txBody>
+      </p:sp>
+      <p:sp>
+        <p:nvSpPr>
+          <p:cNvPr id="4" name="Shape 2"/>
           <p:cNvSpPr/>
           <p:nvPr/>
         </p:nvSpPr>
         <p:spPr>
           <a:xfrm>
-            <a:off x="685800" y="1325880"/>
-            <a:ext cx="7772400" cy="3200400"/>
+            <a:off x="566928" y="1335024"/>
+            <a:ext cx="566928" cy="20117"/>
+          </a:xfrm>
+          <a:prstGeom prst="rect">
+            <a:avLst/>
+          </a:prstGeom>
+          <a:solidFill>
+            <a:srgbClr val="9A6A3C"/>
+          </a:solidFill>
+          <a:ln/>
+        </p:spPr>
+      </p:sp>
+      <p:sp>
+        <p:nvSpPr>
+          <p:cNvPr id="5" name="Text 3"/>
+          <p:cNvSpPr/>
+          <p:nvPr/>
+        </p:nvSpPr>
+        <p:spPr>
+          <a:xfrm>
+            <a:off x="713232" y="1664208"/>
+            <a:ext cx="7498080" cy="2788920"/>
           </a:xfrm>
           <a:prstGeom prst="rect">
             <a:avLst/>
@@ -2904,65 +2954,74 @@
           <a:p>
             <a:pPr marL="342900" indent="-342900">
               <a:lnSpc>
-                <a:spcPct val="125000"/>
+                <a:spcPct val="130000"/>
               </a:lnSpc>
               <a:spcAft>
-                <a:spcPts val="800"/>
+                <a:spcPts val="1100"/>
               </a:spcAft>
               <a:buSzPct val="100000"/>
-              <a:buChar char="•"/>
-            </a:pPr>
-            <a:r>
-              <a:rPr lang="en-US" sz="1300" dirty="0">
-                <a:solidFill>
-                  <a:srgbClr val="374151"/>
-                </a:solidFill>
+              <a:buChar char="–"/>
+            </a:pPr>
+            <a:r>
+              <a:rPr lang="en-US" sz="1350" dirty="0">
+                <a:solidFill>
+                  <a:srgbClr val="23282E"/>
+                </a:solidFill>
+                <a:latin typeface="Corbel" pitchFamily="34" charset="0"/>
+                <a:ea typeface="Corbel" pitchFamily="34" charset="-122"/>
+                <a:cs typeface="Corbel" pitchFamily="34" charset="-120"/>
               </a:rPr>
               <a:t>Not all evidence carries equal weight; state how you judged quality</a:t>
             </a:r>
-            <a:endParaRPr lang="en-US" sz="1300" dirty="0"/>
+            <a:endParaRPr lang="en-US" sz="1350" dirty="0"/>
           </a:p>
           <a:p>
             <a:pPr marL="342900" indent="-342900">
               <a:lnSpc>
-                <a:spcPct val="125000"/>
+                <a:spcPct val="130000"/>
               </a:lnSpc>
               <a:spcAft>
-                <a:spcPts val="800"/>
+                <a:spcPts val="1100"/>
               </a:spcAft>
               <a:buSzPct val="100000"/>
-              <a:buChar char="•"/>
-            </a:pPr>
-            <a:r>
-              <a:rPr lang="en-US" sz="1300" dirty="0">
-                <a:solidFill>
-                  <a:srgbClr val="374151"/>
-                </a:solidFill>
+              <a:buChar char="–"/>
+            </a:pPr>
+            <a:r>
+              <a:rPr lang="en-US" sz="1350" dirty="0">
+                <a:solidFill>
+                  <a:srgbClr val="23282E"/>
+                </a:solidFill>
+                <a:latin typeface="Corbel" pitchFamily="34" charset="0"/>
+                <a:ea typeface="Corbel" pitchFamily="34" charset="-122"/>
+                <a:cs typeface="Corbel" pitchFamily="34" charset="-120"/>
               </a:rPr>
               <a:t>Evidence hierarchies place systematic reviews and randomised trials above cohort, case-control and cross-sectional designs for effectiveness questions</a:t>
             </a:r>
-            <a:endParaRPr lang="en-US" sz="1300" dirty="0"/>
+            <a:endParaRPr lang="en-US" sz="1350" dirty="0"/>
           </a:p>
           <a:p>
             <a:pPr marL="342900" indent="-342900">
               <a:lnSpc>
-                <a:spcPct val="125000"/>
+                <a:spcPct val="130000"/>
               </a:lnSpc>
               <a:spcAft>
-                <a:spcPts val="800"/>
+                <a:spcPts val="1100"/>
               </a:spcAft>
               <a:buSzPct val="100000"/>
-              <a:buChar char="•"/>
-            </a:pPr>
-            <a:r>
-              <a:rPr lang="en-US" sz="1300" dirty="0">
-                <a:solidFill>
-                  <a:srgbClr val="374151"/>
-                </a:solidFill>
+              <a:buChar char="–"/>
+            </a:pPr>
+            <a:r>
+              <a:rPr lang="en-US" sz="1350" dirty="0">
+                <a:solidFill>
+                  <a:srgbClr val="23282E"/>
+                </a:solidFill>
+                <a:latin typeface="Corbel" pitchFamily="34" charset="0"/>
+                <a:ea typeface="Corbel" pitchFamily="34" charset="-122"/>
+                <a:cs typeface="Corbel" pitchFamily="34" charset="-120"/>
               </a:rPr>
               <a:t>Hierarchies apply to questions of effectiveness, not to questions of meaning or experience — a qualitative study is not "low quality" evidence for how patients understand illness</a:t>
             </a:r>
-            <a:endParaRPr lang="en-US" sz="1300" dirty="0"/>
+            <a:endParaRPr lang="en-US" sz="1350" dirty="0"/>
           </a:p>
         </p:txBody>
       </p:sp>
@@ -2978,8 +3037,8 @@
         </p:nvSpPr>
         <p:spPr>
           <a:xfrm>
-            <a:off x="8503920" y="4709160"/>
-            <a:ext cx="800000" cy="300000"/>
+            <a:off x="566928" y="4700016"/>
+            <a:ext cx="914400" cy="274320"/>
           </a:xfrm>
           <a:prstGeom prst="rect">
             <a:avLst/>
@@ -2994,10 +3053,13 @@
           <a:bodyPr/>
           <a:lstStyle>
             <a:lvl1pPr>
-              <a:defRPr sz="1000">
-                <a:solidFill>
-                  <a:srgbClr val="6B7280"/>
-                </a:solidFill>
+              <a:defRPr sz="900">
+                <a:solidFill>
+                  <a:srgbClr val="5F6B76"/>
+                </a:solidFill>
+                <a:latin typeface="Corbel"/>
+                <a:ea typeface="Corbel"/>
+                <a:cs typeface="Corbel"/>
               </a:defRPr>
             </a:lvl1pPr>
           </a:lstStyle>
@@ -3044,8 +3106,8 @@
         </p:nvSpPr>
         <p:spPr>
           <a:xfrm>
-            <a:off x="502920" y="292608"/>
-            <a:ext cx="8046720" cy="228600"/>
+            <a:off x="566928" y="384048"/>
+            <a:ext cx="7772400" cy="237744"/>
           </a:xfrm>
           <a:prstGeom prst="rect">
             <a:avLst/>
@@ -3061,14 +3123,17 @@
               <a:buNone/>
             </a:pPr>
             <a:r>
-              <a:rPr lang="en-US" sz="1100" b="1" spc="150" kern="0" dirty="0">
-                <a:solidFill>
-                  <a:srgbClr val="0066CC"/>
-                </a:solidFill>
+              <a:rPr lang="en-US" sz="1000" spc="200" kern="0" dirty="0">
+                <a:solidFill>
+                  <a:srgbClr val="9A6A3C"/>
+                </a:solidFill>
+                <a:latin typeface="Corbel" pitchFamily="34" charset="0"/>
+                <a:ea typeface="Corbel" pitchFamily="34" charset="-122"/>
+                <a:cs typeface="Corbel" pitchFamily="34" charset="-120"/>
               </a:rPr>
               <a:t>UNIT 3</a:t>
             </a:r>
-            <a:endParaRPr lang="en-US" sz="1100" dirty="0"/>
+            <a:endParaRPr lang="en-US" sz="1000" dirty="0"/>
           </a:p>
         </p:txBody>
       </p:sp>
@@ -3080,8 +3145,8 @@
         </p:nvSpPr>
         <p:spPr>
           <a:xfrm>
-            <a:off x="502920" y="548640"/>
-            <a:ext cx="8046720" cy="640080"/>
+            <a:off x="566928" y="658368"/>
+            <a:ext cx="7772400" cy="658368"/>
           </a:xfrm>
           <a:prstGeom prst="rect">
             <a:avLst/>
@@ -3094,30 +3159,56 @@
           <a:lstStyle/>
           <a:p>
             <a:pPr indent="0" marL="0">
+              <a:lnSpc>
+                <a:spcPct val="100000"/>
+              </a:lnSpc>
               <a:buNone/>
             </a:pPr>
             <a:r>
-              <a:rPr lang="en-US" sz="2400" b="1" dirty="0">
-                <a:solidFill>
-                  <a:srgbClr val="111827"/>
-                </a:solidFill>
+              <a:rPr lang="en-US" sz="2500" dirty="0">
+                <a:solidFill>
+                  <a:srgbClr val="1C3140"/>
+                </a:solidFill>
+                <a:latin typeface="Constantia" pitchFamily="34" charset="0"/>
+                <a:ea typeface="Constantia" pitchFamily="34" charset="-122"/>
+                <a:cs typeface="Constantia" pitchFamily="34" charset="-120"/>
               </a:rPr>
               <a:t>Appraising what you find (2/2)</a:t>
             </a:r>
-            <a:endParaRPr lang="en-US" sz="2400" dirty="0"/>
-          </a:p>
-        </p:txBody>
-      </p:sp>
-      <p:sp>
-        <p:nvSpPr>
-          <p:cNvPr id="4" name="Text 2"/>
+            <a:endParaRPr lang="en-US" sz="2500" dirty="0"/>
+          </a:p>
+        </p:txBody>
+      </p:sp>
+      <p:sp>
+        <p:nvSpPr>
+          <p:cNvPr id="4" name="Shape 2"/>
           <p:cNvSpPr/>
           <p:nvPr/>
         </p:nvSpPr>
         <p:spPr>
           <a:xfrm>
-            <a:off x="685800" y="1325880"/>
-            <a:ext cx="7772400" cy="3200400"/>
+            <a:off x="566928" y="1335024"/>
+            <a:ext cx="566928" cy="20117"/>
+          </a:xfrm>
+          <a:prstGeom prst="rect">
+            <a:avLst/>
+          </a:prstGeom>
+          <a:solidFill>
+            <a:srgbClr val="9A6A3C"/>
+          </a:solidFill>
+          <a:ln/>
+        </p:spPr>
+      </p:sp>
+      <p:sp>
+        <p:nvSpPr>
+          <p:cNvPr id="5" name="Text 3"/>
+          <p:cNvSpPr/>
+          <p:nvPr/>
+        </p:nvSpPr>
+        <p:spPr>
+          <a:xfrm>
+            <a:off x="713232" y="1664208"/>
+            <a:ext cx="7498080" cy="2788920"/>
           </a:xfrm>
           <a:prstGeom prst="rect">
             <a:avLst/>
@@ -3131,19 +3222,22 @@
           <a:p>
             <a:pPr marL="342900" indent="-342900">
               <a:lnSpc>
-                <a:spcPct val="125000"/>
+                <a:spcPct val="130000"/>
               </a:lnSpc>
               <a:spcAft>
-                <a:spcPts val="800"/>
+                <a:spcPts val="1100"/>
               </a:spcAft>
               <a:buSzPct val="100000"/>
-              <a:buChar char="•"/>
+              <a:buChar char="–"/>
             </a:pPr>
             <a:r>
               <a:rPr lang="en-US" sz="1500" dirty="0">
                 <a:solidFill>
-                  <a:srgbClr val="374151"/>
-                </a:solidFill>
+                  <a:srgbClr val="23282E"/>
+                </a:solidFill>
+                <a:latin typeface="Corbel" pitchFamily="34" charset="0"/>
+                <a:ea typeface="Corbel" pitchFamily="34" charset="-122"/>
+                <a:cs typeface="Corbel" pitchFamily="34" charset="-120"/>
               </a:rPr>
               <a:t>Use a structured tool: CASP checklists, the Newcastle-Ottawa Scale, or Cochrane Risk of Bias 2</a:t>
             </a:r>
@@ -3152,19 +3246,22 @@
           <a:p>
             <a:pPr marL="342900" indent="-342900">
               <a:lnSpc>
-                <a:spcPct val="125000"/>
+                <a:spcPct val="130000"/>
               </a:lnSpc>
               <a:spcAft>
-                <a:spcPts val="800"/>
+                <a:spcPts val="1100"/>
               </a:spcAft>
               <a:buSzPct val="100000"/>
-              <a:buChar char="•"/>
+              <a:buChar char="–"/>
             </a:pPr>
             <a:r>
               <a:rPr lang="en-US" sz="1500" dirty="0">
                 <a:solidFill>
-                  <a:srgbClr val="374151"/>
-                </a:solidFill>
+                  <a:srgbClr val="23282E"/>
+                </a:solidFill>
+                <a:latin typeface="Corbel" pitchFamily="34" charset="0"/>
+                <a:ea typeface="Corbel" pitchFamily="34" charset="-122"/>
+                <a:cs typeface="Corbel" pitchFamily="34" charset="-120"/>
               </a:rPr>
               <a:t>Watch for predatory journals — check indexing, editorial board, and whether the publisher appears in DOAJ or on Cabells lists</a:t>
             </a:r>
@@ -3173,19 +3270,22 @@
           <a:p>
             <a:pPr marL="342900" indent="-342900">
               <a:lnSpc>
-                <a:spcPct val="125000"/>
+                <a:spcPct val="130000"/>
               </a:lnSpc>
               <a:spcAft>
-                <a:spcPts val="800"/>
+                <a:spcPts val="1100"/>
               </a:spcAft>
               <a:buSzPct val="100000"/>
-              <a:buChar char="•"/>
+              <a:buChar char="–"/>
             </a:pPr>
             <a:r>
               <a:rPr lang="en-US" sz="1500" dirty="0">
                 <a:solidFill>
-                  <a:srgbClr val="374151"/>
-                </a:solidFill>
+                  <a:srgbClr val="23282E"/>
+                </a:solidFill>
+                <a:latin typeface="Corbel" pitchFamily="34" charset="0"/>
+                <a:ea typeface="Corbel" pitchFamily="34" charset="-122"/>
+                <a:cs typeface="Corbel" pitchFamily="34" charset="-120"/>
               </a:rPr>
               <a:t>Note conflicts of interest and funding sources</a:t>
             </a:r>
@@ -3205,8 +3305,8 @@
         </p:nvSpPr>
         <p:spPr>
           <a:xfrm>
-            <a:off x="8503920" y="4709160"/>
-            <a:ext cx="800000" cy="300000"/>
+            <a:off x="566928" y="4700016"/>
+            <a:ext cx="914400" cy="274320"/>
           </a:xfrm>
           <a:prstGeom prst="rect">
             <a:avLst/>
@@ -3221,10 +3321,13 @@
           <a:bodyPr/>
           <a:lstStyle>
             <a:lvl1pPr>
-              <a:defRPr sz="1000">
-                <a:solidFill>
-                  <a:srgbClr val="6B7280"/>
-                </a:solidFill>
+              <a:defRPr sz="900">
+                <a:solidFill>
+                  <a:srgbClr val="5F6B76"/>
+                </a:solidFill>
+                <a:latin typeface="Corbel"/>
+                <a:ea typeface="Corbel"/>
+                <a:cs typeface="Corbel"/>
               </a:defRPr>
             </a:lvl1pPr>
           </a:lstStyle>
@@ -3271,8 +3374,8 @@
         </p:nvSpPr>
         <p:spPr>
           <a:xfrm>
-            <a:off x="502920" y="292608"/>
-            <a:ext cx="8046720" cy="228600"/>
+            <a:off x="566928" y="384048"/>
+            <a:ext cx="7772400" cy="237744"/>
           </a:xfrm>
           <a:prstGeom prst="rect">
             <a:avLst/>
@@ -3288,14 +3391,17 @@
               <a:buNone/>
             </a:pPr>
             <a:r>
-              <a:rPr lang="en-US" sz="1100" b="1" spc="150" kern="0" dirty="0">
-                <a:solidFill>
-                  <a:srgbClr val="0066CC"/>
-                </a:solidFill>
+              <a:rPr lang="en-US" sz="1000" spc="200" kern="0" dirty="0">
+                <a:solidFill>
+                  <a:srgbClr val="9A6A3C"/>
+                </a:solidFill>
+                <a:latin typeface="Corbel" pitchFamily="34" charset="0"/>
+                <a:ea typeface="Corbel" pitchFamily="34" charset="-122"/>
+                <a:cs typeface="Corbel" pitchFamily="34" charset="-120"/>
               </a:rPr>
               <a:t>UNIT 3</a:t>
             </a:r>
-            <a:endParaRPr lang="en-US" sz="1100" dirty="0"/>
+            <a:endParaRPr lang="en-US" sz="1000" dirty="0"/>
           </a:p>
         </p:txBody>
       </p:sp>
@@ -3307,8 +3413,8 @@
         </p:nvSpPr>
         <p:spPr>
           <a:xfrm>
-            <a:off x="502920" y="548640"/>
-            <a:ext cx="8046720" cy="640080"/>
+            <a:off x="566928" y="658368"/>
+            <a:ext cx="7772400" cy="658368"/>
           </a:xfrm>
           <a:prstGeom prst="rect">
             <a:avLst/>
@@ -3321,30 +3427,56 @@
           <a:lstStyle/>
           <a:p>
             <a:pPr indent="0" marL="0">
+              <a:lnSpc>
+                <a:spcPct val="100000"/>
+              </a:lnSpc>
               <a:buNone/>
             </a:pPr>
             <a:r>
-              <a:rPr lang="en-US" sz="2400" b="1" dirty="0">
-                <a:solidFill>
-                  <a:srgbClr val="111827"/>
-                </a:solidFill>
+              <a:rPr lang="en-US" sz="2500" dirty="0">
+                <a:solidFill>
+                  <a:srgbClr val="1C3140"/>
+                </a:solidFill>
+                <a:latin typeface="Constantia" pitchFamily="34" charset="0"/>
+                <a:ea typeface="Constantia" pitchFamily="34" charset="-122"/>
+                <a:cs typeface="Constantia" pitchFamily="34" charset="-120"/>
               </a:rPr>
               <a:t>Common failures (1/2)</a:t>
             </a:r>
-            <a:endParaRPr lang="en-US" sz="2400" dirty="0"/>
-          </a:p>
-        </p:txBody>
-      </p:sp>
-      <p:sp>
-        <p:nvSpPr>
-          <p:cNvPr id="4" name="Text 2"/>
+            <a:endParaRPr lang="en-US" sz="2500" dirty="0"/>
+          </a:p>
+        </p:txBody>
+      </p:sp>
+      <p:sp>
+        <p:nvSpPr>
+          <p:cNvPr id="4" name="Shape 2"/>
           <p:cNvSpPr/>
           <p:nvPr/>
         </p:nvSpPr>
         <p:spPr>
           <a:xfrm>
-            <a:off x="685800" y="1325880"/>
-            <a:ext cx="7772400" cy="3200400"/>
+            <a:off x="566928" y="1335024"/>
+            <a:ext cx="566928" cy="20117"/>
+          </a:xfrm>
+          <a:prstGeom prst="rect">
+            <a:avLst/>
+          </a:prstGeom>
+          <a:solidFill>
+            <a:srgbClr val="9A6A3C"/>
+          </a:solidFill>
+          <a:ln/>
+        </p:spPr>
+      </p:sp>
+      <p:sp>
+        <p:nvSpPr>
+          <p:cNvPr id="5" name="Text 3"/>
+          <p:cNvSpPr/>
+          <p:nvPr/>
+        </p:nvSpPr>
+        <p:spPr>
+          <a:xfrm>
+            <a:off x="713232" y="1664208"/>
+            <a:ext cx="7498080" cy="2788920"/>
           </a:xfrm>
           <a:prstGeom prst="rect">
             <a:avLst/>
@@ -3358,107 +3490,122 @@
           <a:p>
             <a:pPr marL="342900" indent="-342900">
               <a:lnSpc>
-                <a:spcPct val="125000"/>
+                <a:spcPct val="130000"/>
               </a:lnSpc>
               <a:spcAft>
-                <a:spcPts val="800"/>
+                <a:spcPts val="1100"/>
               </a:spcAft>
               <a:buSzPct val="100000"/>
-              <a:buChar char="•"/>
-            </a:pPr>
-            <a:r>
-              <a:rPr lang="en-US" sz="1700" dirty="0">
-                <a:solidFill>
-                  <a:srgbClr val="374151"/>
-                </a:solidFill>
+              <a:buChar char="–"/>
+            </a:pPr>
+            <a:r>
+              <a:rPr lang="en-US" sz="1650" dirty="0">
+                <a:solidFill>
+                  <a:srgbClr val="23282E"/>
+                </a:solidFill>
+                <a:latin typeface="Corbel" pitchFamily="34" charset="0"/>
+                <a:ea typeface="Corbel" pitchFamily="34" charset="-122"/>
+                <a:cs typeface="Corbel" pitchFamily="34" charset="-120"/>
               </a:rPr>
               <a:t>Listing rather than synthesising — the "annotated bibliography" review</a:t>
             </a:r>
-            <a:endParaRPr lang="en-US" sz="1700" dirty="0"/>
+            <a:endParaRPr lang="en-US" sz="1650" dirty="0"/>
           </a:p>
           <a:p>
             <a:pPr marL="342900" indent="-342900">
               <a:lnSpc>
-                <a:spcPct val="125000"/>
+                <a:spcPct val="130000"/>
               </a:lnSpc>
               <a:spcAft>
-                <a:spcPts val="800"/>
+                <a:spcPts val="1100"/>
               </a:spcAft>
               <a:buSzPct val="100000"/>
-              <a:buChar char="•"/>
-            </a:pPr>
-            <a:r>
-              <a:rPr lang="en-US" sz="1700" dirty="0">
-                <a:solidFill>
-                  <a:srgbClr val="374151"/>
-                </a:solidFill>
+              <a:buChar char="–"/>
+            </a:pPr>
+            <a:r>
+              <a:rPr lang="en-US" sz="1650" dirty="0">
+                <a:solidFill>
+                  <a:srgbClr val="23282E"/>
+                </a:solidFill>
+                <a:latin typeface="Corbel" pitchFamily="34" charset="0"/>
+                <a:ea typeface="Corbel" pitchFamily="34" charset="-122"/>
+                <a:cs typeface="Corbel" pitchFamily="34" charset="-120"/>
               </a:rPr>
               <a:t>Relying only on what is freely available, producing a review biased towards open-access journals</a:t>
             </a:r>
-            <a:endParaRPr lang="en-US" sz="1700" dirty="0"/>
+            <a:endParaRPr lang="en-US" sz="1650" dirty="0"/>
           </a:p>
           <a:p>
             <a:pPr marL="342900" indent="-342900">
               <a:lnSpc>
-                <a:spcPct val="125000"/>
+                <a:spcPct val="130000"/>
               </a:lnSpc>
               <a:spcAft>
-                <a:spcPts val="800"/>
+                <a:spcPts val="1100"/>
               </a:spcAft>
               <a:buSzPct val="100000"/>
-              <a:buChar char="•"/>
-            </a:pPr>
-            <a:r>
-              <a:rPr lang="en-US" sz="1700" dirty="0">
-                <a:solidFill>
-                  <a:srgbClr val="374151"/>
-                </a:solidFill>
+              <a:buChar char="–"/>
+            </a:pPr>
+            <a:r>
+              <a:rPr lang="en-US" sz="1650" dirty="0">
+                <a:solidFill>
+                  <a:srgbClr val="23282E"/>
+                </a:solidFill>
+                <a:latin typeface="Corbel" pitchFamily="34" charset="0"/>
+                <a:ea typeface="Corbel" pitchFamily="34" charset="-122"/>
+                <a:cs typeface="Corbel" pitchFamily="34" charset="-120"/>
               </a:rPr>
               <a:t>Citing abstracts without reading the full paper, and repeating a misreading from a secondary source</a:t>
             </a:r>
-            <a:endParaRPr lang="en-US" sz="1700" dirty="0"/>
+            <a:endParaRPr lang="en-US" sz="1650" dirty="0"/>
           </a:p>
           <a:p>
             <a:pPr marL="342900" indent="-342900">
               <a:lnSpc>
-                <a:spcPct val="125000"/>
+                <a:spcPct val="130000"/>
               </a:lnSpc>
               <a:spcAft>
-                <a:spcPts val="800"/>
+                <a:spcPts val="1100"/>
               </a:spcAft>
               <a:buSzPct val="100000"/>
-              <a:buChar char="•"/>
-            </a:pPr>
-            <a:r>
-              <a:rPr lang="en-US" sz="1700" dirty="0">
-                <a:solidFill>
-                  <a:srgbClr val="374151"/>
-                </a:solidFill>
+              <a:buChar char="–"/>
+            </a:pPr>
+            <a:r>
+              <a:rPr lang="en-US" sz="1650" dirty="0">
+                <a:solidFill>
+                  <a:srgbClr val="23282E"/>
+                </a:solidFill>
+                <a:latin typeface="Corbel" pitchFamily="34" charset="0"/>
+                <a:ea typeface="Corbel" pitchFamily="34" charset="-122"/>
+                <a:cs typeface="Corbel" pitchFamily="34" charset="-120"/>
               </a:rPr>
               <a:t>Ignoring evidence that contradicts your position, which reviewers will notice</a:t>
             </a:r>
-            <a:endParaRPr lang="en-US" sz="1700" dirty="0"/>
+            <a:endParaRPr lang="en-US" sz="1650" dirty="0"/>
           </a:p>
           <a:p>
             <a:pPr marL="342900" indent="-342900">
               <a:lnSpc>
-                <a:spcPct val="125000"/>
+                <a:spcPct val="130000"/>
               </a:lnSpc>
               <a:spcAft>
-                <a:spcPts val="800"/>
+                <a:spcPts val="1100"/>
               </a:spcAft>
               <a:buSzPct val="100000"/>
-              <a:buChar char="•"/>
-            </a:pPr>
-            <a:r>
-              <a:rPr lang="en-US" sz="1700" dirty="0">
-                <a:solidFill>
-                  <a:srgbClr val="374151"/>
-                </a:solidFill>
+              <a:buChar char="–"/>
+            </a:pPr>
+            <a:r>
+              <a:rPr lang="en-US" sz="1650" dirty="0">
+                <a:solidFill>
+                  <a:srgbClr val="23282E"/>
+                </a:solidFill>
+                <a:latin typeface="Corbel" pitchFamily="34" charset="0"/>
+                <a:ea typeface="Corbel" pitchFamily="34" charset="-122"/>
+                <a:cs typeface="Corbel" pitchFamily="34" charset="-120"/>
               </a:rPr>
               <a:t>Reviewing only recent work and losing the origin of a debate</a:t>
             </a:r>
-            <a:endParaRPr lang="en-US" sz="1700" dirty="0"/>
+            <a:endParaRPr lang="en-US" sz="1650" dirty="0"/>
           </a:p>
         </p:txBody>
       </p:sp>
@@ -3474,8 +3621,8 @@
         </p:nvSpPr>
         <p:spPr>
           <a:xfrm>
-            <a:off x="8503920" y="4709160"/>
-            <a:ext cx="800000" cy="300000"/>
+            <a:off x="566928" y="4700016"/>
+            <a:ext cx="914400" cy="274320"/>
           </a:xfrm>
           <a:prstGeom prst="rect">
             <a:avLst/>
@@ -3490,10 +3637,13 @@
           <a:bodyPr/>
           <a:lstStyle>
             <a:lvl1pPr>
-              <a:defRPr sz="1000">
-                <a:solidFill>
-                  <a:srgbClr val="6B7280"/>
-                </a:solidFill>
+              <a:defRPr sz="900">
+                <a:solidFill>
+                  <a:srgbClr val="5F6B76"/>
+                </a:solidFill>
+                <a:latin typeface="Corbel"/>
+                <a:ea typeface="Corbel"/>
+                <a:cs typeface="Corbel"/>
               </a:defRPr>
             </a:lvl1pPr>
           </a:lstStyle>
@@ -3540,8 +3690,8 @@
         </p:nvSpPr>
         <p:spPr>
           <a:xfrm>
-            <a:off x="502920" y="292608"/>
-            <a:ext cx="8046720" cy="228600"/>
+            <a:off x="566928" y="384048"/>
+            <a:ext cx="7772400" cy="237744"/>
           </a:xfrm>
           <a:prstGeom prst="rect">
             <a:avLst/>
@@ -3557,14 +3707,17 @@
               <a:buNone/>
             </a:pPr>
             <a:r>
-              <a:rPr lang="en-US" sz="1100" b="1" spc="150" kern="0" dirty="0">
-                <a:solidFill>
-                  <a:srgbClr val="0066CC"/>
-                </a:solidFill>
+              <a:rPr lang="en-US" sz="1000" spc="200" kern="0" dirty="0">
+                <a:solidFill>
+                  <a:srgbClr val="9A6A3C"/>
+                </a:solidFill>
+                <a:latin typeface="Corbel" pitchFamily="34" charset="0"/>
+                <a:ea typeface="Corbel" pitchFamily="34" charset="-122"/>
+                <a:cs typeface="Corbel" pitchFamily="34" charset="-120"/>
               </a:rPr>
               <a:t>UNIT 3</a:t>
             </a:r>
-            <a:endParaRPr lang="en-US" sz="1100" dirty="0"/>
+            <a:endParaRPr lang="en-US" sz="1000" dirty="0"/>
           </a:p>
         </p:txBody>
       </p:sp>
@@ -3576,8 +3729,8 @@
         </p:nvSpPr>
         <p:spPr>
           <a:xfrm>
-            <a:off x="502920" y="548640"/>
-            <a:ext cx="8046720" cy="640080"/>
+            <a:off x="566928" y="658368"/>
+            <a:ext cx="7772400" cy="658368"/>
           </a:xfrm>
           <a:prstGeom prst="rect">
             <a:avLst/>
@@ -3590,30 +3743,56 @@
           <a:lstStyle/>
           <a:p>
             <a:pPr indent="0" marL="0">
+              <a:lnSpc>
+                <a:spcPct val="100000"/>
+              </a:lnSpc>
               <a:buNone/>
             </a:pPr>
             <a:r>
-              <a:rPr lang="en-US" sz="2400" b="1" dirty="0">
-                <a:solidFill>
-                  <a:srgbClr val="111827"/>
-                </a:solidFill>
+              <a:rPr lang="en-US" sz="2500" dirty="0">
+                <a:solidFill>
+                  <a:srgbClr val="1C3140"/>
+                </a:solidFill>
+                <a:latin typeface="Constantia" pitchFamily="34" charset="0"/>
+                <a:ea typeface="Constantia" pitchFamily="34" charset="-122"/>
+                <a:cs typeface="Constantia" pitchFamily="34" charset="-120"/>
               </a:rPr>
               <a:t>Common failures (2/2)</a:t>
             </a:r>
-            <a:endParaRPr lang="en-US" sz="2400" dirty="0"/>
-          </a:p>
-        </p:txBody>
-      </p:sp>
-      <p:sp>
-        <p:nvSpPr>
-          <p:cNvPr id="4" name="Text 2"/>
+            <a:endParaRPr lang="en-US" sz="2500" dirty="0"/>
+          </a:p>
+        </p:txBody>
+      </p:sp>
+      <p:sp>
+        <p:nvSpPr>
+          <p:cNvPr id="4" name="Shape 2"/>
           <p:cNvSpPr/>
           <p:nvPr/>
         </p:nvSpPr>
         <p:spPr>
           <a:xfrm>
-            <a:off x="685800" y="1325880"/>
-            <a:ext cx="7772400" cy="3200400"/>
+            <a:off x="566928" y="1335024"/>
+            <a:ext cx="566928" cy="20117"/>
+          </a:xfrm>
+          <a:prstGeom prst="rect">
+            <a:avLst/>
+          </a:prstGeom>
+          <a:solidFill>
+            <a:srgbClr val="9A6A3C"/>
+          </a:solidFill>
+          <a:ln/>
+        </p:spPr>
+      </p:sp>
+      <p:sp>
+        <p:nvSpPr>
+          <p:cNvPr id="5" name="Text 3"/>
+          <p:cNvSpPr/>
+          <p:nvPr/>
+        </p:nvSpPr>
+        <p:spPr>
+          <a:xfrm>
+            <a:off x="713232" y="1664208"/>
+            <a:ext cx="7498080" cy="2788920"/>
           </a:xfrm>
           <a:prstGeom prst="rect">
             <a:avLst/>
@@ -3627,23 +3806,26 @@
           <a:p>
             <a:pPr marL="342900" indent="-342900">
               <a:lnSpc>
-                <a:spcPct val="125000"/>
+                <a:spcPct val="130000"/>
               </a:lnSpc>
               <a:spcAft>
-                <a:spcPts val="800"/>
+                <a:spcPts val="1100"/>
               </a:spcAft>
               <a:buSzPct val="100000"/>
-              <a:buChar char="•"/>
-            </a:pPr>
-            <a:r>
-              <a:rPr lang="en-US" sz="1700" dirty="0">
-                <a:solidFill>
-                  <a:srgbClr val="374151"/>
-                </a:solidFill>
+              <a:buChar char="–"/>
+            </a:pPr>
+            <a:r>
+              <a:rPr lang="en-US" sz="1650" dirty="0">
+                <a:solidFill>
+                  <a:srgbClr val="23282E"/>
+                </a:solidFill>
+                <a:latin typeface="Corbel" pitchFamily="34" charset="0"/>
+                <a:ea typeface="Corbel" pitchFamily="34" charset="-122"/>
+                <a:cs typeface="Corbel" pitchFamily="34" charset="-120"/>
               </a:rPr>
               <a:t>Letting the review stop when data collection begins — it must be updated before submission</a:t>
             </a:r>
-            <a:endParaRPr lang="en-US" sz="1700" dirty="0"/>
+            <a:endParaRPr lang="en-US" sz="1650" dirty="0"/>
           </a:p>
         </p:txBody>
       </p:sp>
@@ -3659,8 +3841,8 @@
         </p:nvSpPr>
         <p:spPr>
           <a:xfrm>
-            <a:off x="8503920" y="4709160"/>
-            <a:ext cx="800000" cy="300000"/>
+            <a:off x="566928" y="4700016"/>
+            <a:ext cx="914400" cy="274320"/>
           </a:xfrm>
           <a:prstGeom prst="rect">
             <a:avLst/>
@@ -3675,10 +3857,13 @@
           <a:bodyPr/>
           <a:lstStyle>
             <a:lvl1pPr>
-              <a:defRPr sz="1000">
-                <a:solidFill>
-                  <a:srgbClr val="6B7280"/>
-                </a:solidFill>
+              <a:defRPr sz="900">
+                <a:solidFill>
+                  <a:srgbClr val="5F6B76"/>
+                </a:solidFill>
+                <a:latin typeface="Corbel"/>
+                <a:ea typeface="Corbel"/>
+                <a:cs typeface="Corbel"/>
               </a:defRPr>
             </a:lvl1pPr>
           </a:lstStyle>
@@ -3725,8 +3910,8 @@
         </p:nvSpPr>
         <p:spPr>
           <a:xfrm>
-            <a:off x="502920" y="292608"/>
-            <a:ext cx="8046720" cy="228600"/>
+            <a:off x="566928" y="384048"/>
+            <a:ext cx="7772400" cy="237744"/>
           </a:xfrm>
           <a:prstGeom prst="rect">
             <a:avLst/>
@@ -3742,14 +3927,17 @@
               <a:buNone/>
             </a:pPr>
             <a:r>
-              <a:rPr lang="en-US" sz="1100" b="1" spc="150" kern="0" dirty="0">
-                <a:solidFill>
-                  <a:srgbClr val="00A86B"/>
-                </a:solidFill>
+              <a:rPr lang="en-US" sz="1000" spc="200" kern="0" dirty="0">
+                <a:solidFill>
+                  <a:srgbClr val="9A6A3C"/>
+                </a:solidFill>
+                <a:latin typeface="Corbel" pitchFamily="34" charset="0"/>
+                <a:ea typeface="Corbel" pitchFamily="34" charset="-122"/>
+                <a:cs typeface="Corbel" pitchFamily="34" charset="-120"/>
               </a:rPr>
               <a:t>UNIT 3  ·  WORKED EXAMPLE</a:t>
             </a:r>
-            <a:endParaRPr lang="en-US" sz="1100" dirty="0"/>
+            <a:endParaRPr lang="en-US" sz="1000" dirty="0"/>
           </a:p>
         </p:txBody>
       </p:sp>
@@ -3761,8 +3949,8 @@
         </p:nvSpPr>
         <p:spPr>
           <a:xfrm>
-            <a:off x="502920" y="548640"/>
-            <a:ext cx="8046720" cy="566928"/>
+            <a:off x="566928" y="658368"/>
+            <a:ext cx="7772400" cy="658368"/>
           </a:xfrm>
           <a:prstGeom prst="rect">
             <a:avLst/>
@@ -3775,17 +3963,23 @@
           <a:lstStyle/>
           <a:p>
             <a:pPr indent="0" marL="0">
+              <a:lnSpc>
+                <a:spcPct val="100000"/>
+              </a:lnSpc>
               <a:buNone/>
             </a:pPr>
             <a:r>
-              <a:rPr lang="en-US" sz="2300" b="1" dirty="0">
-                <a:solidFill>
-                  <a:srgbClr val="111827"/>
-                </a:solidFill>
+              <a:rPr lang="en-US" sz="2500" dirty="0">
+                <a:solidFill>
+                  <a:srgbClr val="1C3140"/>
+                </a:solidFill>
+                <a:latin typeface="Constantia" pitchFamily="34" charset="0"/>
+                <a:ea typeface="Constantia" pitchFamily="34" charset="-122"/>
+                <a:cs typeface="Constantia" pitchFamily="34" charset="-120"/>
               </a:rPr>
               <a:t>Turning five papers into one paragraph</a:t>
             </a:r>
-            <a:endParaRPr lang="en-US" sz="2300" dirty="0"/>
+            <a:endParaRPr lang="en-US" sz="2500" dirty="0"/>
           </a:p>
         </p:txBody>
       </p:sp>
@@ -3797,21 +3991,16 @@
         </p:nvSpPr>
         <p:spPr>
           <a:xfrm>
-            <a:off x="502920" y="1207008"/>
-            <a:ext cx="8138160" cy="3200400"/>
+            <a:off x="566928" y="1335024"/>
+            <a:ext cx="566928" cy="20117"/>
           </a:xfrm>
           <a:prstGeom prst="rect">
             <a:avLst/>
           </a:prstGeom>
           <a:solidFill>
-            <a:srgbClr val="F3F7FC"/>
+            <a:srgbClr val="9A6A3C"/>
           </a:solidFill>
-          <a:ln w="9525">
-            <a:solidFill>
-              <a:srgbClr val="0066CC"/>
-            </a:solidFill>
-            <a:prstDash val="solid"/>
-          </a:ln>
+          <a:ln/>
         </p:spPr>
       </p:sp>
       <p:sp>
@@ -3822,8 +4011,8 @@
         </p:nvSpPr>
         <p:spPr>
           <a:xfrm>
-            <a:off x="731520" y="1371600"/>
-            <a:ext cx="7680960" cy="1005840"/>
+            <a:off x="566928" y="1645920"/>
+            <a:ext cx="8010144" cy="822960"/>
           </a:xfrm>
           <a:prstGeom prst="rect">
             <a:avLst/>
@@ -3836,137 +4025,170 @@
           <a:lstStyle/>
           <a:p>
             <a:pPr indent="0" marL="0">
+              <a:lnSpc>
+                <a:spcPct val="124000"/>
+              </a:lnSpc>
+              <a:buNone/>
+            </a:pPr>
+            <a:r>
+              <a:rPr lang="en-US" sz="1300" i="1" dirty="0">
+                <a:solidFill>
+                  <a:srgbClr val="5F6B76"/>
+                </a:solidFill>
+                <a:latin typeface="Constantia" pitchFamily="34" charset="0"/>
+                <a:ea typeface="Constantia" pitchFamily="34" charset="-122"/>
+                <a:cs typeface="Constantia" pitchFamily="34" charset="-120"/>
+              </a:rPr>
+              <a:t>A student has read five studies on adherence to hypertension medication and has written five paragraphs, one per study, each beginning with an author name.</a:t>
+            </a:r>
+            <a:endParaRPr lang="en-US" sz="1300" dirty="0"/>
+          </a:p>
+        </p:txBody>
+      </p:sp>
+      <p:sp>
+        <p:nvSpPr>
+          <p:cNvPr id="6" name="Text 4"/>
+          <p:cNvSpPr/>
+          <p:nvPr/>
+        </p:nvSpPr>
+        <p:spPr>
+          <a:xfrm>
+            <a:off x="786384" y="2523744"/>
+            <a:ext cx="7406640" cy="1920240"/>
+          </a:xfrm>
+          <a:prstGeom prst="rect">
+            <a:avLst/>
+          </a:prstGeom>
+          <a:noFill/>
+          <a:ln/>
+        </p:spPr>
+        <p:txBody>
+          <a:bodyPr wrap="square" rtlCol="0" anchor="t"/>
+          <a:lstStyle/>
+          <a:p>
+            <a:pPr marL="342900" indent="-342900">
               <a:lnSpc>
                 <a:spcPct val="120000"/>
               </a:lnSpc>
-              <a:buNone/>
-            </a:pPr>
-            <a:r>
-              <a:rPr lang="en-US" sz="1400" i="1" dirty="0">
-                <a:solidFill>
-                  <a:srgbClr val="374151"/>
-                </a:solidFill>
-              </a:rPr>
-              <a:t>A student has read five studies on adherence to hypertension medication and has written five paragraphs, one per study, each beginning with an author name.</a:t>
-            </a:r>
-            <a:endParaRPr lang="en-US" sz="1400" dirty="0"/>
-          </a:p>
-        </p:txBody>
-      </p:sp>
-      <p:sp>
-        <p:nvSpPr>
-          <p:cNvPr id="6" name="Text 4"/>
-          <p:cNvSpPr/>
-          <p:nvPr/>
-        </p:nvSpPr>
-        <p:spPr>
-          <a:xfrm>
-            <a:off x="868680" y="2395728"/>
-            <a:ext cx="7452360" cy="1920240"/>
-          </a:xfrm>
-          <a:prstGeom prst="rect">
-            <a:avLst/>
-          </a:prstGeom>
-          <a:noFill/>
-          <a:ln/>
-        </p:spPr>
-        <p:txBody>
-          <a:bodyPr wrap="square" rtlCol="0" anchor="t"/>
-          <a:lstStyle/>
-          <a:p>
-            <a:pPr marL="342900" indent="-342900">
-              <a:lnSpc>
-                <a:spcPct val="115000"/>
-              </a:lnSpc>
+              <a:spcAft>
+                <a:spcPts val="500"/>
+              </a:spcAft>
               <a:buSzPct val="100000"/>
               <a:buFont typeface="+mj-lt"/>
               <a:buAutoNum type="arabicPeriod" startAt="1"/>
             </a:pPr>
             <a:r>
-              <a:rPr lang="en-US" sz="1300" dirty="0">
-                <a:solidFill>
-                  <a:srgbClr val="374151"/>
-                </a:solidFill>
+              <a:rPr lang="en-US" sz="1250" dirty="0">
+                <a:solidFill>
+                  <a:srgbClr val="23282E"/>
+                </a:solidFill>
+                <a:latin typeface="Corbel" pitchFamily="34" charset="0"/>
+                <a:ea typeface="Corbel" pitchFamily="34" charset="-122"/>
+                <a:cs typeface="Corbel" pitchFamily="34" charset="-120"/>
               </a:rPr>
               <a:t>Build a matrix: rows are the five studies, columns are design, setting, sample, adherence measure and main finding.</a:t>
             </a:r>
-            <a:endParaRPr lang="en-US" sz="1300" dirty="0"/>
+            <a:endParaRPr lang="en-US" sz="1250" dirty="0"/>
           </a:p>
           <a:p>
             <a:pPr marL="342900" indent="-342900">
               <a:lnSpc>
-                <a:spcPct val="115000"/>
+                <a:spcPct val="120000"/>
               </a:lnSpc>
+              <a:spcAft>
+                <a:spcPts val="500"/>
+              </a:spcAft>
               <a:buSzPct val="100000"/>
               <a:buFont typeface="+mj-lt"/>
               <a:buAutoNum type="arabicPeriod" startAt="1"/>
             </a:pPr>
             <a:r>
-              <a:rPr lang="en-US" sz="1300" dirty="0">
-                <a:solidFill>
-                  <a:srgbClr val="374151"/>
-                </a:solidFill>
+              <a:rPr lang="en-US" sz="1250" dirty="0">
+                <a:solidFill>
+                  <a:srgbClr val="23282E"/>
+                </a:solidFill>
+                <a:latin typeface="Corbel" pitchFamily="34" charset="0"/>
+                <a:ea typeface="Corbel" pitchFamily="34" charset="-122"/>
+                <a:cs typeface="Corbel" pitchFamily="34" charset="-120"/>
               </a:rPr>
               <a:t>Reading down the "adherence measure" column shows three used self-report and two used pill counts.</a:t>
             </a:r>
-            <a:endParaRPr lang="en-US" sz="1300" dirty="0"/>
+            <a:endParaRPr lang="en-US" sz="1250" dirty="0"/>
           </a:p>
           <a:p>
             <a:pPr marL="342900" indent="-342900">
               <a:lnSpc>
-                <a:spcPct val="115000"/>
+                <a:spcPct val="120000"/>
               </a:lnSpc>
+              <a:spcAft>
+                <a:spcPts val="500"/>
+              </a:spcAft>
               <a:buSzPct val="100000"/>
               <a:buFont typeface="+mj-lt"/>
               <a:buAutoNum type="arabicPeriod" startAt="1"/>
             </a:pPr>
             <a:r>
-              <a:rPr lang="en-US" sz="1300" dirty="0">
-                <a:solidFill>
-                  <a:srgbClr val="374151"/>
-                </a:solidFill>
+              <a:rPr lang="en-US" sz="1250" dirty="0">
+                <a:solidFill>
+                  <a:srgbClr val="23282E"/>
+                </a:solidFill>
+                <a:latin typeface="Corbel" pitchFamily="34" charset="0"/>
+                <a:ea typeface="Corbel" pitchFamily="34" charset="-122"/>
+                <a:cs typeface="Corbel" pitchFamily="34" charset="-120"/>
               </a:rPr>
               <a:t>Reading down "main finding" shows the self-report studies all report higher adherence than the pill-count studies.</a:t>
             </a:r>
-            <a:endParaRPr lang="en-US" sz="1300" dirty="0"/>
+            <a:endParaRPr lang="en-US" sz="1250" dirty="0"/>
           </a:p>
           <a:p>
             <a:pPr marL="342900" indent="-342900">
               <a:lnSpc>
-                <a:spcPct val="115000"/>
+                <a:spcPct val="120000"/>
               </a:lnSpc>
+              <a:spcAft>
+                <a:spcPts val="500"/>
+              </a:spcAft>
               <a:buSzPct val="100000"/>
               <a:buFont typeface="+mj-lt"/>
               <a:buAutoNum type="arabicPeriod" startAt="1"/>
             </a:pPr>
             <a:r>
-              <a:rPr lang="en-US" sz="1300" dirty="0">
-                <a:solidFill>
-                  <a:srgbClr val="374151"/>
-                </a:solidFill>
+              <a:rPr lang="en-US" sz="1250" dirty="0">
+                <a:solidFill>
+                  <a:srgbClr val="23282E"/>
+                </a:solidFill>
+                <a:latin typeface="Corbel" pitchFamily="34" charset="0"/>
+                <a:ea typeface="Corbel" pitchFamily="34" charset="-122"/>
+                <a:cs typeface="Corbel" pitchFamily="34" charset="-120"/>
               </a:rPr>
               <a:t>That comparison is the paragraph: "Reported adherence varies with how it was measured, with self-report consistently higher than objective measures (refs) — a pattern that complicates comparison across settings."</a:t>
             </a:r>
-            <a:endParaRPr lang="en-US" sz="1300" dirty="0"/>
+            <a:endParaRPr lang="en-US" sz="1250" dirty="0"/>
           </a:p>
           <a:p>
             <a:pPr marL="342900" indent="-342900">
               <a:lnSpc>
-                <a:spcPct val="115000"/>
+                <a:spcPct val="120000"/>
               </a:lnSpc>
+              <a:spcAft>
+                <a:spcPts val="500"/>
+              </a:spcAft>
               <a:buSzPct val="100000"/>
               <a:buFont typeface="+mj-lt"/>
               <a:buAutoNum type="arabicPeriod" startAt="1"/>
             </a:pPr>
             <a:r>
-              <a:rPr lang="en-US" sz="1300" dirty="0">
-                <a:solidFill>
-                  <a:srgbClr val="374151"/>
-                </a:solidFill>
+              <a:rPr lang="en-US" sz="1250" dirty="0">
+                <a:solidFill>
+                  <a:srgbClr val="23282E"/>
+                </a:solidFill>
+                <a:latin typeface="Corbel" pitchFamily="34" charset="0"/>
+                <a:ea typeface="Corbel" pitchFamily="34" charset="-122"/>
+                <a:cs typeface="Corbel" pitchFamily="34" charset="-120"/>
               </a:rPr>
               <a:t>No sentence in that paragraph has an author as its subject. The studies are evidence for a claim, not the topic of the writing.</a:t>
             </a:r>
-            <a:endParaRPr lang="en-US" sz="1300" dirty="0"/>
+            <a:endParaRPr lang="en-US" sz="1250" dirty="0"/>
           </a:p>
         </p:txBody>
       </p:sp>
@@ -3982,8 +4204,8 @@
         </p:nvSpPr>
         <p:spPr>
           <a:xfrm>
-            <a:off x="8503920" y="4709160"/>
-            <a:ext cx="800000" cy="300000"/>
+            <a:off x="566928" y="4700016"/>
+            <a:ext cx="914400" cy="274320"/>
           </a:xfrm>
           <a:prstGeom prst="rect">
             <a:avLst/>
@@ -3998,10 +4220,13 @@
           <a:bodyPr/>
           <a:lstStyle>
             <a:lvl1pPr>
-              <a:defRPr sz="1000">
-                <a:solidFill>
-                  <a:srgbClr val="6B7280"/>
-                </a:solidFill>
+              <a:defRPr sz="900">
+                <a:solidFill>
+                  <a:srgbClr val="5F6B76"/>
+                </a:solidFill>
+                <a:latin typeface="Corbel"/>
+                <a:ea typeface="Corbel"/>
+                <a:cs typeface="Corbel"/>
               </a:defRPr>
             </a:lvl1pPr>
           </a:lstStyle>
@@ -4048,8 +4273,8 @@
         </p:nvSpPr>
         <p:spPr>
           <a:xfrm>
-            <a:off x="502920" y="292608"/>
-            <a:ext cx="8046720" cy="228600"/>
+            <a:off x="566928" y="384048"/>
+            <a:ext cx="7772400" cy="237744"/>
           </a:xfrm>
           <a:prstGeom prst="rect">
             <a:avLst/>
@@ -4065,14 +4290,17 @@
               <a:buNone/>
             </a:pPr>
             <a:r>
-              <a:rPr lang="en-US" sz="1100" b="1" spc="150" kern="0" dirty="0">
-                <a:solidFill>
-                  <a:srgbClr val="00A86B"/>
-                </a:solidFill>
+              <a:rPr lang="en-US" sz="1000" spc="200" kern="0" dirty="0">
+                <a:solidFill>
+                  <a:srgbClr val="9A6A3C"/>
+                </a:solidFill>
+                <a:latin typeface="Corbel" pitchFamily="34" charset="0"/>
+                <a:ea typeface="Corbel" pitchFamily="34" charset="-122"/>
+                <a:cs typeface="Corbel" pitchFamily="34" charset="-120"/>
               </a:rPr>
               <a:t>UNIT 3  ·  WORKED EXAMPLE</a:t>
             </a:r>
-            <a:endParaRPr lang="en-US" sz="1100" dirty="0"/>
+            <a:endParaRPr lang="en-US" sz="1000" dirty="0"/>
           </a:p>
         </p:txBody>
       </p:sp>
@@ -4084,8 +4312,8 @@
         </p:nvSpPr>
         <p:spPr>
           <a:xfrm>
-            <a:off x="502920" y="548640"/>
-            <a:ext cx="8046720" cy="566928"/>
+            <a:off x="566928" y="658368"/>
+            <a:ext cx="7772400" cy="658368"/>
           </a:xfrm>
           <a:prstGeom prst="rect">
             <a:avLst/>
@@ -4098,17 +4326,23 @@
           <a:lstStyle/>
           <a:p>
             <a:pPr indent="0" marL="0">
+              <a:lnSpc>
+                <a:spcPct val="100000"/>
+              </a:lnSpc>
               <a:buNone/>
             </a:pPr>
             <a:r>
-              <a:rPr lang="en-US" sz="2300" b="1" dirty="0">
-                <a:solidFill>
-                  <a:srgbClr val="111827"/>
-                </a:solidFill>
+              <a:rPr lang="en-US" sz="2500" dirty="0">
+                <a:solidFill>
+                  <a:srgbClr val="1C3140"/>
+                </a:solidFill>
+                <a:latin typeface="Constantia" pitchFamily="34" charset="0"/>
+                <a:ea typeface="Constantia" pitchFamily="34" charset="-122"/>
+                <a:cs typeface="Constantia" pitchFamily="34" charset="-120"/>
               </a:rPr>
               <a:t>Choosing the review your timeline can survive</a:t>
             </a:r>
-            <a:endParaRPr lang="en-US" sz="2300" dirty="0"/>
+            <a:endParaRPr lang="en-US" sz="2500" dirty="0"/>
           </a:p>
         </p:txBody>
       </p:sp>
@@ -4120,21 +4354,16 @@
         </p:nvSpPr>
         <p:spPr>
           <a:xfrm>
-            <a:off x="502920" y="1207008"/>
-            <a:ext cx="8138160" cy="3200400"/>
+            <a:off x="566928" y="1335024"/>
+            <a:ext cx="566928" cy="20117"/>
           </a:xfrm>
           <a:prstGeom prst="rect">
             <a:avLst/>
           </a:prstGeom>
           <a:solidFill>
-            <a:srgbClr val="F3F7FC"/>
+            <a:srgbClr val="9A6A3C"/>
           </a:solidFill>
-          <a:ln w="9525">
-            <a:solidFill>
-              <a:srgbClr val="0066CC"/>
-            </a:solidFill>
-            <a:prstDash val="solid"/>
-          </a:ln>
+          <a:ln/>
         </p:spPr>
       </p:sp>
       <p:sp>
@@ -4145,8 +4374,8 @@
         </p:nvSpPr>
         <p:spPr>
           <a:xfrm>
-            <a:off x="731520" y="1371600"/>
-            <a:ext cx="7680960" cy="1005840"/>
+            <a:off x="566928" y="1645920"/>
+            <a:ext cx="8010144" cy="822960"/>
           </a:xfrm>
           <a:prstGeom prst="rect">
             <a:avLst/>
@@ -4159,137 +4388,170 @@
           <a:lstStyle/>
           <a:p>
             <a:pPr indent="0" marL="0">
+              <a:lnSpc>
+                <a:spcPct val="124000"/>
+              </a:lnSpc>
+              <a:buNone/>
+            </a:pPr>
+            <a:r>
+              <a:rPr lang="en-US" sz="1300" i="1" dirty="0">
+                <a:solidFill>
+                  <a:srgbClr val="5F6B76"/>
+                </a:solidFill>
+                <a:latin typeface="Constantia" pitchFamily="34" charset="0"/>
+                <a:ea typeface="Constantia" pitchFamily="34" charset="-122"/>
+                <a:cs typeface="Constantia" pitchFamily="34" charset="-120"/>
+              </a:rPr>
+              <a:t>A student with nine months until submission proposes "a systematic review and meta-analysis of interventions to reduce malaria in under-fives across sub-Saharan Africa".</a:t>
+            </a:r>
+            <a:endParaRPr lang="en-US" sz="1300" dirty="0"/>
+          </a:p>
+        </p:txBody>
+      </p:sp>
+      <p:sp>
+        <p:nvSpPr>
+          <p:cNvPr id="6" name="Text 4"/>
+          <p:cNvSpPr/>
+          <p:nvPr/>
+        </p:nvSpPr>
+        <p:spPr>
+          <a:xfrm>
+            <a:off x="786384" y="2523744"/>
+            <a:ext cx="7406640" cy="1920240"/>
+          </a:xfrm>
+          <a:prstGeom prst="rect">
+            <a:avLst/>
+          </a:prstGeom>
+          <a:noFill/>
+          <a:ln/>
+        </p:spPr>
+        <p:txBody>
+          <a:bodyPr wrap="square" rtlCol="0" anchor="t"/>
+          <a:lstStyle/>
+          <a:p>
+            <a:pPr marL="342900" indent="-342900">
               <a:lnSpc>
                 <a:spcPct val="120000"/>
               </a:lnSpc>
-              <a:buNone/>
-            </a:pPr>
-            <a:r>
-              <a:rPr lang="en-US" sz="1400" i="1" dirty="0">
-                <a:solidFill>
-                  <a:srgbClr val="374151"/>
-                </a:solidFill>
-              </a:rPr>
-              <a:t>A student with nine months until submission proposes "a systematic review and meta-analysis of interventions to reduce malaria in under-fives across sub-Saharan Africa".</a:t>
-            </a:r>
-            <a:endParaRPr lang="en-US" sz="1400" dirty="0"/>
-          </a:p>
-        </p:txBody>
-      </p:sp>
-      <p:sp>
-        <p:nvSpPr>
-          <p:cNvPr id="6" name="Text 4"/>
-          <p:cNvSpPr/>
-          <p:nvPr/>
-        </p:nvSpPr>
-        <p:spPr>
-          <a:xfrm>
-            <a:off x="868680" y="2395728"/>
-            <a:ext cx="7452360" cy="1920240"/>
-          </a:xfrm>
-          <a:prstGeom prst="rect">
-            <a:avLst/>
-          </a:prstGeom>
-          <a:noFill/>
-          <a:ln/>
-        </p:spPr>
-        <p:txBody>
-          <a:bodyPr wrap="square" rtlCol="0" anchor="t"/>
-          <a:lstStyle/>
-          <a:p>
-            <a:pPr marL="342900" indent="-342900">
-              <a:lnSpc>
-                <a:spcPct val="115000"/>
-              </a:lnSpc>
+              <a:spcAft>
+                <a:spcPts val="500"/>
+              </a:spcAft>
               <a:buSzPct val="100000"/>
               <a:buFont typeface="+mj-lt"/>
               <a:buAutoNum type="arabicPeriod" startAt="1"/>
             </a:pPr>
             <a:r>
-              <a:rPr lang="en-US" sz="1300" dirty="0">
-                <a:solidFill>
-                  <a:srgbClr val="374151"/>
-                </a:solidFill>
+              <a:rPr lang="en-US" sz="1250" dirty="0">
+                <a:solidFill>
+                  <a:srgbClr val="23282E"/>
+                </a:solidFill>
+                <a:latin typeface="Corbel" pitchFamily="34" charset="0"/>
+                <a:ea typeface="Corbel" pitchFamily="34" charset="-122"/>
+                <a:cs typeface="Corbel" pitchFamily="34" charset="-120"/>
               </a:rPr>
               <a:t>A proper systematic review needs a protocol, two independent screeners, dual data extraction and risk-of-bias assessment.</a:t>
             </a:r>
-            <a:endParaRPr lang="en-US" sz="1300" dirty="0"/>
+            <a:endParaRPr lang="en-US" sz="1250" dirty="0"/>
           </a:p>
           <a:p>
             <a:pPr marL="342900" indent="-342900">
               <a:lnSpc>
-                <a:spcPct val="115000"/>
+                <a:spcPct val="120000"/>
               </a:lnSpc>
+              <a:spcAft>
+                <a:spcPts val="500"/>
+              </a:spcAft>
               <a:buSzPct val="100000"/>
               <a:buFont typeface="+mj-lt"/>
               <a:buAutoNum type="arabicPeriod" startAt="1"/>
             </a:pPr>
             <a:r>
-              <a:rPr lang="en-US" sz="1300" dirty="0">
-                <a:solidFill>
-                  <a:srgbClr val="374151"/>
-                </a:solidFill>
+              <a:rPr lang="en-US" sz="1250" dirty="0">
+                <a:solidFill>
+                  <a:srgbClr val="23282E"/>
+                </a:solidFill>
+                <a:latin typeface="Corbel" pitchFamily="34" charset="0"/>
+                <a:ea typeface="Corbel" pitchFamily="34" charset="-122"/>
+                <a:cs typeface="Corbel" pitchFamily="34" charset="-120"/>
               </a:rPr>
               <a:t>That question would return several thousand records to screen at title and abstract.</a:t>
             </a:r>
-            <a:endParaRPr lang="en-US" sz="1300" dirty="0"/>
+            <a:endParaRPr lang="en-US" sz="1250" dirty="0"/>
           </a:p>
           <a:p>
             <a:pPr marL="342900" indent="-342900">
               <a:lnSpc>
-                <a:spcPct val="115000"/>
+                <a:spcPct val="120000"/>
               </a:lnSpc>
+              <a:spcAft>
+                <a:spcPts val="500"/>
+              </a:spcAft>
               <a:buSzPct val="100000"/>
               <a:buFont typeface="+mj-lt"/>
               <a:buAutoNum type="arabicPeriod" startAt="1"/>
             </a:pPr>
             <a:r>
-              <a:rPr lang="en-US" sz="1300" dirty="0">
-                <a:solidFill>
-                  <a:srgbClr val="374151"/>
-                </a:solidFill>
+              <a:rPr lang="en-US" sz="1250" dirty="0">
+                <a:solidFill>
+                  <a:srgbClr val="23282E"/>
+                </a:solidFill>
+                <a:latin typeface="Corbel" pitchFamily="34" charset="0"/>
+                <a:ea typeface="Corbel" pitchFamily="34" charset="-122"/>
+                <a:cs typeface="Corbel" pitchFamily="34" charset="-120"/>
               </a:rPr>
               <a:t>She is working alone, so the second screener does not exist — and without one it is not a systematic review by PRISMA standards.</a:t>
             </a:r>
-            <a:endParaRPr lang="en-US" sz="1300" dirty="0"/>
+            <a:endParaRPr lang="en-US" sz="1250" dirty="0"/>
           </a:p>
           <a:p>
             <a:pPr marL="342900" indent="-342900">
               <a:lnSpc>
-                <a:spcPct val="115000"/>
+                <a:spcPct val="120000"/>
               </a:lnSpc>
+              <a:spcAft>
+                <a:spcPts val="500"/>
+              </a:spcAft>
               <a:buSzPct val="100000"/>
               <a:buFont typeface="+mj-lt"/>
               <a:buAutoNum type="arabicPeriod" startAt="1"/>
             </a:pPr>
             <a:r>
-              <a:rPr lang="en-US" sz="1300" dirty="0">
-                <a:solidFill>
-                  <a:srgbClr val="374151"/>
-                </a:solidFill>
+              <a:rPr lang="en-US" sz="1250" dirty="0">
+                <a:solidFill>
+                  <a:srgbClr val="23282E"/>
+                </a:solidFill>
+                <a:latin typeface="Corbel" pitchFamily="34" charset="0"/>
+                <a:ea typeface="Corbel" pitchFamily="34" charset="-122"/>
+                <a:cs typeface="Corbel" pitchFamily="34" charset="-120"/>
               </a:rPr>
               <a:t>A scoping review of the same area is defensible, achievable solo, and still publishable.</a:t>
             </a:r>
-            <a:endParaRPr lang="en-US" sz="1300" dirty="0"/>
+            <a:endParaRPr lang="en-US" sz="1250" dirty="0"/>
           </a:p>
           <a:p>
             <a:pPr marL="342900" indent="-342900">
               <a:lnSpc>
-                <a:spcPct val="115000"/>
+                <a:spcPct val="120000"/>
               </a:lnSpc>
+              <a:spcAft>
+                <a:spcPts val="500"/>
+              </a:spcAft>
               <a:buSzPct val="100000"/>
               <a:buFont typeface="+mj-lt"/>
               <a:buAutoNum type="arabicPeriod" startAt="1"/>
             </a:pPr>
             <a:r>
-              <a:rPr lang="en-US" sz="1300" dirty="0">
-                <a:solidFill>
-                  <a:srgbClr val="374151"/>
-                </a:solidFill>
+              <a:rPr lang="en-US" sz="1250" dirty="0">
+                <a:solidFill>
+                  <a:srgbClr val="23282E"/>
+                </a:solidFill>
+                <a:latin typeface="Corbel" pitchFamily="34" charset="0"/>
+                <a:ea typeface="Corbel" pitchFamily="34" charset="-122"/>
+                <a:cs typeface="Corbel" pitchFamily="34" charset="-120"/>
               </a:rPr>
               <a:t>Alternatively, narrow the question hard: one intervention, one age band, one country — which can make a systematic review feasible.</a:t>
             </a:r>
-            <a:endParaRPr lang="en-US" sz="1300" dirty="0"/>
+            <a:endParaRPr lang="en-US" sz="1250" dirty="0"/>
           </a:p>
         </p:txBody>
       </p:sp>
@@ -4305,8 +4567,8 @@
         </p:nvSpPr>
         <p:spPr>
           <a:xfrm>
-            <a:off x="8503920" y="4709160"/>
-            <a:ext cx="800000" cy="300000"/>
+            <a:off x="566928" y="4700016"/>
+            <a:ext cx="914400" cy="274320"/>
           </a:xfrm>
           <a:prstGeom prst="rect">
             <a:avLst/>
@@ -4321,10 +4583,13 @@
           <a:bodyPr/>
           <a:lstStyle>
             <a:lvl1pPr>
-              <a:defRPr sz="1000">
-                <a:solidFill>
-                  <a:srgbClr val="6B7280"/>
-                </a:solidFill>
+              <a:defRPr sz="900">
+                <a:solidFill>
+                  <a:srgbClr val="5F6B76"/>
+                </a:solidFill>
+                <a:latin typeface="Corbel"/>
+                <a:ea typeface="Corbel"/>
+                <a:cs typeface="Corbel"/>
               </a:defRPr>
             </a:lvl1pPr>
           </a:lstStyle>
@@ -4371,8 +4636,8 @@
         </p:nvSpPr>
         <p:spPr>
           <a:xfrm>
-            <a:off x="502920" y="292608"/>
-            <a:ext cx="8046720" cy="228600"/>
+            <a:off x="566928" y="384048"/>
+            <a:ext cx="7772400" cy="237744"/>
           </a:xfrm>
           <a:prstGeom prst="rect">
             <a:avLst/>
@@ -4388,14 +4653,17 @@
               <a:buNone/>
             </a:pPr>
             <a:r>
-              <a:rPr lang="en-US" sz="1100" b="1" spc="150" kern="0" dirty="0">
-                <a:solidFill>
-                  <a:srgbClr val="0066CC"/>
-                </a:solidFill>
+              <a:rPr lang="en-US" sz="1000" spc="200" kern="0" dirty="0">
+                <a:solidFill>
+                  <a:srgbClr val="9A6A3C"/>
+                </a:solidFill>
+                <a:latin typeface="Corbel" pitchFamily="34" charset="0"/>
+                <a:ea typeface="Corbel" pitchFamily="34" charset="-122"/>
+                <a:cs typeface="Corbel" pitchFamily="34" charset="-120"/>
               </a:rPr>
               <a:t>UNIT 3</a:t>
             </a:r>
-            <a:endParaRPr lang="en-US" sz="1100" dirty="0"/>
+            <a:endParaRPr lang="en-US" sz="1000" dirty="0"/>
           </a:p>
         </p:txBody>
       </p:sp>
@@ -4407,8 +4675,8 @@
         </p:nvSpPr>
         <p:spPr>
           <a:xfrm>
-            <a:off x="502920" y="548640"/>
-            <a:ext cx="8046720" cy="640080"/>
+            <a:off x="566928" y="658368"/>
+            <a:ext cx="7772400" cy="658368"/>
           </a:xfrm>
           <a:prstGeom prst="rect">
             <a:avLst/>
@@ -4421,30 +4689,56 @@
           <a:lstStyle/>
           <a:p>
             <a:pPr indent="0" marL="0">
+              <a:lnSpc>
+                <a:spcPct val="100000"/>
+              </a:lnSpc>
               <a:buNone/>
             </a:pPr>
             <a:r>
-              <a:rPr lang="en-US" sz="2400" b="1" dirty="0">
-                <a:solidFill>
-                  <a:srgbClr val="111827"/>
-                </a:solidFill>
+              <a:rPr lang="en-US" sz="2500" dirty="0">
+                <a:solidFill>
+                  <a:srgbClr val="1C3140"/>
+                </a:solidFill>
+                <a:latin typeface="Constantia" pitchFamily="34" charset="0"/>
+                <a:ea typeface="Constantia" pitchFamily="34" charset="-122"/>
+                <a:cs typeface="Constantia" pitchFamily="34" charset="-120"/>
               </a:rPr>
               <a:t>Key terms (1/2)</a:t>
             </a:r>
-            <a:endParaRPr lang="en-US" sz="2400" dirty="0"/>
-          </a:p>
-        </p:txBody>
-      </p:sp>
-      <p:sp>
-        <p:nvSpPr>
-          <p:cNvPr id="4" name="Text 2"/>
+            <a:endParaRPr lang="en-US" sz="2500" dirty="0"/>
+          </a:p>
+        </p:txBody>
+      </p:sp>
+      <p:sp>
+        <p:nvSpPr>
+          <p:cNvPr id="4" name="Shape 2"/>
           <p:cNvSpPr/>
           <p:nvPr/>
         </p:nvSpPr>
         <p:spPr>
           <a:xfrm>
-            <a:off x="685800" y="1325880"/>
-            <a:ext cx="7772400" cy="3200400"/>
+            <a:off x="566928" y="1335024"/>
+            <a:ext cx="566928" cy="20117"/>
+          </a:xfrm>
+          <a:prstGeom prst="rect">
+            <a:avLst/>
+          </a:prstGeom>
+          <a:solidFill>
+            <a:srgbClr val="9A6A3C"/>
+          </a:solidFill>
+          <a:ln/>
+        </p:spPr>
+      </p:sp>
+      <p:sp>
+        <p:nvSpPr>
+          <p:cNvPr id="5" name="Text 3"/>
+          <p:cNvSpPr/>
+          <p:nvPr/>
+        </p:nvSpPr>
+        <p:spPr>
+          <a:xfrm>
+            <a:off x="713232" y="1664208"/>
+            <a:ext cx="7498080" cy="2788920"/>
           </a:xfrm>
           <a:prstGeom prst="rect">
             <a:avLst/>
@@ -4458,65 +4752,74 @@
           <a:p>
             <a:pPr marL="342900" indent="-342900">
               <a:lnSpc>
-                <a:spcPct val="125000"/>
+                <a:spcPct val="130000"/>
               </a:lnSpc>
               <a:spcAft>
-                <a:spcPts val="800"/>
+                <a:spcPts val="1100"/>
               </a:spcAft>
               <a:buSzPct val="100000"/>
-              <a:buChar char="•"/>
-            </a:pPr>
-            <a:r>
-              <a:rPr lang="en-US" sz="1300" dirty="0">
-                <a:solidFill>
-                  <a:srgbClr val="374151"/>
-                </a:solidFill>
+              <a:buChar char="–"/>
+            </a:pPr>
+            <a:r>
+              <a:rPr lang="en-US" sz="1350" dirty="0">
+                <a:solidFill>
+                  <a:srgbClr val="23282E"/>
+                </a:solidFill>
+                <a:latin typeface="Corbel" pitchFamily="34" charset="0"/>
+                <a:ea typeface="Corbel" pitchFamily="34" charset="-122"/>
+                <a:cs typeface="Corbel" pitchFamily="34" charset="-120"/>
               </a:rPr>
               <a:t>Synthesis matrix — A table with studies as rows and themes or attributes as columns, used to compare across sources rather than summarise each in turn.</a:t>
             </a:r>
-            <a:endParaRPr lang="en-US" sz="1300" dirty="0"/>
+            <a:endParaRPr lang="en-US" sz="1350" dirty="0"/>
           </a:p>
           <a:p>
             <a:pPr marL="342900" indent="-342900">
               <a:lnSpc>
-                <a:spcPct val="125000"/>
+                <a:spcPct val="130000"/>
               </a:lnSpc>
               <a:spcAft>
-                <a:spcPts val="800"/>
+                <a:spcPts val="1100"/>
               </a:spcAft>
               <a:buSzPct val="100000"/>
-              <a:buChar char="•"/>
-            </a:pPr>
-            <a:r>
-              <a:rPr lang="en-US" sz="1300" dirty="0">
-                <a:solidFill>
-                  <a:srgbClr val="374151"/>
-                </a:solidFill>
+              <a:buChar char="–"/>
+            </a:pPr>
+            <a:r>
+              <a:rPr lang="en-US" sz="1350" dirty="0">
+                <a:solidFill>
+                  <a:srgbClr val="23282E"/>
+                </a:solidFill>
+                <a:latin typeface="Corbel" pitchFamily="34" charset="0"/>
+                <a:ea typeface="Corbel" pitchFamily="34" charset="-122"/>
+                <a:cs typeface="Corbel" pitchFamily="34" charset="-120"/>
               </a:rPr>
               <a:t>Scoping review — A structured review that maps the extent, range and nature of evidence on a topic and identifies gaps.</a:t>
             </a:r>
-            <a:endParaRPr lang="en-US" sz="1300" dirty="0"/>
+            <a:endParaRPr lang="en-US" sz="1350" dirty="0"/>
           </a:p>
           <a:p>
             <a:pPr marL="342900" indent="-342900">
               <a:lnSpc>
-                <a:spcPct val="125000"/>
+                <a:spcPct val="130000"/>
               </a:lnSpc>
               <a:spcAft>
-                <a:spcPts val="800"/>
+                <a:spcPts val="1100"/>
               </a:spcAft>
               <a:buSzPct val="100000"/>
-              <a:buChar char="•"/>
-            </a:pPr>
-            <a:r>
-              <a:rPr lang="en-US" sz="1300" dirty="0">
-                <a:solidFill>
-                  <a:srgbClr val="374151"/>
-                </a:solidFill>
+              <a:buChar char="–"/>
+            </a:pPr>
+            <a:r>
+              <a:rPr lang="en-US" sz="1350" dirty="0">
+                <a:solidFill>
+                  <a:srgbClr val="23282E"/>
+                </a:solidFill>
+                <a:latin typeface="Corbel" pitchFamily="34" charset="0"/>
+                <a:ea typeface="Corbel" pitchFamily="34" charset="-122"/>
+                <a:cs typeface="Corbel" pitchFamily="34" charset="-120"/>
               </a:rPr>
               <a:t>Grey literature — Material outside commercial publishing — theses, government and NGO reports, working papers, conference abstracts.</a:t>
             </a:r>
-            <a:endParaRPr lang="en-US" sz="1300" dirty="0"/>
+            <a:endParaRPr lang="en-US" sz="1350" dirty="0"/>
           </a:p>
         </p:txBody>
       </p:sp>
@@ -4532,8 +4835,8 @@
         </p:nvSpPr>
         <p:spPr>
           <a:xfrm>
-            <a:off x="8503920" y="4709160"/>
-            <a:ext cx="800000" cy="300000"/>
+            <a:off x="566928" y="4700016"/>
+            <a:ext cx="914400" cy="274320"/>
           </a:xfrm>
           <a:prstGeom prst="rect">
             <a:avLst/>
@@ -4548,10 +4851,13 @@
           <a:bodyPr/>
           <a:lstStyle>
             <a:lvl1pPr>
-              <a:defRPr sz="1000">
-                <a:solidFill>
-                  <a:srgbClr val="6B7280"/>
-                </a:solidFill>
+              <a:defRPr sz="900">
+                <a:solidFill>
+                  <a:srgbClr val="5F6B76"/>
+                </a:solidFill>
+                <a:latin typeface="Corbel"/>
+                <a:ea typeface="Corbel"/>
+                <a:cs typeface="Corbel"/>
               </a:defRPr>
             </a:lvl1pPr>
           </a:lstStyle>
@@ -4598,8 +4904,8 @@
         </p:nvSpPr>
         <p:spPr>
           <a:xfrm>
-            <a:off x="502920" y="292608"/>
-            <a:ext cx="8046720" cy="228600"/>
+            <a:off x="566928" y="384048"/>
+            <a:ext cx="7772400" cy="237744"/>
           </a:xfrm>
           <a:prstGeom prst="rect">
             <a:avLst/>
@@ -4615,14 +4921,17 @@
               <a:buNone/>
             </a:pPr>
             <a:r>
-              <a:rPr lang="en-US" sz="1100" b="1" spc="150" kern="0" dirty="0">
-                <a:solidFill>
-                  <a:srgbClr val="0066CC"/>
-                </a:solidFill>
+              <a:rPr lang="en-US" sz="1000" spc="200" kern="0" dirty="0">
+                <a:solidFill>
+                  <a:srgbClr val="9A6A3C"/>
+                </a:solidFill>
+                <a:latin typeface="Corbel" pitchFamily="34" charset="0"/>
+                <a:ea typeface="Corbel" pitchFamily="34" charset="-122"/>
+                <a:cs typeface="Corbel" pitchFamily="34" charset="-120"/>
               </a:rPr>
               <a:t>UNIT 3</a:t>
             </a:r>
-            <a:endParaRPr lang="en-US" sz="1100" dirty="0"/>
+            <a:endParaRPr lang="en-US" sz="1000" dirty="0"/>
           </a:p>
         </p:txBody>
       </p:sp>
@@ -4634,8 +4943,8 @@
         </p:nvSpPr>
         <p:spPr>
           <a:xfrm>
-            <a:off x="502920" y="548640"/>
-            <a:ext cx="8046720" cy="640080"/>
+            <a:off x="566928" y="658368"/>
+            <a:ext cx="7772400" cy="658368"/>
           </a:xfrm>
           <a:prstGeom prst="rect">
             <a:avLst/>
@@ -4648,30 +4957,56 @@
           <a:lstStyle/>
           <a:p>
             <a:pPr indent="0" marL="0">
+              <a:lnSpc>
+                <a:spcPct val="100000"/>
+              </a:lnSpc>
               <a:buNone/>
             </a:pPr>
             <a:r>
-              <a:rPr lang="en-US" sz="2400" b="1" dirty="0">
-                <a:solidFill>
-                  <a:srgbClr val="111827"/>
-                </a:solidFill>
+              <a:rPr lang="en-US" sz="2500" dirty="0">
+                <a:solidFill>
+                  <a:srgbClr val="1C3140"/>
+                </a:solidFill>
+                <a:latin typeface="Constantia" pitchFamily="34" charset="0"/>
+                <a:ea typeface="Constantia" pitchFamily="34" charset="-122"/>
+                <a:cs typeface="Constantia" pitchFamily="34" charset="-120"/>
               </a:rPr>
               <a:t>Key terms (2/2)</a:t>
             </a:r>
-            <a:endParaRPr lang="en-US" sz="2400" dirty="0"/>
-          </a:p>
-        </p:txBody>
-      </p:sp>
-      <p:sp>
-        <p:nvSpPr>
-          <p:cNvPr id="4" name="Text 2"/>
+            <a:endParaRPr lang="en-US" sz="2500" dirty="0"/>
+          </a:p>
+        </p:txBody>
+      </p:sp>
+      <p:sp>
+        <p:nvSpPr>
+          <p:cNvPr id="4" name="Shape 2"/>
           <p:cNvSpPr/>
           <p:nvPr/>
         </p:nvSpPr>
         <p:spPr>
           <a:xfrm>
-            <a:off x="685800" y="1325880"/>
-            <a:ext cx="7772400" cy="3200400"/>
+            <a:off x="566928" y="1335024"/>
+            <a:ext cx="566928" cy="20117"/>
+          </a:xfrm>
+          <a:prstGeom prst="rect">
+            <a:avLst/>
+          </a:prstGeom>
+          <a:solidFill>
+            <a:srgbClr val="9A6A3C"/>
+          </a:solidFill>
+          <a:ln/>
+        </p:spPr>
+      </p:sp>
+      <p:sp>
+        <p:nvSpPr>
+          <p:cNvPr id="5" name="Text 3"/>
+          <p:cNvSpPr/>
+          <p:nvPr/>
+        </p:nvSpPr>
+        <p:spPr>
+          <a:xfrm>
+            <a:off x="713232" y="1664208"/>
+            <a:ext cx="7498080" cy="2788920"/>
           </a:xfrm>
           <a:prstGeom prst="rect">
             <a:avLst/>
@@ -4685,19 +5020,22 @@
           <a:p>
             <a:pPr marL="342900" indent="-342900">
               <a:lnSpc>
-                <a:spcPct val="125000"/>
+                <a:spcPct val="130000"/>
               </a:lnSpc>
               <a:spcAft>
-                <a:spcPts val="800"/>
+                <a:spcPts val="1100"/>
               </a:spcAft>
               <a:buSzPct val="100000"/>
-              <a:buChar char="•"/>
+              <a:buChar char="–"/>
             </a:pPr>
             <a:r>
               <a:rPr lang="en-US" sz="1500" dirty="0">
                 <a:solidFill>
-                  <a:srgbClr val="374151"/>
-                </a:solidFill>
+                  <a:srgbClr val="23282E"/>
+                </a:solidFill>
+                <a:latin typeface="Corbel" pitchFamily="34" charset="0"/>
+                <a:ea typeface="Corbel" pitchFamily="34" charset="-122"/>
+                <a:cs typeface="Corbel" pitchFamily="34" charset="-120"/>
               </a:rPr>
               <a:t>Publication bias — The tendency for studies with positive or significant results to be published more often, distorting the apparent evidence.</a:t>
             </a:r>
@@ -4706,19 +5044,22 @@
           <a:p>
             <a:pPr marL="342900" indent="-342900">
               <a:lnSpc>
-                <a:spcPct val="125000"/>
+                <a:spcPct val="130000"/>
               </a:lnSpc>
               <a:spcAft>
-                <a:spcPts val="800"/>
+                <a:spcPts val="1100"/>
               </a:spcAft>
               <a:buSzPct val="100000"/>
-              <a:buChar char="•"/>
+              <a:buChar char="–"/>
             </a:pPr>
             <a:r>
               <a:rPr lang="en-US" sz="1500" dirty="0">
                 <a:solidFill>
-                  <a:srgbClr val="374151"/>
-                </a:solidFill>
+                  <a:srgbClr val="23282E"/>
+                </a:solidFill>
+                <a:latin typeface="Corbel" pitchFamily="34" charset="0"/>
+                <a:ea typeface="Corbel" pitchFamily="34" charset="-122"/>
+                <a:cs typeface="Corbel" pitchFamily="34" charset="-120"/>
               </a:rPr>
               <a:t>Predatory journal — A journal charging publication fees while providing little or no genuine peer review or editorial service.</a:t>
             </a:r>
@@ -4727,19 +5068,22 @@
           <a:p>
             <a:pPr marL="342900" indent="-342900">
               <a:lnSpc>
-                <a:spcPct val="125000"/>
+                <a:spcPct val="130000"/>
               </a:lnSpc>
               <a:spcAft>
-                <a:spcPts val="800"/>
+                <a:spcPts val="1100"/>
               </a:spcAft>
               <a:buSzPct val="100000"/>
-              <a:buChar char="•"/>
+              <a:buChar char="–"/>
             </a:pPr>
             <a:r>
               <a:rPr lang="en-US" sz="1500" dirty="0">
                 <a:solidFill>
-                  <a:srgbClr val="374151"/>
-                </a:solidFill>
+                  <a:srgbClr val="23282E"/>
+                </a:solidFill>
+                <a:latin typeface="Corbel" pitchFamily="34" charset="0"/>
+                <a:ea typeface="Corbel" pitchFamily="34" charset="-122"/>
+                <a:cs typeface="Corbel" pitchFamily="34" charset="-120"/>
               </a:rPr>
               <a:t>Saturation (in reviewing) — The point at which additional searching returns no new relevant concepts.</a:t>
             </a:r>
@@ -4759,8 +5103,8 @@
         </p:nvSpPr>
         <p:spPr>
           <a:xfrm>
-            <a:off x="8503920" y="4709160"/>
-            <a:ext cx="800000" cy="300000"/>
+            <a:off x="566928" y="4700016"/>
+            <a:ext cx="914400" cy="274320"/>
           </a:xfrm>
           <a:prstGeom prst="rect">
             <a:avLst/>
@@ -4775,10 +5119,13 @@
           <a:bodyPr/>
           <a:lstStyle>
             <a:lvl1pPr>
-              <a:defRPr sz="1000">
-                <a:solidFill>
-                  <a:srgbClr val="6B7280"/>
-                </a:solidFill>
+              <a:defRPr sz="900">
+                <a:solidFill>
+                  <a:srgbClr val="5F6B76"/>
+                </a:solidFill>
+                <a:latin typeface="Corbel"/>
+                <a:ea typeface="Corbel"/>
+                <a:cs typeface="Corbel"/>
               </a:defRPr>
             </a:lvl1pPr>
           </a:lstStyle>
@@ -4825,8 +5172,8 @@
         </p:nvSpPr>
         <p:spPr>
           <a:xfrm>
-            <a:off x="502920" y="292608"/>
-            <a:ext cx="8046720" cy="228600"/>
+            <a:off x="685800" y="1024128"/>
+            <a:ext cx="6766560" cy="292608"/>
           </a:xfrm>
           <a:prstGeom prst="rect">
             <a:avLst/>
@@ -4842,14 +5189,17 @@
               <a:buNone/>
             </a:pPr>
             <a:r>
-              <a:rPr lang="en-US" sz="1100" b="1" spc="150" kern="0" dirty="0">
-                <a:solidFill>
-                  <a:srgbClr val="0066CC"/>
-                </a:solidFill>
-              </a:rPr>
-              <a:t>UNIT 3  ·  OVER TO YOU</a:t>
-            </a:r>
-            <a:endParaRPr lang="en-US" sz="1100" dirty="0"/>
+              <a:rPr lang="en-US" sz="1150" spc="240" kern="0" dirty="0">
+                <a:solidFill>
+                  <a:srgbClr val="C8A67B"/>
+                </a:solidFill>
+                <a:latin typeface="Corbel" pitchFamily="34" charset="0"/>
+                <a:ea typeface="Corbel" pitchFamily="34" charset="-122"/>
+                <a:cs typeface="Corbel" pitchFamily="34" charset="-120"/>
+              </a:rPr>
+              <a:t>Over to you</a:t>
+            </a:r>
+            <a:endParaRPr lang="en-US" sz="1150" dirty="0"/>
           </a:p>
         </p:txBody>
       </p:sp>
@@ -4861,8 +5211,8 @@
         </p:nvSpPr>
         <p:spPr>
           <a:xfrm>
-            <a:off x="502920" y="548640"/>
-            <a:ext cx="8046720" cy="640080"/>
+            <a:off x="685800" y="1700784"/>
+            <a:ext cx="6858000" cy="640080"/>
           </a:xfrm>
           <a:prstGeom prst="rect">
             <a:avLst/>
@@ -4878,14 +5228,17 @@
               <a:buNone/>
             </a:pPr>
             <a:r>
-              <a:rPr lang="en-US" sz="2400" b="1" dirty="0">
-                <a:solidFill>
-                  <a:srgbClr val="111827"/>
-                </a:solidFill>
+              <a:rPr lang="en-US" sz="3000" dirty="0">
+                <a:solidFill>
+                  <a:srgbClr val="FFFFFF"/>
+                </a:solidFill>
+                <a:latin typeface="Constantia" pitchFamily="34" charset="0"/>
+                <a:ea typeface="Constantia" pitchFamily="34" charset="-122"/>
+                <a:cs typeface="Constantia" pitchFamily="34" charset="-120"/>
               </a:rPr>
               <a:t>Activity</a:t>
             </a:r>
-            <a:endParaRPr lang="en-US" sz="2400" dirty="0"/>
+            <a:endParaRPr lang="en-US" sz="3000" dirty="0"/>
           </a:p>
         </p:txBody>
       </p:sp>
@@ -4897,8 +5250,8 @@
         </p:nvSpPr>
         <p:spPr>
           <a:xfrm>
-            <a:off x="685800" y="1325880"/>
-            <a:ext cx="7772400" cy="3200400"/>
+            <a:off x="685800" y="2487168"/>
+            <a:ext cx="6949440" cy="1737360"/>
           </a:xfrm>
           <a:prstGeom prst="rect">
             <a:avLst/>
@@ -4910,70 +5263,24 @@
           <a:bodyPr wrap="square" rtlCol="0" anchor="t"/>
           <a:lstStyle/>
           <a:p>
-            <a:pPr marL="342900" indent="-342900">
+            <a:pPr indent="0" marL="0">
               <a:lnSpc>
-                <a:spcPct val="125000"/>
+                <a:spcPct val="134000"/>
               </a:lnSpc>
-              <a:spcAft>
-                <a:spcPts val="800"/>
-              </a:spcAft>
-              <a:buSzPct val="100000"/>
-              <a:buChar char="•"/>
-            </a:pPr>
-            <a:r>
-              <a:rPr lang="en-US" sz="1300" dirty="0">
-                <a:solidFill>
-                  <a:srgbClr val="374151"/>
-                </a:solidFill>
+              <a:buNone/>
+            </a:pPr>
+            <a:r>
+              <a:rPr lang="en-US" sz="1450" dirty="0">
+                <a:solidFill>
+                  <a:srgbClr val="C4CCD4"/>
+                </a:solidFill>
+                <a:latin typeface="Corbel" pitchFamily="34" charset="0"/>
+                <a:ea typeface="Corbel" pitchFamily="34" charset="-122"/>
+                <a:cs typeface="Corbel" pitchFamily="34" charset="-120"/>
               </a:rPr>
               <a:t>Take five papers you have already read. Build a synthesis matrix with columns for design, sample, setting, key finding and limitation. Then write one paragraph that compares across the column "key finding" without naming an author as the subject of any sentence.</a:t>
             </a:r>
-            <a:endParaRPr lang="en-US" sz="1300" dirty="0"/>
-          </a:p>
-        </p:txBody>
-      </p:sp>
-      <p:sp>
-        <p:nvSpPr>
-          <p:cNvPr id="25" name="Slide Number Placeholder 0"/>
-          <p:cNvSpPr>
-            <a:spLocks noGrp="1"/>
-          </p:cNvSpPr>
-          <p:nvPr>
-            <p:ph type="sldNum" sz="quarter" idx="4294967295"/>
-          </p:nvPr>
-        </p:nvSpPr>
-        <p:spPr>
-          <a:xfrm>
-            <a:off x="8503920" y="4709160"/>
-            <a:ext cx="800000" cy="300000"/>
-          </a:xfrm>
-          <a:prstGeom prst="rect">
-            <a:avLst/>
-          </a:prstGeom>
-          <a:extLst>
-            <a:ext uri="{C572A759-6A51-4108-AA02-DFA0A04FC94B}">
-              <ma14:wrappingTextBoxFlag xmlns:ma14="http://schemas.microsoft.com/office/mac/drawingml/2011/main" val="0"/>
-            </a:ext>
-          </a:extLst>
-        </p:spPr>
-        <p:txBody>
-          <a:bodyPr/>
-          <a:lstStyle>
-            <a:lvl1pPr>
-              <a:defRPr sz="1000">
-                <a:solidFill>
-                  <a:srgbClr val="6B7280"/>
-                </a:solidFill>
-              </a:defRPr>
-            </a:lvl1pPr>
-          </a:lstStyle>
-          <a:p>
-            <a:pPr algn="l"/>
-            <a:fld id="{F7021451-1387-4CA6-816F-3879F97B5CBC}" type="slidenum">
-              <a:rPr b="0" lang="en-US"/>
-              <a:t>18</a:t>
-            </a:fld>
-            <a:endParaRPr lang="en-US"/>
+            <a:endParaRPr lang="en-US" sz="1450" dirty="0"/>
           </a:p>
         </p:txBody>
       </p:sp>
@@ -5010,8 +5317,8 @@
         </p:nvSpPr>
         <p:spPr>
           <a:xfrm>
-            <a:off x="502920" y="292608"/>
-            <a:ext cx="8046720" cy="228600"/>
+            <a:off x="566928" y="384048"/>
+            <a:ext cx="7772400" cy="237744"/>
           </a:xfrm>
           <a:prstGeom prst="rect">
             <a:avLst/>
@@ -5027,14 +5334,17 @@
               <a:buNone/>
             </a:pPr>
             <a:r>
-              <a:rPr lang="en-US" sz="1100" b="1" spc="150" kern="0" dirty="0">
-                <a:solidFill>
-                  <a:srgbClr val="0066CC"/>
-                </a:solidFill>
+              <a:rPr lang="en-US" sz="1000" spc="200" kern="0" dirty="0">
+                <a:solidFill>
+                  <a:srgbClr val="9A6A3C"/>
+                </a:solidFill>
+                <a:latin typeface="Corbel" pitchFamily="34" charset="0"/>
+                <a:ea typeface="Corbel" pitchFamily="34" charset="-122"/>
+                <a:cs typeface="Corbel" pitchFamily="34" charset="-120"/>
               </a:rPr>
               <a:t>UNIT 3</a:t>
             </a:r>
-            <a:endParaRPr lang="en-US" sz="1100" dirty="0"/>
+            <a:endParaRPr lang="en-US" sz="1000" dirty="0"/>
           </a:p>
         </p:txBody>
       </p:sp>
@@ -5046,8 +5356,8 @@
         </p:nvSpPr>
         <p:spPr>
           <a:xfrm>
-            <a:off x="502920" y="548640"/>
-            <a:ext cx="8046720" cy="640080"/>
+            <a:off x="566928" y="658368"/>
+            <a:ext cx="7772400" cy="658368"/>
           </a:xfrm>
           <a:prstGeom prst="rect">
             <a:avLst/>
@@ -5060,30 +5370,56 @@
           <a:lstStyle/>
           <a:p>
             <a:pPr indent="0" marL="0">
+              <a:lnSpc>
+                <a:spcPct val="100000"/>
+              </a:lnSpc>
               <a:buNone/>
             </a:pPr>
             <a:r>
-              <a:rPr lang="en-US" sz="2400" b="1" dirty="0">
-                <a:solidFill>
-                  <a:srgbClr val="111827"/>
-                </a:solidFill>
+              <a:rPr lang="en-US" sz="2500" dirty="0">
+                <a:solidFill>
+                  <a:srgbClr val="1C3140"/>
+                </a:solidFill>
+                <a:latin typeface="Constantia" pitchFamily="34" charset="0"/>
+                <a:ea typeface="Constantia" pitchFamily="34" charset="-122"/>
+                <a:cs typeface="Constantia" pitchFamily="34" charset="-120"/>
               </a:rPr>
               <a:t>What you will be able to do</a:t>
             </a:r>
-            <a:endParaRPr lang="en-US" sz="2400" dirty="0"/>
-          </a:p>
-        </p:txBody>
-      </p:sp>
-      <p:sp>
-        <p:nvSpPr>
-          <p:cNvPr id="4" name="Text 2"/>
+            <a:endParaRPr lang="en-US" sz="2500" dirty="0"/>
+          </a:p>
+        </p:txBody>
+      </p:sp>
+      <p:sp>
+        <p:nvSpPr>
+          <p:cNvPr id="4" name="Shape 2"/>
           <p:cNvSpPr/>
           <p:nvPr/>
         </p:nvSpPr>
         <p:spPr>
           <a:xfrm>
-            <a:off x="685800" y="1325880"/>
-            <a:ext cx="7772400" cy="3200400"/>
+            <a:off x="566928" y="1335024"/>
+            <a:ext cx="566928" cy="20117"/>
+          </a:xfrm>
+          <a:prstGeom prst="rect">
+            <a:avLst/>
+          </a:prstGeom>
+          <a:solidFill>
+            <a:srgbClr val="9A6A3C"/>
+          </a:solidFill>
+          <a:ln/>
+        </p:spPr>
+      </p:sp>
+      <p:sp>
+        <p:nvSpPr>
+          <p:cNvPr id="5" name="Text 3"/>
+          <p:cNvSpPr/>
+          <p:nvPr/>
+        </p:nvSpPr>
+        <p:spPr>
+          <a:xfrm>
+            <a:off x="713232" y="1664208"/>
+            <a:ext cx="7498080" cy="2788920"/>
           </a:xfrm>
           <a:prstGeom prst="rect">
             <a:avLst/>
@@ -5097,19 +5433,22 @@
           <a:p>
             <a:pPr marL="342900" indent="-342900">
               <a:lnSpc>
-                <a:spcPct val="125000"/>
+                <a:spcPct val="130000"/>
               </a:lnSpc>
               <a:spcAft>
-                <a:spcPts val="800"/>
+                <a:spcPts val="1100"/>
               </a:spcAft>
               <a:buSzPct val="100000"/>
-              <a:buChar char="•"/>
+              <a:buChar char="–"/>
             </a:pPr>
             <a:r>
               <a:rPr lang="en-US" sz="1800" dirty="0">
                 <a:solidFill>
-                  <a:srgbClr val="374151"/>
-                </a:solidFill>
+                  <a:srgbClr val="23282E"/>
+                </a:solidFill>
+                <a:latin typeface="Corbel" pitchFamily="34" charset="0"/>
+                <a:ea typeface="Corbel" pitchFamily="34" charset="-122"/>
+                <a:cs typeface="Corbel" pitchFamily="34" charset="-120"/>
               </a:rPr>
               <a:t>Explain the four functions a literature review performs in a research project</a:t>
             </a:r>
@@ -5118,19 +5457,22 @@
           <a:p>
             <a:pPr marL="342900" indent="-342900">
               <a:lnSpc>
-                <a:spcPct val="125000"/>
+                <a:spcPct val="130000"/>
               </a:lnSpc>
               <a:spcAft>
-                <a:spcPts val="800"/>
+                <a:spcPts val="1100"/>
               </a:spcAft>
               <a:buSzPct val="100000"/>
-              <a:buChar char="•"/>
+              <a:buChar char="–"/>
             </a:pPr>
             <a:r>
               <a:rPr lang="en-US" sz="1800" dirty="0">
                 <a:solidFill>
-                  <a:srgbClr val="374151"/>
-                </a:solidFill>
+                  <a:srgbClr val="23282E"/>
+                </a:solidFill>
+                <a:latin typeface="Corbel" pitchFamily="34" charset="0"/>
+                <a:ea typeface="Corbel" pitchFamily="34" charset="-122"/>
+                <a:cs typeface="Corbel" pitchFamily="34" charset="-120"/>
               </a:rPr>
               <a:t>Distinguish narrative, scoping, systematic, rapid and integrative reviews</a:t>
             </a:r>
@@ -5139,19 +5481,22 @@
           <a:p>
             <a:pPr marL="342900" indent="-342900">
               <a:lnSpc>
-                <a:spcPct val="125000"/>
+                <a:spcPct val="130000"/>
               </a:lnSpc>
               <a:spcAft>
-                <a:spcPts val="800"/>
+                <a:spcPts val="1100"/>
               </a:spcAft>
               <a:buSzPct val="100000"/>
-              <a:buChar char="•"/>
+              <a:buChar char="–"/>
             </a:pPr>
             <a:r>
               <a:rPr lang="en-US" sz="1800" dirty="0">
                 <a:solidFill>
-                  <a:srgbClr val="374151"/>
-                </a:solidFill>
+                  <a:srgbClr val="23282E"/>
+                </a:solidFill>
+                <a:latin typeface="Corbel" pitchFamily="34" charset="0"/>
+                <a:ea typeface="Corbel" pitchFamily="34" charset="-122"/>
+                <a:cs typeface="Corbel" pitchFamily="34" charset="-120"/>
               </a:rPr>
               <a:t>Select the review type appropriate to your purpose and resources</a:t>
             </a:r>
@@ -5160,19 +5505,22 @@
           <a:p>
             <a:pPr marL="342900" indent="-342900">
               <a:lnSpc>
-                <a:spcPct val="125000"/>
+                <a:spcPct val="130000"/>
               </a:lnSpc>
               <a:spcAft>
-                <a:spcPts val="800"/>
+                <a:spcPts val="1100"/>
               </a:spcAft>
               <a:buSzPct val="100000"/>
-              <a:buChar char="•"/>
+              <a:buChar char="–"/>
             </a:pPr>
             <a:r>
               <a:rPr lang="en-US" sz="1800" dirty="0">
                 <a:solidFill>
-                  <a:srgbClr val="374151"/>
-                </a:solidFill>
+                  <a:srgbClr val="23282E"/>
+                </a:solidFill>
+                <a:latin typeface="Corbel" pitchFamily="34" charset="0"/>
+                <a:ea typeface="Corbel" pitchFamily="34" charset="-122"/>
+                <a:cs typeface="Corbel" pitchFamily="34" charset="-120"/>
               </a:rPr>
               <a:t>Organise a review thematically rather than source by source</a:t>
             </a:r>
@@ -5181,19 +5529,22 @@
           <a:p>
             <a:pPr marL="342900" indent="-342900">
               <a:lnSpc>
-                <a:spcPct val="125000"/>
+                <a:spcPct val="130000"/>
               </a:lnSpc>
               <a:spcAft>
-                <a:spcPts val="800"/>
+                <a:spcPts val="1100"/>
               </a:spcAft>
               <a:buSzPct val="100000"/>
-              <a:buChar char="•"/>
+              <a:buChar char="–"/>
             </a:pPr>
             <a:r>
               <a:rPr lang="en-US" sz="1800" dirty="0">
                 <a:solidFill>
-                  <a:srgbClr val="374151"/>
-                </a:solidFill>
+                  <a:srgbClr val="23282E"/>
+                </a:solidFill>
+                <a:latin typeface="Corbel" pitchFamily="34" charset="0"/>
+                <a:ea typeface="Corbel" pitchFamily="34" charset="-122"/>
+                <a:cs typeface="Corbel" pitchFamily="34" charset="-120"/>
               </a:rPr>
               <a:t>Use a synthesis matrix to move from reading to argument</a:t>
             </a:r>
@@ -5202,19 +5553,22 @@
           <a:p>
             <a:pPr marL="342900" indent="-342900">
               <a:lnSpc>
-                <a:spcPct val="125000"/>
+                <a:spcPct val="130000"/>
               </a:lnSpc>
               <a:spcAft>
-                <a:spcPts val="800"/>
+                <a:spcPts val="1100"/>
               </a:spcAft>
               <a:buSzPct val="100000"/>
-              <a:buChar char="•"/>
+              <a:buChar char="–"/>
             </a:pPr>
             <a:r>
               <a:rPr lang="en-US" sz="1800" dirty="0">
                 <a:solidFill>
-                  <a:srgbClr val="374151"/>
-                </a:solidFill>
+                  <a:srgbClr val="23282E"/>
+                </a:solidFill>
+                <a:latin typeface="Corbel" pitchFamily="34" charset="0"/>
+                <a:ea typeface="Corbel" pitchFamily="34" charset="-122"/>
+                <a:cs typeface="Corbel" pitchFamily="34" charset="-120"/>
               </a:rPr>
               <a:t>Recognise and avoid the most common review failures</a:t>
             </a:r>
@@ -5234,8 +5588,8 @@
         </p:nvSpPr>
         <p:spPr>
           <a:xfrm>
-            <a:off x="8503920" y="4709160"/>
-            <a:ext cx="800000" cy="300000"/>
+            <a:off x="566928" y="4700016"/>
+            <a:ext cx="914400" cy="274320"/>
           </a:xfrm>
           <a:prstGeom prst="rect">
             <a:avLst/>
@@ -5250,10 +5604,13 @@
           <a:bodyPr/>
           <a:lstStyle>
             <a:lvl1pPr>
-              <a:defRPr sz="1000">
-                <a:solidFill>
-                  <a:srgbClr val="6B7280"/>
-                </a:solidFill>
+              <a:defRPr sz="900">
+                <a:solidFill>
+                  <a:srgbClr val="5F6B76"/>
+                </a:solidFill>
+                <a:latin typeface="Corbel"/>
+                <a:ea typeface="Corbel"/>
+                <a:cs typeface="Corbel"/>
               </a:defRPr>
             </a:lvl1pPr>
           </a:lstStyle>
@@ -5300,8 +5657,8 @@
         </p:nvSpPr>
         <p:spPr>
           <a:xfrm>
-            <a:off x="502920" y="292608"/>
-            <a:ext cx="8046720" cy="228600"/>
+            <a:off x="566928" y="384048"/>
+            <a:ext cx="7772400" cy="237744"/>
           </a:xfrm>
           <a:prstGeom prst="rect">
             <a:avLst/>
@@ -5317,14 +5674,17 @@
               <a:buNone/>
             </a:pPr>
             <a:r>
-              <a:rPr lang="en-US" sz="1100" b="1" spc="150" kern="0" dirty="0">
-                <a:solidFill>
-                  <a:srgbClr val="0066CC"/>
-                </a:solidFill>
+              <a:rPr lang="en-US" sz="1000" spc="200" kern="0" dirty="0">
+                <a:solidFill>
+                  <a:srgbClr val="9A6A3C"/>
+                </a:solidFill>
+                <a:latin typeface="Corbel" pitchFamily="34" charset="0"/>
+                <a:ea typeface="Corbel" pitchFamily="34" charset="-122"/>
+                <a:cs typeface="Corbel" pitchFamily="34" charset="-120"/>
               </a:rPr>
               <a:t>UNIT 3</a:t>
             </a:r>
-            <a:endParaRPr lang="en-US" sz="1100" dirty="0"/>
+            <a:endParaRPr lang="en-US" sz="1000" dirty="0"/>
           </a:p>
         </p:txBody>
       </p:sp>
@@ -5336,8 +5696,8 @@
         </p:nvSpPr>
         <p:spPr>
           <a:xfrm>
-            <a:off x="502920" y="548640"/>
-            <a:ext cx="8046720" cy="640080"/>
+            <a:off x="566928" y="658368"/>
+            <a:ext cx="7772400" cy="658368"/>
           </a:xfrm>
           <a:prstGeom prst="rect">
             <a:avLst/>
@@ -5350,30 +5710,56 @@
           <a:lstStyle/>
           <a:p>
             <a:pPr indent="0" marL="0">
+              <a:lnSpc>
+                <a:spcPct val="100000"/>
+              </a:lnSpc>
               <a:buNone/>
             </a:pPr>
             <a:r>
-              <a:rPr lang="en-US" sz="2400" b="1" dirty="0">
-                <a:solidFill>
-                  <a:srgbClr val="111827"/>
-                </a:solidFill>
+              <a:rPr lang="en-US" sz="2500" dirty="0">
+                <a:solidFill>
+                  <a:srgbClr val="1C3140"/>
+                </a:solidFill>
+                <a:latin typeface="Constantia" pitchFamily="34" charset="0"/>
+                <a:ea typeface="Constantia" pitchFamily="34" charset="-122"/>
+                <a:cs typeface="Constantia" pitchFamily="34" charset="-120"/>
               </a:rPr>
               <a:t>What the review is for</a:t>
             </a:r>
-            <a:endParaRPr lang="en-US" sz="2400" dirty="0"/>
-          </a:p>
-        </p:txBody>
-      </p:sp>
-      <p:sp>
-        <p:nvSpPr>
-          <p:cNvPr id="4" name="Text 2"/>
+            <a:endParaRPr lang="en-US" sz="2500" dirty="0"/>
+          </a:p>
+        </p:txBody>
+      </p:sp>
+      <p:sp>
+        <p:nvSpPr>
+          <p:cNvPr id="4" name="Shape 2"/>
           <p:cNvSpPr/>
           <p:nvPr/>
         </p:nvSpPr>
         <p:spPr>
           <a:xfrm>
-            <a:off x="685800" y="1325880"/>
-            <a:ext cx="7772400" cy="3200400"/>
+            <a:off x="566928" y="1335024"/>
+            <a:ext cx="566928" cy="20117"/>
+          </a:xfrm>
+          <a:prstGeom prst="rect">
+            <a:avLst/>
+          </a:prstGeom>
+          <a:solidFill>
+            <a:srgbClr val="9A6A3C"/>
+          </a:solidFill>
+          <a:ln/>
+        </p:spPr>
+      </p:sp>
+      <p:sp>
+        <p:nvSpPr>
+          <p:cNvPr id="5" name="Text 3"/>
+          <p:cNvSpPr/>
+          <p:nvPr/>
+        </p:nvSpPr>
+        <p:spPr>
+          <a:xfrm>
+            <a:off x="713232" y="1664208"/>
+            <a:ext cx="7498080" cy="2788920"/>
           </a:xfrm>
           <a:prstGeom prst="rect">
             <a:avLst/>
@@ -5387,107 +5773,122 @@
           <a:p>
             <a:pPr marL="342900" indent="-342900">
               <a:lnSpc>
-                <a:spcPct val="125000"/>
+                <a:spcPct val="130000"/>
               </a:lnSpc>
               <a:spcAft>
-                <a:spcPts val="800"/>
+                <a:spcPts val="1100"/>
               </a:spcAft>
               <a:buSzPct val="100000"/>
-              <a:buChar char="•"/>
-            </a:pPr>
-            <a:r>
-              <a:rPr lang="en-US" sz="1700" dirty="0">
-                <a:solidFill>
-                  <a:srgbClr val="374151"/>
-                </a:solidFill>
+              <a:buChar char="–"/>
+            </a:pPr>
+            <a:r>
+              <a:rPr lang="en-US" sz="1650" dirty="0">
+                <a:solidFill>
+                  <a:srgbClr val="23282E"/>
+                </a:solidFill>
+                <a:latin typeface="Corbel" pitchFamily="34" charset="0"/>
+                <a:ea typeface="Corbel" pitchFamily="34" charset="-122"/>
+                <a:cs typeface="Corbel" pitchFamily="34" charset="-120"/>
               </a:rPr>
               <a:t>To establish what is already known, so you do not repeat settled work</a:t>
             </a:r>
-            <a:endParaRPr lang="en-US" sz="1700" dirty="0"/>
+            <a:endParaRPr lang="en-US" sz="1650" dirty="0"/>
           </a:p>
           <a:p>
             <a:pPr marL="342900" indent="-342900">
               <a:lnSpc>
-                <a:spcPct val="125000"/>
+                <a:spcPct val="130000"/>
               </a:lnSpc>
               <a:spcAft>
-                <a:spcPts val="800"/>
+                <a:spcPts val="1100"/>
               </a:spcAft>
               <a:buSzPct val="100000"/>
-              <a:buChar char="•"/>
-            </a:pPr>
-            <a:r>
-              <a:rPr lang="en-US" sz="1700" dirty="0">
-                <a:solidFill>
-                  <a:srgbClr val="374151"/>
-                </a:solidFill>
+              <a:buChar char="–"/>
+            </a:pPr>
+            <a:r>
+              <a:rPr lang="en-US" sz="1650" dirty="0">
+                <a:solidFill>
+                  <a:srgbClr val="23282E"/>
+                </a:solidFill>
+                <a:latin typeface="Corbel" pitchFamily="34" charset="0"/>
+                <a:ea typeface="Corbel" pitchFamily="34" charset="-122"/>
+                <a:cs typeface="Corbel" pitchFamily="34" charset="-120"/>
               </a:rPr>
               <a:t>To locate and justify the gap your study will fill</a:t>
             </a:r>
-            <a:endParaRPr lang="en-US" sz="1700" dirty="0"/>
+            <a:endParaRPr lang="en-US" sz="1650" dirty="0"/>
           </a:p>
           <a:p>
             <a:pPr marL="342900" indent="-342900">
               <a:lnSpc>
-                <a:spcPct val="125000"/>
+                <a:spcPct val="130000"/>
               </a:lnSpc>
               <a:spcAft>
-                <a:spcPts val="800"/>
+                <a:spcPts val="1100"/>
               </a:spcAft>
               <a:buSzPct val="100000"/>
-              <a:buChar char="•"/>
-            </a:pPr>
-            <a:r>
-              <a:rPr lang="en-US" sz="1700" dirty="0">
-                <a:solidFill>
-                  <a:srgbClr val="374151"/>
-                </a:solidFill>
+              <a:buChar char="–"/>
+            </a:pPr>
+            <a:r>
+              <a:rPr lang="en-US" sz="1650" dirty="0">
+                <a:solidFill>
+                  <a:srgbClr val="23282E"/>
+                </a:solidFill>
+                <a:latin typeface="Corbel" pitchFamily="34" charset="0"/>
+                <a:ea typeface="Corbel" pitchFamily="34" charset="-122"/>
+                <a:cs typeface="Corbel" pitchFamily="34" charset="-120"/>
               </a:rPr>
               <a:t>To inform your method — which designs, instruments and measures others found workable</a:t>
             </a:r>
-            <a:endParaRPr lang="en-US" sz="1700" dirty="0"/>
+            <a:endParaRPr lang="en-US" sz="1650" dirty="0"/>
           </a:p>
           <a:p>
             <a:pPr marL="342900" indent="-342900">
               <a:lnSpc>
-                <a:spcPct val="125000"/>
+                <a:spcPct val="130000"/>
               </a:lnSpc>
               <a:spcAft>
-                <a:spcPts val="800"/>
+                <a:spcPts val="1100"/>
               </a:spcAft>
               <a:buSzPct val="100000"/>
-              <a:buChar char="•"/>
-            </a:pPr>
-            <a:r>
-              <a:rPr lang="en-US" sz="1700" dirty="0">
-                <a:solidFill>
-                  <a:srgbClr val="374151"/>
-                </a:solidFill>
+              <a:buChar char="–"/>
+            </a:pPr>
+            <a:r>
+              <a:rPr lang="en-US" sz="1650" dirty="0">
+                <a:solidFill>
+                  <a:srgbClr val="23282E"/>
+                </a:solidFill>
+                <a:latin typeface="Corbel" pitchFamily="34" charset="0"/>
+                <a:ea typeface="Corbel" pitchFamily="34" charset="-122"/>
+                <a:cs typeface="Corbel" pitchFamily="34" charset="-120"/>
               </a:rPr>
               <a:t>To supply the framework against which you will later interpret your own findings</a:t>
             </a:r>
-            <a:endParaRPr lang="en-US" sz="1700" dirty="0"/>
+            <a:endParaRPr lang="en-US" sz="1650" dirty="0"/>
           </a:p>
           <a:p>
             <a:pPr marL="342900" indent="-342900">
               <a:lnSpc>
-                <a:spcPct val="125000"/>
+                <a:spcPct val="130000"/>
               </a:lnSpc>
               <a:spcAft>
-                <a:spcPts val="800"/>
+                <a:spcPts val="1100"/>
               </a:spcAft>
               <a:buSzPct val="100000"/>
-              <a:buChar char="•"/>
-            </a:pPr>
-            <a:r>
-              <a:rPr lang="en-US" sz="1700" dirty="0">
-                <a:solidFill>
-                  <a:srgbClr val="374151"/>
-                </a:solidFill>
+              <a:buChar char="–"/>
+            </a:pPr>
+            <a:r>
+              <a:rPr lang="en-US" sz="1650" dirty="0">
+                <a:solidFill>
+                  <a:srgbClr val="23282E"/>
+                </a:solidFill>
+                <a:latin typeface="Corbel" pitchFamily="34" charset="0"/>
+                <a:ea typeface="Corbel" pitchFamily="34" charset="-122"/>
+                <a:cs typeface="Corbel" pitchFamily="34" charset="-120"/>
               </a:rPr>
               <a:t>A review is an argument leading to your question, not a catalogue of everything published</a:t>
             </a:r>
-            <a:endParaRPr lang="en-US" sz="1700" dirty="0"/>
+            <a:endParaRPr lang="en-US" sz="1650" dirty="0"/>
           </a:p>
         </p:txBody>
       </p:sp>
@@ -5503,8 +5904,8 @@
         </p:nvSpPr>
         <p:spPr>
           <a:xfrm>
-            <a:off x="8503920" y="4709160"/>
-            <a:ext cx="800000" cy="300000"/>
+            <a:off x="566928" y="4700016"/>
+            <a:ext cx="914400" cy="274320"/>
           </a:xfrm>
           <a:prstGeom prst="rect">
             <a:avLst/>
@@ -5519,10 +5920,13 @@
           <a:bodyPr/>
           <a:lstStyle>
             <a:lvl1pPr>
-              <a:defRPr sz="1000">
-                <a:solidFill>
-                  <a:srgbClr val="6B7280"/>
-                </a:solidFill>
+              <a:defRPr sz="900">
+                <a:solidFill>
+                  <a:srgbClr val="5F6B76"/>
+                </a:solidFill>
+                <a:latin typeface="Corbel"/>
+                <a:ea typeface="Corbel"/>
+                <a:cs typeface="Corbel"/>
               </a:defRPr>
             </a:lvl1pPr>
           </a:lstStyle>
@@ -5569,8 +5973,8 @@
         </p:nvSpPr>
         <p:spPr>
           <a:xfrm>
-            <a:off x="502920" y="292608"/>
-            <a:ext cx="8046720" cy="228600"/>
+            <a:off x="566928" y="384048"/>
+            <a:ext cx="7772400" cy="237744"/>
           </a:xfrm>
           <a:prstGeom prst="rect">
             <a:avLst/>
@@ -5586,14 +5990,17 @@
               <a:buNone/>
             </a:pPr>
             <a:r>
-              <a:rPr lang="en-US" sz="1100" b="1" spc="150" kern="0" dirty="0">
-                <a:solidFill>
-                  <a:srgbClr val="00A86B"/>
-                </a:solidFill>
+              <a:rPr lang="en-US" sz="1000" spc="200" kern="0" dirty="0">
+                <a:solidFill>
+                  <a:srgbClr val="9A6A3C"/>
+                </a:solidFill>
+                <a:latin typeface="Corbel" pitchFamily="34" charset="0"/>
+                <a:ea typeface="Corbel" pitchFamily="34" charset="-122"/>
+                <a:cs typeface="Corbel" pitchFamily="34" charset="-120"/>
               </a:rPr>
               <a:t>UNIT 3</a:t>
             </a:r>
-            <a:endParaRPr lang="en-US" sz="1100" dirty="0"/>
+            <a:endParaRPr lang="en-US" sz="1000" dirty="0"/>
           </a:p>
         </p:txBody>
       </p:sp>
@@ -5605,8 +6012,8 @@
         </p:nvSpPr>
         <p:spPr>
           <a:xfrm>
-            <a:off x="502920" y="548640"/>
-            <a:ext cx="8046720" cy="548640"/>
+            <a:off x="566928" y="658368"/>
+            <a:ext cx="7772400" cy="658368"/>
           </a:xfrm>
           <a:prstGeom prst="rect">
             <a:avLst/>
@@ -5615,21 +6022,27 @@
           <a:ln/>
         </p:spPr>
         <p:txBody>
-          <a:bodyPr wrap="square" rtlCol="0" anchor="ctr"/>
+          <a:bodyPr wrap="square" rtlCol="0" anchor="t"/>
           <a:lstStyle/>
           <a:p>
             <a:pPr indent="0" marL="0">
+              <a:lnSpc>
+                <a:spcPct val="100000"/>
+              </a:lnSpc>
               <a:buNone/>
             </a:pPr>
             <a:r>
-              <a:rPr lang="en-US" sz="2400" b="1" dirty="0">
-                <a:solidFill>
-                  <a:srgbClr val="111827"/>
-                </a:solidFill>
+              <a:rPr lang="en-US" sz="2500" dirty="0">
+                <a:solidFill>
+                  <a:srgbClr val="1C3140"/>
+                </a:solidFill>
+                <a:latin typeface="Constantia" pitchFamily="34" charset="0"/>
+                <a:ea typeface="Constantia" pitchFamily="34" charset="-122"/>
+                <a:cs typeface="Constantia" pitchFamily="34" charset="-120"/>
               </a:rPr>
               <a:t>In practice</a:t>
             </a:r>
-            <a:endParaRPr lang="en-US" sz="2400" dirty="0"/>
+            <a:endParaRPr lang="en-US" sz="2500" dirty="0"/>
           </a:p>
         </p:txBody>
       </p:sp>
@@ -5641,28 +6054,48 @@
         </p:nvSpPr>
         <p:spPr>
           <a:xfrm>
-            <a:off x="502920" y="1280160"/>
-            <a:ext cx="54864" cy="2377440"/>
+            <a:off x="566928" y="1335024"/>
+            <a:ext cx="566928" cy="20117"/>
           </a:xfrm>
           <a:prstGeom prst="rect">
             <a:avLst/>
           </a:prstGeom>
           <a:solidFill>
-            <a:srgbClr val="00A86B"/>
+            <a:srgbClr val="9A6A3C"/>
           </a:solidFill>
           <a:ln/>
         </p:spPr>
       </p:sp>
       <p:sp>
         <p:nvSpPr>
-          <p:cNvPr id="5" name="Text 3"/>
+          <p:cNvPr id="5" name="Shape 3"/>
           <p:cNvSpPr/>
           <p:nvPr/>
         </p:nvSpPr>
         <p:spPr>
           <a:xfrm>
-            <a:off x="777240" y="1280160"/>
-            <a:ext cx="7589520" cy="2377440"/>
+            <a:off x="566928" y="1664208"/>
+            <a:ext cx="8010144" cy="2395728"/>
+          </a:xfrm>
+          <a:prstGeom prst="rect">
+            <a:avLst/>
+          </a:prstGeom>
+          <a:solidFill>
+            <a:srgbClr val="F6F4F0"/>
+          </a:solidFill>
+          <a:ln/>
+        </p:spPr>
+      </p:sp>
+      <p:sp>
+        <p:nvSpPr>
+          <p:cNvPr id="6" name="Text 4"/>
+          <p:cNvSpPr/>
+          <p:nvPr/>
+        </p:nvSpPr>
+        <p:spPr>
+          <a:xfrm>
+            <a:off x="932688" y="1847088"/>
+            <a:ext cx="7278624" cy="2029968"/>
           </a:xfrm>
           <a:prstGeom prst="rect">
             <a:avLst/>
@@ -5676,15 +6109,18 @@
           <a:p>
             <a:pPr indent="0" marL="0">
               <a:lnSpc>
-                <a:spcPct val="130000"/>
+                <a:spcPct val="132000"/>
               </a:lnSpc>
               <a:buNone/>
             </a:pPr>
             <a:r>
-              <a:rPr lang="en-US" sz="1600" dirty="0">
-                <a:solidFill>
-                  <a:srgbClr val="374151"/>
-                </a:solidFill>
+              <a:rPr lang="en-US" sz="1600" i="1" dirty="0">
+                <a:solidFill>
+                  <a:srgbClr val="1C3140"/>
+                </a:solidFill>
+                <a:latin typeface="Constantia" pitchFamily="34" charset="0"/>
+                <a:ea typeface="Constantia" pitchFamily="34" charset="-122"/>
+                <a:cs typeface="Constantia" pitchFamily="34" charset="-120"/>
               </a:rPr>
               <a:t>The single most common examiner criticism is a review that summarises twenty studies in twenty paragraphs and never says what they collectively mean. If a paragraph begins with an author name rather than an idea, suspect this failure.</a:t>
             </a:r>
@@ -5704,8 +6140,8 @@
         </p:nvSpPr>
         <p:spPr>
           <a:xfrm>
-            <a:off x="8503920" y="4709160"/>
-            <a:ext cx="800000" cy="300000"/>
+            <a:off x="566928" y="4700016"/>
+            <a:ext cx="914400" cy="274320"/>
           </a:xfrm>
           <a:prstGeom prst="rect">
             <a:avLst/>
@@ -5720,10 +6156,13 @@
           <a:bodyPr/>
           <a:lstStyle>
             <a:lvl1pPr>
-              <a:defRPr sz="1000">
-                <a:solidFill>
-                  <a:srgbClr val="6B7280"/>
-                </a:solidFill>
+              <a:defRPr sz="900">
+                <a:solidFill>
+                  <a:srgbClr val="5F6B76"/>
+                </a:solidFill>
+                <a:latin typeface="Corbel"/>
+                <a:ea typeface="Corbel"/>
+                <a:cs typeface="Corbel"/>
               </a:defRPr>
             </a:lvl1pPr>
           </a:lstStyle>
@@ -5770,8 +6209,8 @@
         </p:nvSpPr>
         <p:spPr>
           <a:xfrm>
-            <a:off x="502920" y="292608"/>
-            <a:ext cx="8046720" cy="228600"/>
+            <a:off x="566928" y="384048"/>
+            <a:ext cx="7772400" cy="237744"/>
           </a:xfrm>
           <a:prstGeom prst="rect">
             <a:avLst/>
@@ -5787,14 +6226,17 @@
               <a:buNone/>
             </a:pPr>
             <a:r>
-              <a:rPr lang="en-US" sz="1100" b="1" spc="150" kern="0" dirty="0">
-                <a:solidFill>
-                  <a:srgbClr val="0066CC"/>
-                </a:solidFill>
+              <a:rPr lang="en-US" sz="1000" spc="200" kern="0" dirty="0">
+                <a:solidFill>
+                  <a:srgbClr val="9A6A3C"/>
+                </a:solidFill>
+                <a:latin typeface="Corbel" pitchFamily="34" charset="0"/>
+                <a:ea typeface="Corbel" pitchFamily="34" charset="-122"/>
+                <a:cs typeface="Corbel" pitchFamily="34" charset="-120"/>
               </a:rPr>
               <a:t>UNIT 3</a:t>
             </a:r>
-            <a:endParaRPr lang="en-US" sz="1100" dirty="0"/>
+            <a:endParaRPr lang="en-US" sz="1000" dirty="0"/>
           </a:p>
         </p:txBody>
       </p:sp>
@@ -5806,8 +6248,8 @@
         </p:nvSpPr>
         <p:spPr>
           <a:xfrm>
-            <a:off x="502920" y="548640"/>
-            <a:ext cx="8046720" cy="640080"/>
+            <a:off x="566928" y="658368"/>
+            <a:ext cx="7772400" cy="658368"/>
           </a:xfrm>
           <a:prstGeom prst="rect">
             <a:avLst/>
@@ -5820,30 +6262,56 @@
           <a:lstStyle/>
           <a:p>
             <a:pPr indent="0" marL="0">
+              <a:lnSpc>
+                <a:spcPct val="100000"/>
+              </a:lnSpc>
               <a:buNone/>
             </a:pPr>
             <a:r>
-              <a:rPr lang="en-US" sz="2400" b="1" dirty="0">
-                <a:solidFill>
-                  <a:srgbClr val="111827"/>
-                </a:solidFill>
+              <a:rPr lang="en-US" sz="2500" dirty="0">
+                <a:solidFill>
+                  <a:srgbClr val="1C3140"/>
+                </a:solidFill>
+                <a:latin typeface="Constantia" pitchFamily="34" charset="0"/>
+                <a:ea typeface="Constantia" pitchFamily="34" charset="-122"/>
+                <a:cs typeface="Constantia" pitchFamily="34" charset="-120"/>
               </a:rPr>
               <a:t>Types of review (1/2)</a:t>
             </a:r>
-            <a:endParaRPr lang="en-US" sz="2400" dirty="0"/>
-          </a:p>
-        </p:txBody>
-      </p:sp>
-      <p:sp>
-        <p:nvSpPr>
-          <p:cNvPr id="4" name="Text 2"/>
+            <a:endParaRPr lang="en-US" sz="2500" dirty="0"/>
+          </a:p>
+        </p:txBody>
+      </p:sp>
+      <p:sp>
+        <p:nvSpPr>
+          <p:cNvPr id="4" name="Shape 2"/>
           <p:cNvSpPr/>
           <p:nvPr/>
         </p:nvSpPr>
         <p:spPr>
           <a:xfrm>
-            <a:off x="685800" y="1325880"/>
-            <a:ext cx="7772400" cy="3200400"/>
+            <a:off x="566928" y="1335024"/>
+            <a:ext cx="566928" cy="20117"/>
+          </a:xfrm>
+          <a:prstGeom prst="rect">
+            <a:avLst/>
+          </a:prstGeom>
+          <a:solidFill>
+            <a:srgbClr val="9A6A3C"/>
+          </a:solidFill>
+          <a:ln/>
+        </p:spPr>
+      </p:sp>
+      <p:sp>
+        <p:nvSpPr>
+          <p:cNvPr id="5" name="Text 3"/>
+          <p:cNvSpPr/>
+          <p:nvPr/>
+        </p:nvSpPr>
+        <p:spPr>
+          <a:xfrm>
+            <a:off x="713232" y="1664208"/>
+            <a:ext cx="7498080" cy="2788920"/>
           </a:xfrm>
           <a:prstGeom prst="rect">
             <a:avLst/>
@@ -5857,19 +6325,22 @@
           <a:p>
             <a:pPr marL="342900" indent="-342900">
               <a:lnSpc>
-                <a:spcPct val="125000"/>
+                <a:spcPct val="130000"/>
               </a:lnSpc>
               <a:spcAft>
-                <a:spcPts val="800"/>
+                <a:spcPts val="1100"/>
               </a:spcAft>
               <a:buSzPct val="100000"/>
-              <a:buChar char="•"/>
+              <a:buChar char="–"/>
             </a:pPr>
             <a:r>
               <a:rPr lang="en-US" sz="1500" dirty="0">
                 <a:solidFill>
-                  <a:srgbClr val="374151"/>
-                </a:solidFill>
+                  <a:srgbClr val="23282E"/>
+                </a:solidFill>
+                <a:latin typeface="Corbel" pitchFamily="34" charset="0"/>
+                <a:ea typeface="Corbel" pitchFamily="34" charset="-122"/>
+                <a:cs typeface="Corbel" pitchFamily="34" charset="-120"/>
               </a:rPr>
               <a:t>Narrative review — broad, expert overview; flexible but vulnerable to selection bias</a:t>
             </a:r>
@@ -5878,19 +6349,22 @@
           <a:p>
             <a:pPr marL="342900" indent="-342900">
               <a:lnSpc>
-                <a:spcPct val="125000"/>
+                <a:spcPct val="130000"/>
               </a:lnSpc>
               <a:spcAft>
-                <a:spcPts val="800"/>
+                <a:spcPts val="1100"/>
               </a:spcAft>
               <a:buSzPct val="100000"/>
-              <a:buChar char="•"/>
+              <a:buChar char="–"/>
             </a:pPr>
             <a:r>
               <a:rPr lang="en-US" sz="1500" dirty="0">
                 <a:solidFill>
-                  <a:srgbClr val="374151"/>
-                </a:solidFill>
+                  <a:srgbClr val="23282E"/>
+                </a:solidFill>
+                <a:latin typeface="Corbel" pitchFamily="34" charset="0"/>
+                <a:ea typeface="Corbel" pitchFamily="34" charset="-122"/>
+                <a:cs typeface="Corbel" pitchFamily="34" charset="-120"/>
               </a:rPr>
               <a:t>Scoping review — maps the extent and nature of evidence and identifies gaps; ideal when a field is new or heterogeneous</a:t>
             </a:r>
@@ -5899,19 +6373,22 @@
           <a:p>
             <a:pPr marL="342900" indent="-342900">
               <a:lnSpc>
-                <a:spcPct val="125000"/>
+                <a:spcPct val="130000"/>
               </a:lnSpc>
               <a:spcAft>
-                <a:spcPts val="800"/>
+                <a:spcPts val="1100"/>
               </a:spcAft>
               <a:buSzPct val="100000"/>
-              <a:buChar char="•"/>
+              <a:buChar char="–"/>
             </a:pPr>
             <a:r>
               <a:rPr lang="en-US" sz="1500" dirty="0">
                 <a:solidFill>
-                  <a:srgbClr val="374151"/>
-                </a:solidFill>
+                  <a:srgbClr val="23282E"/>
+                </a:solidFill>
+                <a:latin typeface="Corbel" pitchFamily="34" charset="0"/>
+                <a:ea typeface="Corbel" pitchFamily="34" charset="-122"/>
+                <a:cs typeface="Corbel" pitchFamily="34" charset="-120"/>
               </a:rPr>
               <a:t>Systematic review — answers a focused question using a pre-registered protocol and exhaustive search; the highest standard, and the most work</a:t>
             </a:r>
@@ -5920,19 +6397,22 @@
           <a:p>
             <a:pPr marL="342900" indent="-342900">
               <a:lnSpc>
-                <a:spcPct val="125000"/>
+                <a:spcPct val="130000"/>
               </a:lnSpc>
               <a:spcAft>
-                <a:spcPts val="800"/>
+                <a:spcPts val="1100"/>
               </a:spcAft>
               <a:buSzPct val="100000"/>
-              <a:buChar char="•"/>
+              <a:buChar char="–"/>
             </a:pPr>
             <a:r>
               <a:rPr lang="en-US" sz="1500" dirty="0">
                 <a:solidFill>
-                  <a:srgbClr val="374151"/>
-                </a:solidFill>
+                  <a:srgbClr val="23282E"/>
+                </a:solidFill>
+                <a:latin typeface="Corbel" pitchFamily="34" charset="0"/>
+                <a:ea typeface="Corbel" pitchFamily="34" charset="-122"/>
+                <a:cs typeface="Corbel" pitchFamily="34" charset="-120"/>
               </a:rPr>
               <a:t>Meta-analysis — statistical pooling of results across studies; only valid when studies are sufficiently comparable</a:t>
             </a:r>
@@ -5952,8 +6432,8 @@
         </p:nvSpPr>
         <p:spPr>
           <a:xfrm>
-            <a:off x="8503920" y="4709160"/>
-            <a:ext cx="800000" cy="300000"/>
+            <a:off x="566928" y="4700016"/>
+            <a:ext cx="914400" cy="274320"/>
           </a:xfrm>
           <a:prstGeom prst="rect">
             <a:avLst/>
@@ -5968,10 +6448,13 @@
           <a:bodyPr/>
           <a:lstStyle>
             <a:lvl1pPr>
-              <a:defRPr sz="1000">
-                <a:solidFill>
-                  <a:srgbClr val="6B7280"/>
-                </a:solidFill>
+              <a:defRPr sz="900">
+                <a:solidFill>
+                  <a:srgbClr val="5F6B76"/>
+                </a:solidFill>
+                <a:latin typeface="Corbel"/>
+                <a:ea typeface="Corbel"/>
+                <a:cs typeface="Corbel"/>
               </a:defRPr>
             </a:lvl1pPr>
           </a:lstStyle>
@@ -6018,8 +6501,8 @@
         </p:nvSpPr>
         <p:spPr>
           <a:xfrm>
-            <a:off x="502920" y="292608"/>
-            <a:ext cx="8046720" cy="228600"/>
+            <a:off x="566928" y="384048"/>
+            <a:ext cx="7772400" cy="237744"/>
           </a:xfrm>
           <a:prstGeom prst="rect">
             <a:avLst/>
@@ -6035,14 +6518,17 @@
               <a:buNone/>
             </a:pPr>
             <a:r>
-              <a:rPr lang="en-US" sz="1100" b="1" spc="150" kern="0" dirty="0">
-                <a:solidFill>
-                  <a:srgbClr val="0066CC"/>
-                </a:solidFill>
+              <a:rPr lang="en-US" sz="1000" spc="200" kern="0" dirty="0">
+                <a:solidFill>
+                  <a:srgbClr val="9A6A3C"/>
+                </a:solidFill>
+                <a:latin typeface="Corbel" pitchFamily="34" charset="0"/>
+                <a:ea typeface="Corbel" pitchFamily="34" charset="-122"/>
+                <a:cs typeface="Corbel" pitchFamily="34" charset="-120"/>
               </a:rPr>
               <a:t>UNIT 3</a:t>
             </a:r>
-            <a:endParaRPr lang="en-US" sz="1100" dirty="0"/>
+            <a:endParaRPr lang="en-US" sz="1000" dirty="0"/>
           </a:p>
         </p:txBody>
       </p:sp>
@@ -6054,8 +6540,8 @@
         </p:nvSpPr>
         <p:spPr>
           <a:xfrm>
-            <a:off x="502920" y="548640"/>
-            <a:ext cx="8046720" cy="640080"/>
+            <a:off x="566928" y="658368"/>
+            <a:ext cx="7772400" cy="658368"/>
           </a:xfrm>
           <a:prstGeom prst="rect">
             <a:avLst/>
@@ -6068,30 +6554,56 @@
           <a:lstStyle/>
           <a:p>
             <a:pPr indent="0" marL="0">
+              <a:lnSpc>
+                <a:spcPct val="100000"/>
+              </a:lnSpc>
               <a:buNone/>
             </a:pPr>
             <a:r>
-              <a:rPr lang="en-US" sz="2400" b="1" dirty="0">
-                <a:solidFill>
-                  <a:srgbClr val="111827"/>
-                </a:solidFill>
+              <a:rPr lang="en-US" sz="2500" dirty="0">
+                <a:solidFill>
+                  <a:srgbClr val="1C3140"/>
+                </a:solidFill>
+                <a:latin typeface="Constantia" pitchFamily="34" charset="0"/>
+                <a:ea typeface="Constantia" pitchFamily="34" charset="-122"/>
+                <a:cs typeface="Constantia" pitchFamily="34" charset="-120"/>
               </a:rPr>
               <a:t>Types of review (2/2)</a:t>
             </a:r>
-            <a:endParaRPr lang="en-US" sz="2400" dirty="0"/>
-          </a:p>
-        </p:txBody>
-      </p:sp>
-      <p:sp>
-        <p:nvSpPr>
-          <p:cNvPr id="4" name="Text 2"/>
+            <a:endParaRPr lang="en-US" sz="2500" dirty="0"/>
+          </a:p>
+        </p:txBody>
+      </p:sp>
+      <p:sp>
+        <p:nvSpPr>
+          <p:cNvPr id="4" name="Shape 2"/>
           <p:cNvSpPr/>
           <p:nvPr/>
         </p:nvSpPr>
         <p:spPr>
           <a:xfrm>
-            <a:off x="685800" y="1325880"/>
-            <a:ext cx="7772400" cy="3200400"/>
+            <a:off x="566928" y="1335024"/>
+            <a:ext cx="566928" cy="20117"/>
+          </a:xfrm>
+          <a:prstGeom prst="rect">
+            <a:avLst/>
+          </a:prstGeom>
+          <a:solidFill>
+            <a:srgbClr val="9A6A3C"/>
+          </a:solidFill>
+          <a:ln/>
+        </p:spPr>
+      </p:sp>
+      <p:sp>
+        <p:nvSpPr>
+          <p:cNvPr id="5" name="Text 3"/>
+          <p:cNvSpPr/>
+          <p:nvPr/>
+        </p:nvSpPr>
+        <p:spPr>
+          <a:xfrm>
+            <a:off x="713232" y="1664208"/>
+            <a:ext cx="7498080" cy="2788920"/>
           </a:xfrm>
           <a:prstGeom prst="rect">
             <a:avLst/>
@@ -6105,19 +6617,22 @@
           <a:p>
             <a:pPr marL="342900" indent="-342900">
               <a:lnSpc>
-                <a:spcPct val="125000"/>
+                <a:spcPct val="130000"/>
               </a:lnSpc>
               <a:spcAft>
-                <a:spcPts val="800"/>
+                <a:spcPts val="1100"/>
               </a:spcAft>
               <a:buSzPct val="100000"/>
-              <a:buChar char="•"/>
+              <a:buChar char="–"/>
             </a:pPr>
             <a:r>
               <a:rPr lang="en-US" sz="1500" dirty="0">
                 <a:solidFill>
-                  <a:srgbClr val="374151"/>
-                </a:solidFill>
+                  <a:srgbClr val="23282E"/>
+                </a:solidFill>
+                <a:latin typeface="Corbel" pitchFamily="34" charset="0"/>
+                <a:ea typeface="Corbel" pitchFamily="34" charset="-122"/>
+                <a:cs typeface="Corbel" pitchFamily="34" charset="-120"/>
               </a:rPr>
               <a:t>Rapid review — systematic methods with deliberate, documented shortcuts, used under time pressure</a:t>
             </a:r>
@@ -6126,19 +6641,22 @@
           <a:p>
             <a:pPr marL="342900" indent="-342900">
               <a:lnSpc>
-                <a:spcPct val="125000"/>
+                <a:spcPct val="130000"/>
               </a:lnSpc>
               <a:spcAft>
-                <a:spcPts val="800"/>
+                <a:spcPts val="1100"/>
               </a:spcAft>
               <a:buSzPct val="100000"/>
-              <a:buChar char="•"/>
+              <a:buChar char="–"/>
             </a:pPr>
             <a:r>
               <a:rPr lang="en-US" sz="1500" dirty="0">
                 <a:solidFill>
-                  <a:srgbClr val="374151"/>
-                </a:solidFill>
+                  <a:srgbClr val="23282E"/>
+                </a:solidFill>
+                <a:latin typeface="Corbel" pitchFamily="34" charset="0"/>
+                <a:ea typeface="Corbel" pitchFamily="34" charset="-122"/>
+                <a:cs typeface="Corbel" pitchFamily="34" charset="-120"/>
               </a:rPr>
               <a:t>Integrative review — combines experimental and non-experimental evidence, common in nursing and health services research</a:t>
             </a:r>
@@ -6158,8 +6676,8 @@
         </p:nvSpPr>
         <p:spPr>
           <a:xfrm>
-            <a:off x="8503920" y="4709160"/>
-            <a:ext cx="800000" cy="300000"/>
+            <a:off x="566928" y="4700016"/>
+            <a:ext cx="914400" cy="274320"/>
           </a:xfrm>
           <a:prstGeom prst="rect">
             <a:avLst/>
@@ -6174,10 +6692,13 @@
           <a:bodyPr/>
           <a:lstStyle>
             <a:lvl1pPr>
-              <a:defRPr sz="1000">
-                <a:solidFill>
-                  <a:srgbClr val="6B7280"/>
-                </a:solidFill>
+              <a:defRPr sz="900">
+                <a:solidFill>
+                  <a:srgbClr val="5F6B76"/>
+                </a:solidFill>
+                <a:latin typeface="Corbel"/>
+                <a:ea typeface="Corbel"/>
+                <a:cs typeface="Corbel"/>
               </a:defRPr>
             </a:lvl1pPr>
           </a:lstStyle>
@@ -6224,8 +6745,8 @@
         </p:nvSpPr>
         <p:spPr>
           <a:xfrm>
-            <a:off x="502920" y="292608"/>
-            <a:ext cx="8046720" cy="228600"/>
+            <a:off x="566928" y="384048"/>
+            <a:ext cx="7772400" cy="237744"/>
           </a:xfrm>
           <a:prstGeom prst="rect">
             <a:avLst/>
@@ -6241,14 +6762,17 @@
               <a:buNone/>
             </a:pPr>
             <a:r>
-              <a:rPr lang="en-US" sz="1100" b="1" spc="150" kern="0" dirty="0">
-                <a:solidFill>
-                  <a:srgbClr val="0066CC"/>
-                </a:solidFill>
+              <a:rPr lang="en-US" sz="1000" spc="200" kern="0" dirty="0">
+                <a:solidFill>
+                  <a:srgbClr val="9A6A3C"/>
+                </a:solidFill>
+                <a:latin typeface="Corbel" pitchFamily="34" charset="0"/>
+                <a:ea typeface="Corbel" pitchFamily="34" charset="-122"/>
+                <a:cs typeface="Corbel" pitchFamily="34" charset="-120"/>
               </a:rPr>
               <a:t>UNIT 3</a:t>
             </a:r>
-            <a:endParaRPr lang="en-US" sz="1100" dirty="0"/>
+            <a:endParaRPr lang="en-US" sz="1000" dirty="0"/>
           </a:p>
         </p:txBody>
       </p:sp>
@@ -6260,8 +6784,8 @@
         </p:nvSpPr>
         <p:spPr>
           <a:xfrm>
-            <a:off x="502920" y="548640"/>
-            <a:ext cx="8046720" cy="548640"/>
+            <a:off x="566928" y="658368"/>
+            <a:ext cx="7772400" cy="658368"/>
           </a:xfrm>
           <a:prstGeom prst="rect">
             <a:avLst/>
@@ -6274,19 +6798,45 @@
           <a:lstStyle/>
           <a:p>
             <a:pPr indent="0" marL="0">
+              <a:lnSpc>
+                <a:spcPct val="100000"/>
+              </a:lnSpc>
               <a:buNone/>
             </a:pPr>
             <a:r>
-              <a:rPr lang="en-US" sz="2200" b="1" dirty="0">
-                <a:solidFill>
-                  <a:srgbClr val="111827"/>
-                </a:solidFill>
+              <a:rPr lang="en-US" sz="2500" dirty="0">
+                <a:solidFill>
+                  <a:srgbClr val="1C3140"/>
+                </a:solidFill>
+                <a:latin typeface="Constantia" pitchFamily="34" charset="0"/>
+                <a:ea typeface="Constantia" pitchFamily="34" charset="-122"/>
+                <a:cs typeface="Constantia" pitchFamily="34" charset="-120"/>
               </a:rPr>
               <a:t>Choosing a review type</a:t>
             </a:r>
-            <a:endParaRPr lang="en-US" sz="2200" dirty="0"/>
-          </a:p>
-        </p:txBody>
+            <a:endParaRPr lang="en-US" sz="2500" dirty="0"/>
+          </a:p>
+        </p:txBody>
+      </p:sp>
+      <p:sp>
+        <p:nvSpPr>
+          <p:cNvPr id="4" name="Shape 2"/>
+          <p:cNvSpPr/>
+          <p:nvPr/>
+        </p:nvSpPr>
+        <p:spPr>
+          <a:xfrm>
+            <a:off x="566928" y="1335024"/>
+            <a:ext cx="566928" cy="20117"/>
+          </a:xfrm>
+          <a:prstGeom prst="rect">
+            <a:avLst/>
+          </a:prstGeom>
+          <a:solidFill>
+            <a:srgbClr val="9A6A3C"/>
+          </a:solidFill>
+          <a:ln/>
+        </p:spPr>
       </p:sp>
       <p:graphicFrame>
         <p:nvGraphicFramePr>
@@ -6303,17 +6853,17 @@
           </p:nvPr>
         </p:nvGraphicFramePr>
         <p:xfrm>
-          <a:off x="502920" y="1234440"/>
-          <a:ext cx="8138160" cy="914400"/>
+          <a:off x="566928" y="1627632"/>
+          <a:ext cx="8010144" cy="914400"/>
         </p:xfrm>
         <a:graphic>
           <a:graphicData uri="http://schemas.openxmlformats.org/drawingml/2006/table">
             <a:tbl>
               <a:tblPr/>
               <a:tblGrid>
-                <a:gridCol w="2712720"/>
-                <a:gridCol w="2712720"/>
-                <a:gridCol w="2712720"/>
+                <a:gridCol w="2670048"/>
+                <a:gridCol w="2670048"/>
+                <a:gridCol w="2670048"/>
               </a:tblGrid>
               <a:tr h="0">
                 <a:tc>
@@ -6327,45 +6877,52 @@
                       <a:r>
                         <a:rPr lang="en-US" sz="1100" b="1" dirty="0">
                           <a:solidFill>
-                            <a:srgbClr val="FFFFFF"/>
+                            <a:srgbClr val="1C3140"/>
                           </a:solidFill>
+                          <a:latin typeface="Corbel" pitchFamily="34" charset="0"/>
+                          <a:ea typeface="Corbel" pitchFamily="34" charset="-122"/>
+                          <a:cs typeface="Corbel" pitchFamily="34" charset="-120"/>
                         </a:rPr>
                         <a:t>If your purpose is…</a:t>
                       </a:r>
-                      <a:endParaRPr lang="en-US" sz="1100" dirty="0"/>
+                      <a:endParaRPr lang="en-US" sz="1100" dirty="0">
+                        <a:latin typeface="Corbel" charset="0"/>
+                        <a:ea typeface="Corbel" charset="0"/>
+                        <a:cs typeface="Corbel" charset="0"/>
+                      </a:endParaRPr>
                     </a:p>
                   </a:txBody>
-                  <a:tcPr marL="91440" marR="91440" marT="45720" marB="45720" anchor="t">
-                    <a:lnL w="6350" cap="flat" cmpd="sng" algn="ctr">
+                  <a:tcPr marL="76200" marR="76200" marT="76200" marB="76200" anchor="t">
+                    <a:lnL w="5080" cap="flat" cmpd="sng" algn="ctr">
                       <a:solidFill>
-                        <a:srgbClr val="D1D5DB"/>
+                        <a:srgbClr val="D8D3CB"/>
                       </a:solidFill>
                       <a:prstDash val="solid"/>
                       <a:round/>
                       <a:headEnd type="none" w="med" len="med"/>
                       <a:tailEnd type="none" w="med" len="med"/>
                     </a:lnL>
-                    <a:lnR w="6350" cap="flat" cmpd="sng" algn="ctr">
+                    <a:lnR w="5080" cap="flat" cmpd="sng" algn="ctr">
                       <a:solidFill>
-                        <a:srgbClr val="D1D5DB"/>
+                        <a:srgbClr val="D8D3CB"/>
                       </a:solidFill>
                       <a:prstDash val="solid"/>
                       <a:round/>
                       <a:headEnd type="none" w="med" len="med"/>
                       <a:tailEnd type="none" w="med" len="med"/>
                     </a:lnR>
-                    <a:lnT w="6350" cap="flat" cmpd="sng" algn="ctr">
+                    <a:lnT w="5080" cap="flat" cmpd="sng" algn="ctr">
                       <a:solidFill>
-                        <a:srgbClr val="D1D5DB"/>
+                        <a:srgbClr val="D8D3CB"/>
                       </a:solidFill>
                       <a:prstDash val="solid"/>
                       <a:round/>
                       <a:headEnd type="none" w="med" len="med"/>
                       <a:tailEnd type="none" w="med" len="med"/>
                     </a:lnT>
-                    <a:lnB w="6350" cap="flat" cmpd="sng" algn="ctr">
+                    <a:lnB w="5080" cap="flat" cmpd="sng" algn="ctr">
                       <a:solidFill>
-                        <a:srgbClr val="D1D5DB"/>
+                        <a:srgbClr val="D8D3CB"/>
                       </a:solidFill>
                       <a:prstDash val="solid"/>
                       <a:round/>
@@ -6373,7 +6930,7 @@
                       <a:tailEnd type="none" w="med" len="med"/>
                     </a:lnB>
                     <a:solidFill>
-                      <a:srgbClr val="004D99"/>
+                      <a:srgbClr val="F6F4F0"/>
                     </a:solidFill>
                   </a:tcPr>
                 </a:tc>
@@ -6388,45 +6945,52 @@
                       <a:r>
                         <a:rPr lang="en-US" sz="1100" b="1" dirty="0">
                           <a:solidFill>
-                            <a:srgbClr val="FFFFFF"/>
+                            <a:srgbClr val="1C3140"/>
                           </a:solidFill>
+                          <a:latin typeface="Corbel" pitchFamily="34" charset="0"/>
+                          <a:ea typeface="Corbel" pitchFamily="34" charset="-122"/>
+                          <a:cs typeface="Corbel" pitchFamily="34" charset="-120"/>
                         </a:rPr>
                         <a:t>Use</a:t>
                       </a:r>
-                      <a:endParaRPr lang="en-US" sz="1100" dirty="0"/>
+                      <a:endParaRPr lang="en-US" sz="1100" dirty="0">
+                        <a:latin typeface="Corbel" charset="0"/>
+                        <a:ea typeface="Corbel" charset="0"/>
+                        <a:cs typeface="Corbel" charset="0"/>
+                      </a:endParaRPr>
                     </a:p>
                   </a:txBody>
-                  <a:tcPr marL="91440" marR="91440" marT="45720" marB="45720" anchor="t">
-                    <a:lnL w="6350" cap="flat" cmpd="sng" algn="ctr">
+                  <a:tcPr marL="76200" marR="76200" marT="76200" marB="76200" anchor="t">
+                    <a:lnL w="5080" cap="flat" cmpd="sng" algn="ctr">
                       <a:solidFill>
-                        <a:srgbClr val="D1D5DB"/>
+                        <a:srgbClr val="D8D3CB"/>
                       </a:solidFill>
                       <a:prstDash val="solid"/>
                       <a:round/>
                       <a:headEnd type="none" w="med" len="med"/>
                       <a:tailEnd type="none" w="med" len="med"/>
                     </a:lnL>
-                    <a:lnR w="6350" cap="flat" cmpd="sng" algn="ctr">
+                    <a:lnR w="5080" cap="flat" cmpd="sng" algn="ctr">
                       <a:solidFill>
-                        <a:srgbClr val="D1D5DB"/>
+                        <a:srgbClr val="D8D3CB"/>
                       </a:solidFill>
                       <a:prstDash val="solid"/>
                       <a:round/>
                       <a:headEnd type="none" w="med" len="med"/>
                       <a:tailEnd type="none" w="med" len="med"/>
                     </a:lnR>
-                    <a:lnT w="6350" cap="flat" cmpd="sng" algn="ctr">
+                    <a:lnT w="5080" cap="flat" cmpd="sng" algn="ctr">
                       <a:solidFill>
-                        <a:srgbClr val="D1D5DB"/>
+                        <a:srgbClr val="D8D3CB"/>
                       </a:solidFill>
                       <a:prstDash val="solid"/>
                       <a:round/>
                       <a:headEnd type="none" w="med" len="med"/>
                       <a:tailEnd type="none" w="med" len="med"/>
                     </a:lnT>
-                    <a:lnB w="6350" cap="flat" cmpd="sng" algn="ctr">
+                    <a:lnB w="5080" cap="flat" cmpd="sng" algn="ctr">
                       <a:solidFill>
-                        <a:srgbClr val="D1D5DB"/>
+                        <a:srgbClr val="D8D3CB"/>
                       </a:solidFill>
                       <a:prstDash val="solid"/>
                       <a:round/>
@@ -6434,7 +6998,7 @@
                       <a:tailEnd type="none" w="med" len="med"/>
                     </a:lnB>
                     <a:solidFill>
-                      <a:srgbClr val="004D99"/>
+                      <a:srgbClr val="F6F4F0"/>
                     </a:solidFill>
                   </a:tcPr>
                 </a:tc>
@@ -6449,45 +7013,52 @@
                       <a:r>
                         <a:rPr lang="en-US" sz="1100" b="1" dirty="0">
                           <a:solidFill>
-                            <a:srgbClr val="FFFFFF"/>
+                            <a:srgbClr val="1C3140"/>
                           </a:solidFill>
+                          <a:latin typeface="Corbel" pitchFamily="34" charset="0"/>
+                          <a:ea typeface="Corbel" pitchFamily="34" charset="-122"/>
+                          <a:cs typeface="Corbel" pitchFamily="34" charset="-120"/>
                         </a:rPr>
                         <a:t>Typical effort</a:t>
                       </a:r>
-                      <a:endParaRPr lang="en-US" sz="1100" dirty="0"/>
+                      <a:endParaRPr lang="en-US" sz="1100" dirty="0">
+                        <a:latin typeface="Corbel" charset="0"/>
+                        <a:ea typeface="Corbel" charset="0"/>
+                        <a:cs typeface="Corbel" charset="0"/>
+                      </a:endParaRPr>
                     </a:p>
                   </a:txBody>
-                  <a:tcPr marL="91440" marR="91440" marT="45720" marB="45720" anchor="t">
-                    <a:lnL w="6350" cap="flat" cmpd="sng" algn="ctr">
+                  <a:tcPr marL="76200" marR="76200" marT="76200" marB="76200" anchor="t">
+                    <a:lnL w="5080" cap="flat" cmpd="sng" algn="ctr">
                       <a:solidFill>
-                        <a:srgbClr val="D1D5DB"/>
+                        <a:srgbClr val="D8D3CB"/>
                       </a:solidFill>
                       <a:prstDash val="solid"/>
                       <a:round/>
                       <a:headEnd type="none" w="med" len="med"/>
                       <a:tailEnd type="none" w="med" len="med"/>
                     </a:lnL>
-                    <a:lnR w="6350" cap="flat" cmpd="sng" algn="ctr">
+                    <a:lnR w="5080" cap="flat" cmpd="sng" algn="ctr">
                       <a:solidFill>
-                        <a:srgbClr val="D1D5DB"/>
+                        <a:srgbClr val="D8D3CB"/>
                       </a:solidFill>
                       <a:prstDash val="solid"/>
                       <a:round/>
                       <a:headEnd type="none" w="med" len="med"/>
                       <a:tailEnd type="none" w="med" len="med"/>
                     </a:lnR>
-                    <a:lnT w="6350" cap="flat" cmpd="sng" algn="ctr">
+                    <a:lnT w="5080" cap="flat" cmpd="sng" algn="ctr">
                       <a:solidFill>
-                        <a:srgbClr val="D1D5DB"/>
+                        <a:srgbClr val="D8D3CB"/>
                       </a:solidFill>
                       <a:prstDash val="solid"/>
                       <a:round/>
                       <a:headEnd type="none" w="med" len="med"/>
                       <a:tailEnd type="none" w="med" len="med"/>
                     </a:lnT>
-                    <a:lnB w="6350" cap="flat" cmpd="sng" algn="ctr">
+                    <a:lnB w="5080" cap="flat" cmpd="sng" algn="ctr">
                       <a:solidFill>
-                        <a:srgbClr val="D1D5DB"/>
+                        <a:srgbClr val="D8D3CB"/>
                       </a:solidFill>
                       <a:prstDash val="solid"/>
                       <a:round/>
@@ -6495,7 +7066,7 @@
                       <a:tailEnd type="none" w="med" len="med"/>
                     </a:lnB>
                     <a:solidFill>
-                      <a:srgbClr val="004D99"/>
+                      <a:srgbClr val="F6F4F0"/>
                     </a:solidFill>
                   </a:tcPr>
                 </a:tc>
@@ -6512,45 +7083,52 @@
                       <a:r>
                         <a:rPr lang="en-US" sz="1100" dirty="0">
                           <a:solidFill>
-                            <a:srgbClr val="374151"/>
+                            <a:srgbClr val="23282E"/>
                           </a:solidFill>
+                          <a:latin typeface="Corbel" pitchFamily="34" charset="0"/>
+                          <a:ea typeface="Corbel" pitchFamily="34" charset="-122"/>
+                          <a:cs typeface="Corbel" pitchFamily="34" charset="-120"/>
                         </a:rPr>
                         <a:t>Introduce a thesis chapter</a:t>
                       </a:r>
-                      <a:endParaRPr lang="en-US" sz="1100" dirty="0"/>
+                      <a:endParaRPr lang="en-US" sz="1100" dirty="0">
+                        <a:latin typeface="Corbel" charset="0"/>
+                        <a:ea typeface="Corbel" charset="0"/>
+                        <a:cs typeface="Corbel" charset="0"/>
+                      </a:endParaRPr>
                     </a:p>
                   </a:txBody>
-                  <a:tcPr marL="91440" marR="91440" marT="45720" marB="45720" anchor="t">
-                    <a:lnL w="6350" cap="flat" cmpd="sng" algn="ctr">
+                  <a:tcPr marL="76200" marR="76200" marT="76200" marB="76200" anchor="t">
+                    <a:lnL w="5080" cap="flat" cmpd="sng" algn="ctr">
                       <a:solidFill>
-                        <a:srgbClr val="D1D5DB"/>
+                        <a:srgbClr val="D8D3CB"/>
                       </a:solidFill>
                       <a:prstDash val="solid"/>
                       <a:round/>
                       <a:headEnd type="none" w="med" len="med"/>
                       <a:tailEnd type="none" w="med" len="med"/>
                     </a:lnL>
-                    <a:lnR w="6350" cap="flat" cmpd="sng" algn="ctr">
+                    <a:lnR w="5080" cap="flat" cmpd="sng" algn="ctr">
                       <a:solidFill>
-                        <a:srgbClr val="D1D5DB"/>
+                        <a:srgbClr val="D8D3CB"/>
                       </a:solidFill>
                       <a:prstDash val="solid"/>
                       <a:round/>
                       <a:headEnd type="none" w="med" len="med"/>
                       <a:tailEnd type="none" w="med" len="med"/>
                     </a:lnR>
-                    <a:lnT w="6350" cap="flat" cmpd="sng" algn="ctr">
+                    <a:lnT w="5080" cap="flat" cmpd="sng" algn="ctr">
                       <a:solidFill>
-                        <a:srgbClr val="D1D5DB"/>
+                        <a:srgbClr val="D8D3CB"/>
                       </a:solidFill>
                       <a:prstDash val="solid"/>
                       <a:round/>
                       <a:headEnd type="none" w="med" len="med"/>
                       <a:tailEnd type="none" w="med" len="med"/>
                     </a:lnT>
-                    <a:lnB w="6350" cap="flat" cmpd="sng" algn="ctr">
+                    <a:lnB w="5080" cap="flat" cmpd="sng" algn="ctr">
                       <a:solidFill>
-                        <a:srgbClr val="D1D5DB"/>
+                        <a:srgbClr val="D8D3CB"/>
                       </a:solidFill>
                       <a:prstDash val="solid"/>
                       <a:round/>
@@ -6573,45 +7151,52 @@
                       <a:r>
                         <a:rPr lang="en-US" sz="1100" dirty="0">
                           <a:solidFill>
-                            <a:srgbClr val="374151"/>
+                            <a:srgbClr val="23282E"/>
                           </a:solidFill>
+                          <a:latin typeface="Corbel" pitchFamily="34" charset="0"/>
+                          <a:ea typeface="Corbel" pitchFamily="34" charset="-122"/>
+                          <a:cs typeface="Corbel" pitchFamily="34" charset="-120"/>
                         </a:rPr>
                         <a:t>Narrative or integrative</a:t>
                       </a:r>
-                      <a:endParaRPr lang="en-US" sz="1100" dirty="0"/>
+                      <a:endParaRPr lang="en-US" sz="1100" dirty="0">
+                        <a:latin typeface="Corbel" charset="0"/>
+                        <a:ea typeface="Corbel" charset="0"/>
+                        <a:cs typeface="Corbel" charset="0"/>
+                      </a:endParaRPr>
                     </a:p>
                   </a:txBody>
-                  <a:tcPr marL="91440" marR="91440" marT="45720" marB="45720" anchor="t">
-                    <a:lnL w="6350" cap="flat" cmpd="sng" algn="ctr">
+                  <a:tcPr marL="76200" marR="76200" marT="76200" marB="76200" anchor="t">
+                    <a:lnL w="5080" cap="flat" cmpd="sng" algn="ctr">
                       <a:solidFill>
-                        <a:srgbClr val="D1D5DB"/>
+                        <a:srgbClr val="D8D3CB"/>
                       </a:solidFill>
                       <a:prstDash val="solid"/>
                       <a:round/>
                       <a:headEnd type="none" w="med" len="med"/>
                       <a:tailEnd type="none" w="med" len="med"/>
                     </a:lnL>
-                    <a:lnR w="6350" cap="flat" cmpd="sng" algn="ctr">
+                    <a:lnR w="5080" cap="flat" cmpd="sng" algn="ctr">
                       <a:solidFill>
-                        <a:srgbClr val="D1D5DB"/>
+                        <a:srgbClr val="D8D3CB"/>
                       </a:solidFill>
                       <a:prstDash val="solid"/>
                       <a:round/>
                       <a:headEnd type="none" w="med" len="med"/>
                       <a:tailEnd type="none" w="med" len="med"/>
                     </a:lnR>
-                    <a:lnT w="6350" cap="flat" cmpd="sng" algn="ctr">
+                    <a:lnT w="5080" cap="flat" cmpd="sng" algn="ctr">
                       <a:solidFill>
-                        <a:srgbClr val="D1D5DB"/>
+                        <a:srgbClr val="D8D3CB"/>
                       </a:solidFill>
                       <a:prstDash val="solid"/>
                       <a:round/>
                       <a:headEnd type="none" w="med" len="med"/>
                       <a:tailEnd type="none" w="med" len="med"/>
                     </a:lnT>
-                    <a:lnB w="6350" cap="flat" cmpd="sng" algn="ctr">
+                    <a:lnB w="5080" cap="flat" cmpd="sng" algn="ctr">
                       <a:solidFill>
-                        <a:srgbClr val="D1D5DB"/>
+                        <a:srgbClr val="D8D3CB"/>
                       </a:solidFill>
                       <a:prstDash val="solid"/>
                       <a:round/>
@@ -6634,45 +7219,52 @@
                       <a:r>
                         <a:rPr lang="en-US" sz="1100" dirty="0">
                           <a:solidFill>
-                            <a:srgbClr val="374151"/>
+                            <a:srgbClr val="23282E"/>
                           </a:solidFill>
+                          <a:latin typeface="Corbel" pitchFamily="34" charset="0"/>
+                          <a:ea typeface="Corbel" pitchFamily="34" charset="-122"/>
+                          <a:cs typeface="Corbel" pitchFamily="34" charset="-120"/>
                         </a:rPr>
                         <a:t>4-8 weeks</a:t>
                       </a:r>
-                      <a:endParaRPr lang="en-US" sz="1100" dirty="0"/>
+                      <a:endParaRPr lang="en-US" sz="1100" dirty="0">
+                        <a:latin typeface="Corbel" charset="0"/>
+                        <a:ea typeface="Corbel" charset="0"/>
+                        <a:cs typeface="Corbel" charset="0"/>
+                      </a:endParaRPr>
                     </a:p>
                   </a:txBody>
-                  <a:tcPr marL="91440" marR="91440" marT="45720" marB="45720" anchor="t">
-                    <a:lnL w="6350" cap="flat" cmpd="sng" algn="ctr">
+                  <a:tcPr marL="76200" marR="76200" marT="76200" marB="76200" anchor="t">
+                    <a:lnL w="5080" cap="flat" cmpd="sng" algn="ctr">
                       <a:solidFill>
-                        <a:srgbClr val="D1D5DB"/>
+                        <a:srgbClr val="D8D3CB"/>
                       </a:solidFill>
                       <a:prstDash val="solid"/>
                       <a:round/>
                       <a:headEnd type="none" w="med" len="med"/>
                       <a:tailEnd type="none" w="med" len="med"/>
                     </a:lnL>
-                    <a:lnR w="6350" cap="flat" cmpd="sng" algn="ctr">
+                    <a:lnR w="5080" cap="flat" cmpd="sng" algn="ctr">
                       <a:solidFill>
-                        <a:srgbClr val="D1D5DB"/>
+                        <a:srgbClr val="D8D3CB"/>
                       </a:solidFill>
                       <a:prstDash val="solid"/>
                       <a:round/>
                       <a:headEnd type="none" w="med" len="med"/>
                       <a:tailEnd type="none" w="med" len="med"/>
                     </a:lnR>
-                    <a:lnT w="6350" cap="flat" cmpd="sng" algn="ctr">
+                    <a:lnT w="5080" cap="flat" cmpd="sng" algn="ctr">
                       <a:solidFill>
-                        <a:srgbClr val="D1D5DB"/>
+                        <a:srgbClr val="D8D3CB"/>
                       </a:solidFill>
                       <a:prstDash val="solid"/>
                       <a:round/>
                       <a:headEnd type="none" w="med" len="med"/>
                       <a:tailEnd type="none" w="med" len="med"/>
                     </a:lnT>
-                    <a:lnB w="6350" cap="flat" cmpd="sng" algn="ctr">
+                    <a:lnB w="5080" cap="flat" cmpd="sng" algn="ctr">
                       <a:solidFill>
-                        <a:srgbClr val="D1D5DB"/>
+                        <a:srgbClr val="D8D3CB"/>
                       </a:solidFill>
                       <a:prstDash val="solid"/>
                       <a:round/>
@@ -6697,230 +7289,52 @@
                       <a:r>
                         <a:rPr lang="en-US" sz="1100" dirty="0">
                           <a:solidFill>
-                            <a:srgbClr val="374151"/>
+                            <a:srgbClr val="23282E"/>
                           </a:solidFill>
+                          <a:latin typeface="Corbel" pitchFamily="34" charset="0"/>
+                          <a:ea typeface="Corbel" pitchFamily="34" charset="-122"/>
+                          <a:cs typeface="Corbel" pitchFamily="34" charset="-120"/>
                         </a:rPr>
                         <a:t>Map an emerging or scattered field</a:t>
                       </a:r>
-                      <a:endParaRPr lang="en-US" sz="1100" dirty="0"/>
+                      <a:endParaRPr lang="en-US" sz="1100" dirty="0">
+                        <a:latin typeface="Corbel" charset="0"/>
+                        <a:ea typeface="Corbel" charset="0"/>
+                        <a:cs typeface="Corbel" charset="0"/>
+                      </a:endParaRPr>
                     </a:p>
                   </a:txBody>
-                  <a:tcPr marL="91440" marR="91440" marT="45720" marB="45720" anchor="t">
-                    <a:lnL w="6350" cap="flat" cmpd="sng" algn="ctr">
+                  <a:tcPr marL="76200" marR="76200" marT="76200" marB="76200" anchor="t">
+                    <a:lnL w="5080" cap="flat" cmpd="sng" algn="ctr">
                       <a:solidFill>
-                        <a:srgbClr val="D1D5DB"/>
+                        <a:srgbClr val="D8D3CB"/>
                       </a:solidFill>
                       <a:prstDash val="solid"/>
                       <a:round/>
                       <a:headEnd type="none" w="med" len="med"/>
                       <a:tailEnd type="none" w="med" len="med"/>
                     </a:lnL>
-                    <a:lnR w="6350" cap="flat" cmpd="sng" algn="ctr">
+                    <a:lnR w="5080" cap="flat" cmpd="sng" algn="ctr">
                       <a:solidFill>
-                        <a:srgbClr val="D1D5DB"/>
+                        <a:srgbClr val="D8D3CB"/>
                       </a:solidFill>
                       <a:prstDash val="solid"/>
                       <a:round/>
                       <a:headEnd type="none" w="med" len="med"/>
                       <a:tailEnd type="none" w="med" len="med"/>
                     </a:lnR>
-                    <a:lnT w="6350" cap="flat" cmpd="sng" algn="ctr">
+                    <a:lnT w="5080" cap="flat" cmpd="sng" algn="ctr">
                       <a:solidFill>
-                        <a:srgbClr val="D1D5DB"/>
+                        <a:srgbClr val="D8D3CB"/>
                       </a:solidFill>
                       <a:prstDash val="solid"/>
                       <a:round/>
                       <a:headEnd type="none" w="med" len="med"/>
                       <a:tailEnd type="none" w="med" len="med"/>
                     </a:lnT>
-                    <a:lnB w="6350" cap="flat" cmpd="sng" algn="ctr">
+                    <a:lnB w="5080" cap="flat" cmpd="sng" algn="ctr">
                       <a:solidFill>
-                        <a:srgbClr val="D1D5DB"/>
-                      </a:solidFill>
-                      <a:prstDash val="solid"/>
-                      <a:round/>
-                      <a:headEnd type="none" w="med" len="med"/>
-                      <a:tailEnd type="none" w="med" len="med"/>
-                    </a:lnB>
-                    <a:solidFill>
-                      <a:srgbClr val="F9FAFB"/>
-                    </a:solidFill>
-                  </a:tcPr>
-                </a:tc>
-                <a:tc>
-                  <a:txBody>
-                    <a:bodyPr/>
-                    <a:lstStyle/>
-                    <a:p>
-                      <a:pPr indent="0" marL="0">
-                        <a:buNone/>
-                      </a:pPr>
-                      <a:r>
-                        <a:rPr lang="en-US" sz="1100" dirty="0">
-                          <a:solidFill>
-                            <a:srgbClr val="374151"/>
-                          </a:solidFill>
-                        </a:rPr>
-                        <a:t>Scoping review</a:t>
-                      </a:r>
-                      <a:endParaRPr lang="en-US" sz="1100" dirty="0"/>
-                    </a:p>
-                  </a:txBody>
-                  <a:tcPr marL="91440" marR="91440" marT="45720" marB="45720" anchor="t">
-                    <a:lnL w="6350" cap="flat" cmpd="sng" algn="ctr">
-                      <a:solidFill>
-                        <a:srgbClr val="D1D5DB"/>
-                      </a:solidFill>
-                      <a:prstDash val="solid"/>
-                      <a:round/>
-                      <a:headEnd type="none" w="med" len="med"/>
-                      <a:tailEnd type="none" w="med" len="med"/>
-                    </a:lnL>
-                    <a:lnR w="6350" cap="flat" cmpd="sng" algn="ctr">
-                      <a:solidFill>
-                        <a:srgbClr val="D1D5DB"/>
-                      </a:solidFill>
-                      <a:prstDash val="solid"/>
-                      <a:round/>
-                      <a:headEnd type="none" w="med" len="med"/>
-                      <a:tailEnd type="none" w="med" len="med"/>
-                    </a:lnR>
-                    <a:lnT w="6350" cap="flat" cmpd="sng" algn="ctr">
-                      <a:solidFill>
-                        <a:srgbClr val="D1D5DB"/>
-                      </a:solidFill>
-                      <a:prstDash val="solid"/>
-                      <a:round/>
-                      <a:headEnd type="none" w="med" len="med"/>
-                      <a:tailEnd type="none" w="med" len="med"/>
-                    </a:lnT>
-                    <a:lnB w="6350" cap="flat" cmpd="sng" algn="ctr">
-                      <a:solidFill>
-                        <a:srgbClr val="D1D5DB"/>
-                      </a:solidFill>
-                      <a:prstDash val="solid"/>
-                      <a:round/>
-                      <a:headEnd type="none" w="med" len="med"/>
-                      <a:tailEnd type="none" w="med" len="med"/>
-                    </a:lnB>
-                    <a:solidFill>
-                      <a:srgbClr val="F9FAFB"/>
-                    </a:solidFill>
-                  </a:tcPr>
-                </a:tc>
-                <a:tc>
-                  <a:txBody>
-                    <a:bodyPr/>
-                    <a:lstStyle/>
-                    <a:p>
-                      <a:pPr indent="0" marL="0">
-                        <a:buNone/>
-                      </a:pPr>
-                      <a:r>
-                        <a:rPr lang="en-US" sz="1100" dirty="0">
-                          <a:solidFill>
-                            <a:srgbClr val="374151"/>
-                          </a:solidFill>
-                        </a:rPr>
-                        <a:t>3-6 months</a:t>
-                      </a:r>
-                      <a:endParaRPr lang="en-US" sz="1100" dirty="0"/>
-                    </a:p>
-                  </a:txBody>
-                  <a:tcPr marL="91440" marR="91440" marT="45720" marB="45720" anchor="t">
-                    <a:lnL w="6350" cap="flat" cmpd="sng" algn="ctr">
-                      <a:solidFill>
-                        <a:srgbClr val="D1D5DB"/>
-                      </a:solidFill>
-                      <a:prstDash val="solid"/>
-                      <a:round/>
-                      <a:headEnd type="none" w="med" len="med"/>
-                      <a:tailEnd type="none" w="med" len="med"/>
-                    </a:lnL>
-                    <a:lnR w="6350" cap="flat" cmpd="sng" algn="ctr">
-                      <a:solidFill>
-                        <a:srgbClr val="D1D5DB"/>
-                      </a:solidFill>
-                      <a:prstDash val="solid"/>
-                      <a:round/>
-                      <a:headEnd type="none" w="med" len="med"/>
-                      <a:tailEnd type="none" w="med" len="med"/>
-                    </a:lnR>
-                    <a:lnT w="6350" cap="flat" cmpd="sng" algn="ctr">
-                      <a:solidFill>
-                        <a:srgbClr val="D1D5DB"/>
-                      </a:solidFill>
-                      <a:prstDash val="solid"/>
-                      <a:round/>
-                      <a:headEnd type="none" w="med" len="med"/>
-                      <a:tailEnd type="none" w="med" len="med"/>
-                    </a:lnT>
-                    <a:lnB w="6350" cap="flat" cmpd="sng" algn="ctr">
-                      <a:solidFill>
-                        <a:srgbClr val="D1D5DB"/>
-                      </a:solidFill>
-                      <a:prstDash val="solid"/>
-                      <a:round/>
-                      <a:headEnd type="none" w="med" len="med"/>
-                      <a:tailEnd type="none" w="med" len="med"/>
-                    </a:lnB>
-                    <a:solidFill>
-                      <a:srgbClr val="F9FAFB"/>
-                    </a:solidFill>
-                  </a:tcPr>
-                </a:tc>
-              </a:tr>
-              <a:tr h="0">
-                <a:tc>
-                  <a:txBody>
-                    <a:bodyPr/>
-                    <a:lstStyle/>
-                    <a:p>
-                      <a:pPr indent="0" marL="0">
-                        <a:buNone/>
-                      </a:pPr>
-                      <a:r>
-                        <a:rPr lang="en-US" sz="1100" dirty="0">
-                          <a:solidFill>
-                            <a:srgbClr val="374151"/>
-                          </a:solidFill>
-                        </a:rPr>
-                        <a:t>Answer a focused effectiveness question</a:t>
-                      </a:r>
-                      <a:endParaRPr lang="en-US" sz="1100" dirty="0"/>
-                    </a:p>
-                  </a:txBody>
-                  <a:tcPr marL="91440" marR="91440" marT="45720" marB="45720" anchor="t">
-                    <a:lnL w="6350" cap="flat" cmpd="sng" algn="ctr">
-                      <a:solidFill>
-                        <a:srgbClr val="D1D5DB"/>
-                      </a:solidFill>
-                      <a:prstDash val="solid"/>
-                      <a:round/>
-                      <a:headEnd type="none" w="med" len="med"/>
-                      <a:tailEnd type="none" w="med" len="med"/>
-                    </a:lnL>
-                    <a:lnR w="6350" cap="flat" cmpd="sng" algn="ctr">
-                      <a:solidFill>
-                        <a:srgbClr val="D1D5DB"/>
-                      </a:solidFill>
-                      <a:prstDash val="solid"/>
-                      <a:round/>
-                      <a:headEnd type="none" w="med" len="med"/>
-                      <a:tailEnd type="none" w="med" len="med"/>
-                    </a:lnR>
-                    <a:lnT w="6350" cap="flat" cmpd="sng" algn="ctr">
-                      <a:solidFill>
-                        <a:srgbClr val="D1D5DB"/>
-                      </a:solidFill>
-                      <a:prstDash val="solid"/>
-                      <a:round/>
-                      <a:headEnd type="none" w="med" len="med"/>
-                      <a:tailEnd type="none" w="med" len="med"/>
-                    </a:lnT>
-                    <a:lnB w="6350" cap="flat" cmpd="sng" algn="ctr">
-                      <a:solidFill>
-                        <a:srgbClr val="D1D5DB"/>
+                        <a:srgbClr val="D8D3CB"/>
                       </a:solidFill>
                       <a:prstDash val="solid"/>
                       <a:round/>
@@ -6943,45 +7357,52 @@
                       <a:r>
                         <a:rPr lang="en-US" sz="1100" dirty="0">
                           <a:solidFill>
-                            <a:srgbClr val="374151"/>
+                            <a:srgbClr val="23282E"/>
                           </a:solidFill>
+                          <a:latin typeface="Corbel" pitchFamily="34" charset="0"/>
+                          <a:ea typeface="Corbel" pitchFamily="34" charset="-122"/>
+                          <a:cs typeface="Corbel" pitchFamily="34" charset="-120"/>
                         </a:rPr>
-                        <a:t>Systematic review</a:t>
+                        <a:t>Scoping review</a:t>
                       </a:r>
-                      <a:endParaRPr lang="en-US" sz="1100" dirty="0"/>
+                      <a:endParaRPr lang="en-US" sz="1100" dirty="0">
+                        <a:latin typeface="Corbel" charset="0"/>
+                        <a:ea typeface="Corbel" charset="0"/>
+                        <a:cs typeface="Corbel" charset="0"/>
+                      </a:endParaRPr>
                     </a:p>
                   </a:txBody>
-                  <a:tcPr marL="91440" marR="91440" marT="45720" marB="45720" anchor="t">
-                    <a:lnL w="6350" cap="flat" cmpd="sng" algn="ctr">
+                  <a:tcPr marL="76200" marR="76200" marT="76200" marB="76200" anchor="t">
+                    <a:lnL w="5080" cap="flat" cmpd="sng" algn="ctr">
                       <a:solidFill>
-                        <a:srgbClr val="D1D5DB"/>
+                        <a:srgbClr val="D8D3CB"/>
                       </a:solidFill>
                       <a:prstDash val="solid"/>
                       <a:round/>
                       <a:headEnd type="none" w="med" len="med"/>
                       <a:tailEnd type="none" w="med" len="med"/>
                     </a:lnL>
-                    <a:lnR w="6350" cap="flat" cmpd="sng" algn="ctr">
+                    <a:lnR w="5080" cap="flat" cmpd="sng" algn="ctr">
                       <a:solidFill>
-                        <a:srgbClr val="D1D5DB"/>
+                        <a:srgbClr val="D8D3CB"/>
                       </a:solidFill>
                       <a:prstDash val="solid"/>
                       <a:round/>
                       <a:headEnd type="none" w="med" len="med"/>
                       <a:tailEnd type="none" w="med" len="med"/>
                     </a:lnR>
-                    <a:lnT w="6350" cap="flat" cmpd="sng" algn="ctr">
+                    <a:lnT w="5080" cap="flat" cmpd="sng" algn="ctr">
                       <a:solidFill>
-                        <a:srgbClr val="D1D5DB"/>
+                        <a:srgbClr val="D8D3CB"/>
                       </a:solidFill>
                       <a:prstDash val="solid"/>
                       <a:round/>
                       <a:headEnd type="none" w="med" len="med"/>
                       <a:tailEnd type="none" w="med" len="med"/>
                     </a:lnT>
-                    <a:lnB w="6350" cap="flat" cmpd="sng" algn="ctr">
+                    <a:lnB w="5080" cap="flat" cmpd="sng" algn="ctr">
                       <a:solidFill>
-                        <a:srgbClr val="D1D5DB"/>
+                        <a:srgbClr val="D8D3CB"/>
                       </a:solidFill>
                       <a:prstDash val="solid"/>
                       <a:round/>
@@ -7004,45 +7425,52 @@
                       <a:r>
                         <a:rPr lang="en-US" sz="1100" dirty="0">
                           <a:solidFill>
-                            <a:srgbClr val="374151"/>
+                            <a:srgbClr val="23282E"/>
                           </a:solidFill>
+                          <a:latin typeface="Corbel" pitchFamily="34" charset="0"/>
+                          <a:ea typeface="Corbel" pitchFamily="34" charset="-122"/>
+                          <a:cs typeface="Corbel" pitchFamily="34" charset="-120"/>
                         </a:rPr>
-                        <a:t>6-12 months</a:t>
+                        <a:t>3-6 months</a:t>
                       </a:r>
-                      <a:endParaRPr lang="en-US" sz="1100" dirty="0"/>
+                      <a:endParaRPr lang="en-US" sz="1100" dirty="0">
+                        <a:latin typeface="Corbel" charset="0"/>
+                        <a:ea typeface="Corbel" charset="0"/>
+                        <a:cs typeface="Corbel" charset="0"/>
+                      </a:endParaRPr>
                     </a:p>
                   </a:txBody>
-                  <a:tcPr marL="91440" marR="91440" marT="45720" marB="45720" anchor="t">
-                    <a:lnL w="6350" cap="flat" cmpd="sng" algn="ctr">
+                  <a:tcPr marL="76200" marR="76200" marT="76200" marB="76200" anchor="t">
+                    <a:lnL w="5080" cap="flat" cmpd="sng" algn="ctr">
                       <a:solidFill>
-                        <a:srgbClr val="D1D5DB"/>
+                        <a:srgbClr val="D8D3CB"/>
                       </a:solidFill>
                       <a:prstDash val="solid"/>
                       <a:round/>
                       <a:headEnd type="none" w="med" len="med"/>
                       <a:tailEnd type="none" w="med" len="med"/>
                     </a:lnL>
-                    <a:lnR w="6350" cap="flat" cmpd="sng" algn="ctr">
+                    <a:lnR w="5080" cap="flat" cmpd="sng" algn="ctr">
                       <a:solidFill>
-                        <a:srgbClr val="D1D5DB"/>
+                        <a:srgbClr val="D8D3CB"/>
                       </a:solidFill>
                       <a:prstDash val="solid"/>
                       <a:round/>
                       <a:headEnd type="none" w="med" len="med"/>
                       <a:tailEnd type="none" w="med" len="med"/>
                     </a:lnR>
-                    <a:lnT w="6350" cap="flat" cmpd="sng" algn="ctr">
+                    <a:lnT w="5080" cap="flat" cmpd="sng" algn="ctr">
                       <a:solidFill>
-                        <a:srgbClr val="D1D5DB"/>
+                        <a:srgbClr val="D8D3CB"/>
                       </a:solidFill>
                       <a:prstDash val="solid"/>
                       <a:round/>
                       <a:headEnd type="none" w="med" len="med"/>
                       <a:tailEnd type="none" w="med" len="med"/>
                     </a:lnT>
-                    <a:lnB w="6350" cap="flat" cmpd="sng" algn="ctr">
+                    <a:lnB w="5080" cap="flat" cmpd="sng" algn="ctr">
                       <a:solidFill>
-                        <a:srgbClr val="D1D5DB"/>
+                        <a:srgbClr val="D8D3CB"/>
                       </a:solidFill>
                       <a:prstDash val="solid"/>
                       <a:round/>
@@ -7067,230 +7495,52 @@
                       <a:r>
                         <a:rPr lang="en-US" sz="1100" dirty="0">
                           <a:solidFill>
-                            <a:srgbClr val="374151"/>
+                            <a:srgbClr val="23282E"/>
                           </a:solidFill>
+                          <a:latin typeface="Corbel" pitchFamily="34" charset="0"/>
+                          <a:ea typeface="Corbel" pitchFamily="34" charset="-122"/>
+                          <a:cs typeface="Corbel" pitchFamily="34" charset="-120"/>
                         </a:rPr>
-                        <a:t>Pool effect estimates numerically</a:t>
+                        <a:t>Answer a focused effectiveness question</a:t>
                       </a:r>
-                      <a:endParaRPr lang="en-US" sz="1100" dirty="0"/>
+                      <a:endParaRPr lang="en-US" sz="1100" dirty="0">
+                        <a:latin typeface="Corbel" charset="0"/>
+                        <a:ea typeface="Corbel" charset="0"/>
+                        <a:cs typeface="Corbel" charset="0"/>
+                      </a:endParaRPr>
                     </a:p>
                   </a:txBody>
-                  <a:tcPr marL="91440" marR="91440" marT="45720" marB="45720" anchor="t">
-                    <a:lnL w="6350" cap="flat" cmpd="sng" algn="ctr">
+                  <a:tcPr marL="76200" marR="76200" marT="76200" marB="76200" anchor="t">
+                    <a:lnL w="5080" cap="flat" cmpd="sng" algn="ctr">
                       <a:solidFill>
-                        <a:srgbClr val="D1D5DB"/>
+                        <a:srgbClr val="D8D3CB"/>
                       </a:solidFill>
                       <a:prstDash val="solid"/>
                       <a:round/>
                       <a:headEnd type="none" w="med" len="med"/>
                       <a:tailEnd type="none" w="med" len="med"/>
                     </a:lnL>
-                    <a:lnR w="6350" cap="flat" cmpd="sng" algn="ctr">
+                    <a:lnR w="5080" cap="flat" cmpd="sng" algn="ctr">
                       <a:solidFill>
-                        <a:srgbClr val="D1D5DB"/>
+                        <a:srgbClr val="D8D3CB"/>
                       </a:solidFill>
                       <a:prstDash val="solid"/>
                       <a:round/>
                       <a:headEnd type="none" w="med" len="med"/>
                       <a:tailEnd type="none" w="med" len="med"/>
                     </a:lnR>
-                    <a:lnT w="6350" cap="flat" cmpd="sng" algn="ctr">
+                    <a:lnT w="5080" cap="flat" cmpd="sng" algn="ctr">
                       <a:solidFill>
-                        <a:srgbClr val="D1D5DB"/>
+                        <a:srgbClr val="D8D3CB"/>
                       </a:solidFill>
                       <a:prstDash val="solid"/>
                       <a:round/>
                       <a:headEnd type="none" w="med" len="med"/>
                       <a:tailEnd type="none" w="med" len="med"/>
                     </a:lnT>
-                    <a:lnB w="6350" cap="flat" cmpd="sng" algn="ctr">
+                    <a:lnB w="5080" cap="flat" cmpd="sng" algn="ctr">
                       <a:solidFill>
-                        <a:srgbClr val="D1D5DB"/>
-                      </a:solidFill>
-                      <a:prstDash val="solid"/>
-                      <a:round/>
-                      <a:headEnd type="none" w="med" len="med"/>
-                      <a:tailEnd type="none" w="med" len="med"/>
-                    </a:lnB>
-                    <a:solidFill>
-                      <a:srgbClr val="F9FAFB"/>
-                    </a:solidFill>
-                  </a:tcPr>
-                </a:tc>
-                <a:tc>
-                  <a:txBody>
-                    <a:bodyPr/>
-                    <a:lstStyle/>
-                    <a:p>
-                      <a:pPr indent="0" marL="0">
-                        <a:buNone/>
-                      </a:pPr>
-                      <a:r>
-                        <a:rPr lang="en-US" sz="1100" dirty="0">
-                          <a:solidFill>
-                            <a:srgbClr val="374151"/>
-                          </a:solidFill>
-                        </a:rPr>
-                        <a:t>Systematic review with meta-analysis</a:t>
-                      </a:r>
-                      <a:endParaRPr lang="en-US" sz="1100" dirty="0"/>
-                    </a:p>
-                  </a:txBody>
-                  <a:tcPr marL="91440" marR="91440" marT="45720" marB="45720" anchor="t">
-                    <a:lnL w="6350" cap="flat" cmpd="sng" algn="ctr">
-                      <a:solidFill>
-                        <a:srgbClr val="D1D5DB"/>
-                      </a:solidFill>
-                      <a:prstDash val="solid"/>
-                      <a:round/>
-                      <a:headEnd type="none" w="med" len="med"/>
-                      <a:tailEnd type="none" w="med" len="med"/>
-                    </a:lnL>
-                    <a:lnR w="6350" cap="flat" cmpd="sng" algn="ctr">
-                      <a:solidFill>
-                        <a:srgbClr val="D1D5DB"/>
-                      </a:solidFill>
-                      <a:prstDash val="solid"/>
-                      <a:round/>
-                      <a:headEnd type="none" w="med" len="med"/>
-                      <a:tailEnd type="none" w="med" len="med"/>
-                    </a:lnR>
-                    <a:lnT w="6350" cap="flat" cmpd="sng" algn="ctr">
-                      <a:solidFill>
-                        <a:srgbClr val="D1D5DB"/>
-                      </a:solidFill>
-                      <a:prstDash val="solid"/>
-                      <a:round/>
-                      <a:headEnd type="none" w="med" len="med"/>
-                      <a:tailEnd type="none" w="med" len="med"/>
-                    </a:lnT>
-                    <a:lnB w="6350" cap="flat" cmpd="sng" algn="ctr">
-                      <a:solidFill>
-                        <a:srgbClr val="D1D5DB"/>
-                      </a:solidFill>
-                      <a:prstDash val="solid"/>
-                      <a:round/>
-                      <a:headEnd type="none" w="med" len="med"/>
-                      <a:tailEnd type="none" w="med" len="med"/>
-                    </a:lnB>
-                    <a:solidFill>
-                      <a:srgbClr val="F9FAFB"/>
-                    </a:solidFill>
-                  </a:tcPr>
-                </a:tc>
-                <a:tc>
-                  <a:txBody>
-                    <a:bodyPr/>
-                    <a:lstStyle/>
-                    <a:p>
-                      <a:pPr indent="0" marL="0">
-                        <a:buNone/>
-                      </a:pPr>
-                      <a:r>
-                        <a:rPr lang="en-US" sz="1100" dirty="0">
-                          <a:solidFill>
-                            <a:srgbClr val="374151"/>
-                          </a:solidFill>
-                        </a:rPr>
-                        <a:t>9-18 months</a:t>
-                      </a:r>
-                      <a:endParaRPr lang="en-US" sz="1100" dirty="0"/>
-                    </a:p>
-                  </a:txBody>
-                  <a:tcPr marL="91440" marR="91440" marT="45720" marB="45720" anchor="t">
-                    <a:lnL w="6350" cap="flat" cmpd="sng" algn="ctr">
-                      <a:solidFill>
-                        <a:srgbClr val="D1D5DB"/>
-                      </a:solidFill>
-                      <a:prstDash val="solid"/>
-                      <a:round/>
-                      <a:headEnd type="none" w="med" len="med"/>
-                      <a:tailEnd type="none" w="med" len="med"/>
-                    </a:lnL>
-                    <a:lnR w="6350" cap="flat" cmpd="sng" algn="ctr">
-                      <a:solidFill>
-                        <a:srgbClr val="D1D5DB"/>
-                      </a:solidFill>
-                      <a:prstDash val="solid"/>
-                      <a:round/>
-                      <a:headEnd type="none" w="med" len="med"/>
-                      <a:tailEnd type="none" w="med" len="med"/>
-                    </a:lnR>
-                    <a:lnT w="6350" cap="flat" cmpd="sng" algn="ctr">
-                      <a:solidFill>
-                        <a:srgbClr val="D1D5DB"/>
-                      </a:solidFill>
-                      <a:prstDash val="solid"/>
-                      <a:round/>
-                      <a:headEnd type="none" w="med" len="med"/>
-                      <a:tailEnd type="none" w="med" len="med"/>
-                    </a:lnT>
-                    <a:lnB w="6350" cap="flat" cmpd="sng" algn="ctr">
-                      <a:solidFill>
-                        <a:srgbClr val="D1D5DB"/>
-                      </a:solidFill>
-                      <a:prstDash val="solid"/>
-                      <a:round/>
-                      <a:headEnd type="none" w="med" len="med"/>
-                      <a:tailEnd type="none" w="med" len="med"/>
-                    </a:lnB>
-                    <a:solidFill>
-                      <a:srgbClr val="F9FAFB"/>
-                    </a:solidFill>
-                  </a:tcPr>
-                </a:tc>
-              </a:tr>
-              <a:tr h="0">
-                <a:tc>
-                  <a:txBody>
-                    <a:bodyPr/>
-                    <a:lstStyle/>
-                    <a:p>
-                      <a:pPr indent="0" marL="0">
-                        <a:buNone/>
-                      </a:pPr>
-                      <a:r>
-                        <a:rPr lang="en-US" sz="1100" dirty="0">
-                          <a:solidFill>
-                            <a:srgbClr val="374151"/>
-                          </a:solidFill>
-                        </a:rPr>
-                        <a:t>Inform an urgent policy decision</a:t>
-                      </a:r>
-                      <a:endParaRPr lang="en-US" sz="1100" dirty="0"/>
-                    </a:p>
-                  </a:txBody>
-                  <a:tcPr marL="91440" marR="91440" marT="45720" marB="45720" anchor="t">
-                    <a:lnL w="6350" cap="flat" cmpd="sng" algn="ctr">
-                      <a:solidFill>
-                        <a:srgbClr val="D1D5DB"/>
-                      </a:solidFill>
-                      <a:prstDash val="solid"/>
-                      <a:round/>
-                      <a:headEnd type="none" w="med" len="med"/>
-                      <a:tailEnd type="none" w="med" len="med"/>
-                    </a:lnL>
-                    <a:lnR w="6350" cap="flat" cmpd="sng" algn="ctr">
-                      <a:solidFill>
-                        <a:srgbClr val="D1D5DB"/>
-                      </a:solidFill>
-                      <a:prstDash val="solid"/>
-                      <a:round/>
-                      <a:headEnd type="none" w="med" len="med"/>
-                      <a:tailEnd type="none" w="med" len="med"/>
-                    </a:lnR>
-                    <a:lnT w="6350" cap="flat" cmpd="sng" algn="ctr">
-                      <a:solidFill>
-                        <a:srgbClr val="D1D5DB"/>
-                      </a:solidFill>
-                      <a:prstDash val="solid"/>
-                      <a:round/>
-                      <a:headEnd type="none" w="med" len="med"/>
-                      <a:tailEnd type="none" w="med" len="med"/>
-                    </a:lnT>
-                    <a:lnB w="6350" cap="flat" cmpd="sng" algn="ctr">
-                      <a:solidFill>
-                        <a:srgbClr val="D1D5DB"/>
+                        <a:srgbClr val="D8D3CB"/>
                       </a:solidFill>
                       <a:prstDash val="solid"/>
                       <a:round/>
@@ -7313,45 +7563,52 @@
                       <a:r>
                         <a:rPr lang="en-US" sz="1100" dirty="0">
                           <a:solidFill>
-                            <a:srgbClr val="374151"/>
+                            <a:srgbClr val="23282E"/>
                           </a:solidFill>
+                          <a:latin typeface="Corbel" pitchFamily="34" charset="0"/>
+                          <a:ea typeface="Corbel" pitchFamily="34" charset="-122"/>
+                          <a:cs typeface="Corbel" pitchFamily="34" charset="-120"/>
                         </a:rPr>
-                        <a:t>Rapid review</a:t>
+                        <a:t>Systematic review</a:t>
                       </a:r>
-                      <a:endParaRPr lang="en-US" sz="1100" dirty="0"/>
+                      <a:endParaRPr lang="en-US" sz="1100" dirty="0">
+                        <a:latin typeface="Corbel" charset="0"/>
+                        <a:ea typeface="Corbel" charset="0"/>
+                        <a:cs typeface="Corbel" charset="0"/>
+                      </a:endParaRPr>
                     </a:p>
                   </a:txBody>
-                  <a:tcPr marL="91440" marR="91440" marT="45720" marB="45720" anchor="t">
-                    <a:lnL w="6350" cap="flat" cmpd="sng" algn="ctr">
+                  <a:tcPr marL="76200" marR="76200" marT="76200" marB="76200" anchor="t">
+                    <a:lnL w="5080" cap="flat" cmpd="sng" algn="ctr">
                       <a:solidFill>
-                        <a:srgbClr val="D1D5DB"/>
+                        <a:srgbClr val="D8D3CB"/>
                       </a:solidFill>
                       <a:prstDash val="solid"/>
                       <a:round/>
                       <a:headEnd type="none" w="med" len="med"/>
                       <a:tailEnd type="none" w="med" len="med"/>
                     </a:lnL>
-                    <a:lnR w="6350" cap="flat" cmpd="sng" algn="ctr">
+                    <a:lnR w="5080" cap="flat" cmpd="sng" algn="ctr">
                       <a:solidFill>
-                        <a:srgbClr val="D1D5DB"/>
+                        <a:srgbClr val="D8D3CB"/>
                       </a:solidFill>
                       <a:prstDash val="solid"/>
                       <a:round/>
                       <a:headEnd type="none" w="med" len="med"/>
                       <a:tailEnd type="none" w="med" len="med"/>
                     </a:lnR>
-                    <a:lnT w="6350" cap="flat" cmpd="sng" algn="ctr">
+                    <a:lnT w="5080" cap="flat" cmpd="sng" algn="ctr">
                       <a:solidFill>
-                        <a:srgbClr val="D1D5DB"/>
+                        <a:srgbClr val="D8D3CB"/>
                       </a:solidFill>
                       <a:prstDash val="solid"/>
                       <a:round/>
                       <a:headEnd type="none" w="med" len="med"/>
                       <a:tailEnd type="none" w="med" len="med"/>
                     </a:lnT>
-                    <a:lnB w="6350" cap="flat" cmpd="sng" algn="ctr">
+                    <a:lnB w="5080" cap="flat" cmpd="sng" algn="ctr">
                       <a:solidFill>
-                        <a:srgbClr val="D1D5DB"/>
+                        <a:srgbClr val="D8D3CB"/>
                       </a:solidFill>
                       <a:prstDash val="solid"/>
                       <a:round/>
@@ -7374,45 +7631,464 @@
                       <a:r>
                         <a:rPr lang="en-US" sz="1100" dirty="0">
                           <a:solidFill>
-                            <a:srgbClr val="374151"/>
+                            <a:srgbClr val="23282E"/>
                           </a:solidFill>
+                          <a:latin typeface="Corbel" pitchFamily="34" charset="0"/>
+                          <a:ea typeface="Corbel" pitchFamily="34" charset="-122"/>
+                          <a:cs typeface="Corbel" pitchFamily="34" charset="-120"/>
                         </a:rPr>
-                        <a:t>4-12 weeks</a:t>
+                        <a:t>6-12 months</a:t>
                       </a:r>
-                      <a:endParaRPr lang="en-US" sz="1100" dirty="0"/>
+                      <a:endParaRPr lang="en-US" sz="1100" dirty="0">
+                        <a:latin typeface="Corbel" charset="0"/>
+                        <a:ea typeface="Corbel" charset="0"/>
+                        <a:cs typeface="Corbel" charset="0"/>
+                      </a:endParaRPr>
                     </a:p>
                   </a:txBody>
-                  <a:tcPr marL="91440" marR="91440" marT="45720" marB="45720" anchor="t">
-                    <a:lnL w="6350" cap="flat" cmpd="sng" algn="ctr">
+                  <a:tcPr marL="76200" marR="76200" marT="76200" marB="76200" anchor="t">
+                    <a:lnL w="5080" cap="flat" cmpd="sng" algn="ctr">
                       <a:solidFill>
-                        <a:srgbClr val="D1D5DB"/>
+                        <a:srgbClr val="D8D3CB"/>
                       </a:solidFill>
                       <a:prstDash val="solid"/>
                       <a:round/>
                       <a:headEnd type="none" w="med" len="med"/>
                       <a:tailEnd type="none" w="med" len="med"/>
                     </a:lnL>
-                    <a:lnR w="6350" cap="flat" cmpd="sng" algn="ctr">
+                    <a:lnR w="5080" cap="flat" cmpd="sng" algn="ctr">
                       <a:solidFill>
-                        <a:srgbClr val="D1D5DB"/>
+                        <a:srgbClr val="D8D3CB"/>
                       </a:solidFill>
                       <a:prstDash val="solid"/>
                       <a:round/>
                       <a:headEnd type="none" w="med" len="med"/>
                       <a:tailEnd type="none" w="med" len="med"/>
                     </a:lnR>
-                    <a:lnT w="6350" cap="flat" cmpd="sng" algn="ctr">
+                    <a:lnT w="5080" cap="flat" cmpd="sng" algn="ctr">
                       <a:solidFill>
-                        <a:srgbClr val="D1D5DB"/>
+                        <a:srgbClr val="D8D3CB"/>
                       </a:solidFill>
                       <a:prstDash val="solid"/>
                       <a:round/>
                       <a:headEnd type="none" w="med" len="med"/>
                       <a:tailEnd type="none" w="med" len="med"/>
                     </a:lnT>
-                    <a:lnB w="6350" cap="flat" cmpd="sng" algn="ctr">
+                    <a:lnB w="5080" cap="flat" cmpd="sng" algn="ctr">
                       <a:solidFill>
-                        <a:srgbClr val="D1D5DB"/>
+                        <a:srgbClr val="D8D3CB"/>
+                      </a:solidFill>
+                      <a:prstDash val="solid"/>
+                      <a:round/>
+                      <a:headEnd type="none" w="med" len="med"/>
+                      <a:tailEnd type="none" w="med" len="med"/>
+                    </a:lnB>
+                    <a:solidFill>
+                      <a:srgbClr val="FFFFFF"/>
+                    </a:solidFill>
+                  </a:tcPr>
+                </a:tc>
+              </a:tr>
+              <a:tr h="0">
+                <a:tc>
+                  <a:txBody>
+                    <a:bodyPr/>
+                    <a:lstStyle/>
+                    <a:p>
+                      <a:pPr indent="0" marL="0">
+                        <a:buNone/>
+                      </a:pPr>
+                      <a:r>
+                        <a:rPr lang="en-US" sz="1100" dirty="0">
+                          <a:solidFill>
+                            <a:srgbClr val="23282E"/>
+                          </a:solidFill>
+                          <a:latin typeface="Corbel" pitchFamily="34" charset="0"/>
+                          <a:ea typeface="Corbel" pitchFamily="34" charset="-122"/>
+                          <a:cs typeface="Corbel" pitchFamily="34" charset="-120"/>
+                        </a:rPr>
+                        <a:t>Pool effect estimates numerically</a:t>
+                      </a:r>
+                      <a:endParaRPr lang="en-US" sz="1100" dirty="0">
+                        <a:latin typeface="Corbel" charset="0"/>
+                        <a:ea typeface="Corbel" charset="0"/>
+                        <a:cs typeface="Corbel" charset="0"/>
+                      </a:endParaRPr>
+                    </a:p>
+                  </a:txBody>
+                  <a:tcPr marL="76200" marR="76200" marT="76200" marB="76200" anchor="t">
+                    <a:lnL w="5080" cap="flat" cmpd="sng" algn="ctr">
+                      <a:solidFill>
+                        <a:srgbClr val="D8D3CB"/>
+                      </a:solidFill>
+                      <a:prstDash val="solid"/>
+                      <a:round/>
+                      <a:headEnd type="none" w="med" len="med"/>
+                      <a:tailEnd type="none" w="med" len="med"/>
+                    </a:lnL>
+                    <a:lnR w="5080" cap="flat" cmpd="sng" algn="ctr">
+                      <a:solidFill>
+                        <a:srgbClr val="D8D3CB"/>
+                      </a:solidFill>
+                      <a:prstDash val="solid"/>
+                      <a:round/>
+                      <a:headEnd type="none" w="med" len="med"/>
+                      <a:tailEnd type="none" w="med" len="med"/>
+                    </a:lnR>
+                    <a:lnT w="5080" cap="flat" cmpd="sng" algn="ctr">
+                      <a:solidFill>
+                        <a:srgbClr val="D8D3CB"/>
+                      </a:solidFill>
+                      <a:prstDash val="solid"/>
+                      <a:round/>
+                      <a:headEnd type="none" w="med" len="med"/>
+                      <a:tailEnd type="none" w="med" len="med"/>
+                    </a:lnT>
+                    <a:lnB w="5080" cap="flat" cmpd="sng" algn="ctr">
+                      <a:solidFill>
+                        <a:srgbClr val="D8D3CB"/>
+                      </a:solidFill>
+                      <a:prstDash val="solid"/>
+                      <a:round/>
+                      <a:headEnd type="none" w="med" len="med"/>
+                      <a:tailEnd type="none" w="med" len="med"/>
+                    </a:lnB>
+                    <a:solidFill>
+                      <a:srgbClr val="FFFFFF"/>
+                    </a:solidFill>
+                  </a:tcPr>
+                </a:tc>
+                <a:tc>
+                  <a:txBody>
+                    <a:bodyPr/>
+                    <a:lstStyle/>
+                    <a:p>
+                      <a:pPr indent="0" marL="0">
+                        <a:buNone/>
+                      </a:pPr>
+                      <a:r>
+                        <a:rPr lang="en-US" sz="1100" dirty="0">
+                          <a:solidFill>
+                            <a:srgbClr val="23282E"/>
+                          </a:solidFill>
+                          <a:latin typeface="Corbel" pitchFamily="34" charset="0"/>
+                          <a:ea typeface="Corbel" pitchFamily="34" charset="-122"/>
+                          <a:cs typeface="Corbel" pitchFamily="34" charset="-120"/>
+                        </a:rPr>
+                        <a:t>Systematic review with meta-analysis</a:t>
+                      </a:r>
+                      <a:endParaRPr lang="en-US" sz="1100" dirty="0">
+                        <a:latin typeface="Corbel" charset="0"/>
+                        <a:ea typeface="Corbel" charset="0"/>
+                        <a:cs typeface="Corbel" charset="0"/>
+                      </a:endParaRPr>
+                    </a:p>
+                  </a:txBody>
+                  <a:tcPr marL="76200" marR="76200" marT="76200" marB="76200" anchor="t">
+                    <a:lnL w="5080" cap="flat" cmpd="sng" algn="ctr">
+                      <a:solidFill>
+                        <a:srgbClr val="D8D3CB"/>
+                      </a:solidFill>
+                      <a:prstDash val="solid"/>
+                      <a:round/>
+                      <a:headEnd type="none" w="med" len="med"/>
+                      <a:tailEnd type="none" w="med" len="med"/>
+                    </a:lnL>
+                    <a:lnR w="5080" cap="flat" cmpd="sng" algn="ctr">
+                      <a:solidFill>
+                        <a:srgbClr val="D8D3CB"/>
+                      </a:solidFill>
+                      <a:prstDash val="solid"/>
+                      <a:round/>
+                      <a:headEnd type="none" w="med" len="med"/>
+                      <a:tailEnd type="none" w="med" len="med"/>
+                    </a:lnR>
+                    <a:lnT w="5080" cap="flat" cmpd="sng" algn="ctr">
+                      <a:solidFill>
+                        <a:srgbClr val="D8D3CB"/>
+                      </a:solidFill>
+                      <a:prstDash val="solid"/>
+                      <a:round/>
+                      <a:headEnd type="none" w="med" len="med"/>
+                      <a:tailEnd type="none" w="med" len="med"/>
+                    </a:lnT>
+                    <a:lnB w="5080" cap="flat" cmpd="sng" algn="ctr">
+                      <a:solidFill>
+                        <a:srgbClr val="D8D3CB"/>
+                      </a:solidFill>
+                      <a:prstDash val="solid"/>
+                      <a:round/>
+                      <a:headEnd type="none" w="med" len="med"/>
+                      <a:tailEnd type="none" w="med" len="med"/>
+                    </a:lnB>
+                    <a:solidFill>
+                      <a:srgbClr val="FFFFFF"/>
+                    </a:solidFill>
+                  </a:tcPr>
+                </a:tc>
+                <a:tc>
+                  <a:txBody>
+                    <a:bodyPr/>
+                    <a:lstStyle/>
+                    <a:p>
+                      <a:pPr indent="0" marL="0">
+                        <a:buNone/>
+                      </a:pPr>
+                      <a:r>
+                        <a:rPr lang="en-US" sz="1100" dirty="0">
+                          <a:solidFill>
+                            <a:srgbClr val="23282E"/>
+                          </a:solidFill>
+                          <a:latin typeface="Corbel" pitchFamily="34" charset="0"/>
+                          <a:ea typeface="Corbel" pitchFamily="34" charset="-122"/>
+                          <a:cs typeface="Corbel" pitchFamily="34" charset="-120"/>
+                        </a:rPr>
+                        <a:t>9-18 months</a:t>
+                      </a:r>
+                      <a:endParaRPr lang="en-US" sz="1100" dirty="0">
+                        <a:latin typeface="Corbel" charset="0"/>
+                        <a:ea typeface="Corbel" charset="0"/>
+                        <a:cs typeface="Corbel" charset="0"/>
+                      </a:endParaRPr>
+                    </a:p>
+                  </a:txBody>
+                  <a:tcPr marL="76200" marR="76200" marT="76200" marB="76200" anchor="t">
+                    <a:lnL w="5080" cap="flat" cmpd="sng" algn="ctr">
+                      <a:solidFill>
+                        <a:srgbClr val="D8D3CB"/>
+                      </a:solidFill>
+                      <a:prstDash val="solid"/>
+                      <a:round/>
+                      <a:headEnd type="none" w="med" len="med"/>
+                      <a:tailEnd type="none" w="med" len="med"/>
+                    </a:lnL>
+                    <a:lnR w="5080" cap="flat" cmpd="sng" algn="ctr">
+                      <a:solidFill>
+                        <a:srgbClr val="D8D3CB"/>
+                      </a:solidFill>
+                      <a:prstDash val="solid"/>
+                      <a:round/>
+                      <a:headEnd type="none" w="med" len="med"/>
+                      <a:tailEnd type="none" w="med" len="med"/>
+                    </a:lnR>
+                    <a:lnT w="5080" cap="flat" cmpd="sng" algn="ctr">
+                      <a:solidFill>
+                        <a:srgbClr val="D8D3CB"/>
+                      </a:solidFill>
+                      <a:prstDash val="solid"/>
+                      <a:round/>
+                      <a:headEnd type="none" w="med" len="med"/>
+                      <a:tailEnd type="none" w="med" len="med"/>
+                    </a:lnT>
+                    <a:lnB w="5080" cap="flat" cmpd="sng" algn="ctr">
+                      <a:solidFill>
+                        <a:srgbClr val="D8D3CB"/>
+                      </a:solidFill>
+                      <a:prstDash val="solid"/>
+                      <a:round/>
+                      <a:headEnd type="none" w="med" len="med"/>
+                      <a:tailEnd type="none" w="med" len="med"/>
+                    </a:lnB>
+                    <a:solidFill>
+                      <a:srgbClr val="FFFFFF"/>
+                    </a:solidFill>
+                  </a:tcPr>
+                </a:tc>
+              </a:tr>
+              <a:tr h="0">
+                <a:tc>
+                  <a:txBody>
+                    <a:bodyPr/>
+                    <a:lstStyle/>
+                    <a:p>
+                      <a:pPr indent="0" marL="0">
+                        <a:buNone/>
+                      </a:pPr>
+                      <a:r>
+                        <a:rPr lang="en-US" sz="1100" dirty="0">
+                          <a:solidFill>
+                            <a:srgbClr val="23282E"/>
+                          </a:solidFill>
+                          <a:latin typeface="Corbel" pitchFamily="34" charset="0"/>
+                          <a:ea typeface="Corbel" pitchFamily="34" charset="-122"/>
+                          <a:cs typeface="Corbel" pitchFamily="34" charset="-120"/>
+                        </a:rPr>
+                        <a:t>Inform an urgent policy decision</a:t>
+                      </a:r>
+                      <a:endParaRPr lang="en-US" sz="1100" dirty="0">
+                        <a:latin typeface="Corbel" charset="0"/>
+                        <a:ea typeface="Corbel" charset="0"/>
+                        <a:cs typeface="Corbel" charset="0"/>
+                      </a:endParaRPr>
+                    </a:p>
+                  </a:txBody>
+                  <a:tcPr marL="76200" marR="76200" marT="76200" marB="76200" anchor="t">
+                    <a:lnL w="5080" cap="flat" cmpd="sng" algn="ctr">
+                      <a:solidFill>
+                        <a:srgbClr val="D8D3CB"/>
+                      </a:solidFill>
+                      <a:prstDash val="solid"/>
+                      <a:round/>
+                      <a:headEnd type="none" w="med" len="med"/>
+                      <a:tailEnd type="none" w="med" len="med"/>
+                    </a:lnL>
+                    <a:lnR w="5080" cap="flat" cmpd="sng" algn="ctr">
+                      <a:solidFill>
+                        <a:srgbClr val="D8D3CB"/>
+                      </a:solidFill>
+                      <a:prstDash val="solid"/>
+                      <a:round/>
+                      <a:headEnd type="none" w="med" len="med"/>
+                      <a:tailEnd type="none" w="med" len="med"/>
+                    </a:lnR>
+                    <a:lnT w="5080" cap="flat" cmpd="sng" algn="ctr">
+                      <a:solidFill>
+                        <a:srgbClr val="D8D3CB"/>
+                      </a:solidFill>
+                      <a:prstDash val="solid"/>
+                      <a:round/>
+                      <a:headEnd type="none" w="med" len="med"/>
+                      <a:tailEnd type="none" w="med" len="med"/>
+                    </a:lnT>
+                    <a:lnB w="5080" cap="flat" cmpd="sng" algn="ctr">
+                      <a:solidFill>
+                        <a:srgbClr val="D8D3CB"/>
+                      </a:solidFill>
+                      <a:prstDash val="solid"/>
+                      <a:round/>
+                      <a:headEnd type="none" w="med" len="med"/>
+                      <a:tailEnd type="none" w="med" len="med"/>
+                    </a:lnB>
+                    <a:solidFill>
+                      <a:srgbClr val="FFFFFF"/>
+                    </a:solidFill>
+                  </a:tcPr>
+                </a:tc>
+                <a:tc>
+                  <a:txBody>
+                    <a:bodyPr/>
+                    <a:lstStyle/>
+                    <a:p>
+                      <a:pPr indent="0" marL="0">
+                        <a:buNone/>
+                      </a:pPr>
+                      <a:r>
+                        <a:rPr lang="en-US" sz="1100" dirty="0">
+                          <a:solidFill>
+                            <a:srgbClr val="23282E"/>
+                          </a:solidFill>
+                          <a:latin typeface="Corbel" pitchFamily="34" charset="0"/>
+                          <a:ea typeface="Corbel" pitchFamily="34" charset="-122"/>
+                          <a:cs typeface="Corbel" pitchFamily="34" charset="-120"/>
+                        </a:rPr>
+                        <a:t>Rapid review</a:t>
+                      </a:r>
+                      <a:endParaRPr lang="en-US" sz="1100" dirty="0">
+                        <a:latin typeface="Corbel" charset="0"/>
+                        <a:ea typeface="Corbel" charset="0"/>
+                        <a:cs typeface="Corbel" charset="0"/>
+                      </a:endParaRPr>
+                    </a:p>
+                  </a:txBody>
+                  <a:tcPr marL="76200" marR="76200" marT="76200" marB="76200" anchor="t">
+                    <a:lnL w="5080" cap="flat" cmpd="sng" algn="ctr">
+                      <a:solidFill>
+                        <a:srgbClr val="D8D3CB"/>
+                      </a:solidFill>
+                      <a:prstDash val="solid"/>
+                      <a:round/>
+                      <a:headEnd type="none" w="med" len="med"/>
+                      <a:tailEnd type="none" w="med" len="med"/>
+                    </a:lnL>
+                    <a:lnR w="5080" cap="flat" cmpd="sng" algn="ctr">
+                      <a:solidFill>
+                        <a:srgbClr val="D8D3CB"/>
+                      </a:solidFill>
+                      <a:prstDash val="solid"/>
+                      <a:round/>
+                      <a:headEnd type="none" w="med" len="med"/>
+                      <a:tailEnd type="none" w="med" len="med"/>
+                    </a:lnR>
+                    <a:lnT w="5080" cap="flat" cmpd="sng" algn="ctr">
+                      <a:solidFill>
+                        <a:srgbClr val="D8D3CB"/>
+                      </a:solidFill>
+                      <a:prstDash val="solid"/>
+                      <a:round/>
+                      <a:headEnd type="none" w="med" len="med"/>
+                      <a:tailEnd type="none" w="med" len="med"/>
+                    </a:lnT>
+                    <a:lnB w="5080" cap="flat" cmpd="sng" algn="ctr">
+                      <a:solidFill>
+                        <a:srgbClr val="D8D3CB"/>
+                      </a:solidFill>
+                      <a:prstDash val="solid"/>
+                      <a:round/>
+                      <a:headEnd type="none" w="med" len="med"/>
+                      <a:tailEnd type="none" w="med" len="med"/>
+                    </a:lnB>
+                    <a:solidFill>
+                      <a:srgbClr val="FFFFFF"/>
+                    </a:solidFill>
+                  </a:tcPr>
+                </a:tc>
+                <a:tc>
+                  <a:txBody>
+                    <a:bodyPr/>
+                    <a:lstStyle/>
+                    <a:p>
+                      <a:pPr indent="0" marL="0">
+                        <a:buNone/>
+                      </a:pPr>
+                      <a:r>
+                        <a:rPr lang="en-US" sz="1100" dirty="0">
+                          <a:solidFill>
+                            <a:srgbClr val="23282E"/>
+                          </a:solidFill>
+                          <a:latin typeface="Corbel" pitchFamily="34" charset="0"/>
+                          <a:ea typeface="Corbel" pitchFamily="34" charset="-122"/>
+                          <a:cs typeface="Corbel" pitchFamily="34" charset="-120"/>
+                        </a:rPr>
+                        <a:t>4-12 weeks</a:t>
+                      </a:r>
+                      <a:endParaRPr lang="en-US" sz="1100" dirty="0">
+                        <a:latin typeface="Corbel" charset="0"/>
+                        <a:ea typeface="Corbel" charset="0"/>
+                        <a:cs typeface="Corbel" charset="0"/>
+                      </a:endParaRPr>
+                    </a:p>
+                  </a:txBody>
+                  <a:tcPr marL="76200" marR="76200" marT="76200" marB="76200" anchor="t">
+                    <a:lnL w="5080" cap="flat" cmpd="sng" algn="ctr">
+                      <a:solidFill>
+                        <a:srgbClr val="D8D3CB"/>
+                      </a:solidFill>
+                      <a:prstDash val="solid"/>
+                      <a:round/>
+                      <a:headEnd type="none" w="med" len="med"/>
+                      <a:tailEnd type="none" w="med" len="med"/>
+                    </a:lnL>
+                    <a:lnR w="5080" cap="flat" cmpd="sng" algn="ctr">
+                      <a:solidFill>
+                        <a:srgbClr val="D8D3CB"/>
+                      </a:solidFill>
+                      <a:prstDash val="solid"/>
+                      <a:round/>
+                      <a:headEnd type="none" w="med" len="med"/>
+                      <a:tailEnd type="none" w="med" len="med"/>
+                    </a:lnR>
+                    <a:lnT w="5080" cap="flat" cmpd="sng" algn="ctr">
+                      <a:solidFill>
+                        <a:srgbClr val="D8D3CB"/>
+                      </a:solidFill>
+                      <a:prstDash val="solid"/>
+                      <a:round/>
+                      <a:headEnd type="none" w="med" len="med"/>
+                      <a:tailEnd type="none" w="med" len="med"/>
+                    </a:lnT>
+                    <a:lnB w="5080" cap="flat" cmpd="sng" algn="ctr">
+                      <a:solidFill>
+                        <a:srgbClr val="D8D3CB"/>
                       </a:solidFill>
                       <a:prstDash val="solid"/>
                       <a:round/>
@@ -7441,8 +8117,8 @@
         </p:nvSpPr>
         <p:spPr>
           <a:xfrm>
-            <a:off x="8503920" y="4709160"/>
-            <a:ext cx="800000" cy="300000"/>
+            <a:off x="566928" y="4700016"/>
+            <a:ext cx="914400" cy="274320"/>
           </a:xfrm>
           <a:prstGeom prst="rect">
             <a:avLst/>
@@ -7457,10 +8133,13 @@
           <a:bodyPr/>
           <a:lstStyle>
             <a:lvl1pPr>
-              <a:defRPr sz="1000">
-                <a:solidFill>
-                  <a:srgbClr val="6B7280"/>
-                </a:solidFill>
+              <a:defRPr sz="900">
+                <a:solidFill>
+                  <a:srgbClr val="5F6B76"/>
+                </a:solidFill>
+                <a:latin typeface="Corbel"/>
+                <a:ea typeface="Corbel"/>
+                <a:cs typeface="Corbel"/>
               </a:defRPr>
             </a:lvl1pPr>
           </a:lstStyle>
@@ -7507,8 +8186,8 @@
         </p:nvSpPr>
         <p:spPr>
           <a:xfrm>
-            <a:off x="502920" y="292608"/>
-            <a:ext cx="8046720" cy="228600"/>
+            <a:off x="566928" y="384048"/>
+            <a:ext cx="7772400" cy="237744"/>
           </a:xfrm>
           <a:prstGeom prst="rect">
             <a:avLst/>
@@ -7524,14 +8203,17 @@
               <a:buNone/>
             </a:pPr>
             <a:r>
-              <a:rPr lang="en-US" sz="1100" b="1" spc="150" kern="0" dirty="0">
-                <a:solidFill>
-                  <a:srgbClr val="0066CC"/>
-                </a:solidFill>
+              <a:rPr lang="en-US" sz="1000" spc="200" kern="0" dirty="0">
+                <a:solidFill>
+                  <a:srgbClr val="9A6A3C"/>
+                </a:solidFill>
+                <a:latin typeface="Corbel" pitchFamily="34" charset="0"/>
+                <a:ea typeface="Corbel" pitchFamily="34" charset="-122"/>
+                <a:cs typeface="Corbel" pitchFamily="34" charset="-120"/>
               </a:rPr>
               <a:t>UNIT 3</a:t>
             </a:r>
-            <a:endParaRPr lang="en-US" sz="1100" dirty="0"/>
+            <a:endParaRPr lang="en-US" sz="1000" dirty="0"/>
           </a:p>
         </p:txBody>
       </p:sp>
@@ -7543,8 +8225,8 @@
         </p:nvSpPr>
         <p:spPr>
           <a:xfrm>
-            <a:off x="502920" y="548640"/>
-            <a:ext cx="8046720" cy="640080"/>
+            <a:off x="566928" y="658368"/>
+            <a:ext cx="7772400" cy="658368"/>
           </a:xfrm>
           <a:prstGeom prst="rect">
             <a:avLst/>
@@ -7557,30 +8239,56 @@
           <a:lstStyle/>
           <a:p>
             <a:pPr indent="0" marL="0">
+              <a:lnSpc>
+                <a:spcPct val="100000"/>
+              </a:lnSpc>
               <a:buNone/>
             </a:pPr>
             <a:r>
-              <a:rPr lang="en-US" sz="2400" b="1" dirty="0">
-                <a:solidFill>
-                  <a:srgbClr val="111827"/>
-                </a:solidFill>
+              <a:rPr lang="en-US" sz="2500" dirty="0">
+                <a:solidFill>
+                  <a:srgbClr val="1C3140"/>
+                </a:solidFill>
+                <a:latin typeface="Constantia" pitchFamily="34" charset="0"/>
+                <a:ea typeface="Constantia" pitchFamily="34" charset="-122"/>
+                <a:cs typeface="Constantia" pitchFamily="34" charset="-120"/>
               </a:rPr>
               <a:t>Building the review (1/2)</a:t>
             </a:r>
-            <a:endParaRPr lang="en-US" sz="2400" dirty="0"/>
-          </a:p>
-        </p:txBody>
-      </p:sp>
-      <p:sp>
-        <p:nvSpPr>
-          <p:cNvPr id="4" name="Text 2"/>
+            <a:endParaRPr lang="en-US" sz="2500" dirty="0"/>
+          </a:p>
+        </p:txBody>
+      </p:sp>
+      <p:sp>
+        <p:nvSpPr>
+          <p:cNvPr id="4" name="Shape 2"/>
           <p:cNvSpPr/>
           <p:nvPr/>
         </p:nvSpPr>
         <p:spPr>
           <a:xfrm>
-            <a:off x="685800" y="1325880"/>
-            <a:ext cx="7772400" cy="3200400"/>
+            <a:off x="566928" y="1335024"/>
+            <a:ext cx="566928" cy="20117"/>
+          </a:xfrm>
+          <a:prstGeom prst="rect">
+            <a:avLst/>
+          </a:prstGeom>
+          <a:solidFill>
+            <a:srgbClr val="9A6A3C"/>
+          </a:solidFill>
+          <a:ln/>
+        </p:spPr>
+      </p:sp>
+      <p:sp>
+        <p:nvSpPr>
+          <p:cNvPr id="5" name="Text 3"/>
+          <p:cNvSpPr/>
+          <p:nvPr/>
+        </p:nvSpPr>
+        <p:spPr>
+          <a:xfrm>
+            <a:off x="713232" y="1664208"/>
+            <a:ext cx="7498080" cy="2788920"/>
           </a:xfrm>
           <a:prstGeom prst="rect">
             <a:avLst/>
@@ -7594,19 +8302,22 @@
           <a:p>
             <a:pPr marL="342900" indent="-342900">
               <a:lnSpc>
-                <a:spcPct val="125000"/>
+                <a:spcPct val="130000"/>
               </a:lnSpc>
               <a:spcAft>
-                <a:spcPts val="800"/>
+                <a:spcPts val="1100"/>
               </a:spcAft>
               <a:buSzPct val="100000"/>
-              <a:buChar char="•"/>
+              <a:buChar char="–"/>
             </a:pPr>
             <a:r>
               <a:rPr lang="en-US" sz="1500" dirty="0">
                 <a:solidFill>
-                  <a:srgbClr val="374151"/>
-                </a:solidFill>
+                  <a:srgbClr val="23282E"/>
+                </a:solidFill>
+                <a:latin typeface="Corbel" pitchFamily="34" charset="0"/>
+                <a:ea typeface="Corbel" pitchFamily="34" charset="-122"/>
+                <a:cs typeface="Corbel" pitchFamily="34" charset="-120"/>
               </a:rPr>
               <a:t>Define the scope first: concepts, populations, date range, languages and study types, with a reason for each limit</a:t>
             </a:r>
@@ -7615,19 +8326,22 @@
           <a:p>
             <a:pPr marL="342900" indent="-342900">
               <a:lnSpc>
-                <a:spcPct val="125000"/>
+                <a:spcPct val="130000"/>
               </a:lnSpc>
               <a:spcAft>
-                <a:spcPts val="800"/>
+                <a:spcPts val="1100"/>
               </a:spcAft>
               <a:buSzPct val="100000"/>
-              <a:buChar char="•"/>
+              <a:buChar char="–"/>
             </a:pPr>
             <a:r>
               <a:rPr lang="en-US" sz="1500" dirty="0">
                 <a:solidFill>
-                  <a:srgbClr val="374151"/>
-                </a:solidFill>
+                  <a:srgbClr val="23282E"/>
+                </a:solidFill>
+                <a:latin typeface="Corbel" pitchFamily="34" charset="0"/>
+                <a:ea typeface="Corbel" pitchFamily="34" charset="-122"/>
+                <a:cs typeface="Corbel" pitchFamily="34" charset="-120"/>
               </a:rPr>
               <a:t>Search systematically even for a narrative review — record databases, terms and dates so the search can be repeated</a:t>
             </a:r>
@@ -7636,19 +8350,22 @@
           <a:p>
             <a:pPr marL="342900" indent="-342900">
               <a:lnSpc>
-                <a:spcPct val="125000"/>
+                <a:spcPct val="130000"/>
               </a:lnSpc>
               <a:spcAft>
-                <a:spcPts val="800"/>
+                <a:spcPts val="1100"/>
               </a:spcAft>
               <a:buSzPct val="100000"/>
-              <a:buChar char="•"/>
+              <a:buChar char="–"/>
             </a:pPr>
             <a:r>
               <a:rPr lang="en-US" sz="1500" dirty="0">
                 <a:solidFill>
-                  <a:srgbClr val="374151"/>
-                </a:solidFill>
+                  <a:srgbClr val="23282E"/>
+                </a:solidFill>
+                <a:latin typeface="Corbel" pitchFamily="34" charset="0"/>
+                <a:ea typeface="Corbel" pitchFamily="34" charset="-122"/>
+                <a:cs typeface="Corbel" pitchFamily="34" charset="-120"/>
               </a:rPr>
               <a:t>Screen in two passes: title and abstract, then full text against explicit criteria</a:t>
             </a:r>
@@ -7657,19 +8374,22 @@
           <a:p>
             <a:pPr marL="342900" indent="-342900">
               <a:lnSpc>
-                <a:spcPct val="125000"/>
+                <a:spcPct val="130000"/>
               </a:lnSpc>
               <a:spcAft>
-                <a:spcPts val="800"/>
+                <a:spcPts val="1100"/>
               </a:spcAft>
               <a:buSzPct val="100000"/>
-              <a:buChar char="•"/>
+              <a:buChar char="–"/>
             </a:pPr>
             <a:r>
               <a:rPr lang="en-US" sz="1500" dirty="0">
                 <a:solidFill>
-                  <a:srgbClr val="374151"/>
-                </a:solidFill>
+                  <a:srgbClr val="23282E"/>
+                </a:solidFill>
+                <a:latin typeface="Corbel" pitchFamily="34" charset="0"/>
+                <a:ea typeface="Corbel" pitchFamily="34" charset="-122"/>
+                <a:cs typeface="Corbel" pitchFamily="34" charset="-120"/>
               </a:rPr>
               <a:t>Extract into a synthesis matrix: rows are studies, columns are the themes, methods and findings you care about</a:t>
             </a:r>
@@ -7689,8 +8409,8 @@
         </p:nvSpPr>
         <p:spPr>
           <a:xfrm>
-            <a:off x="8503920" y="4709160"/>
-            <a:ext cx="800000" cy="300000"/>
+            <a:off x="566928" y="4700016"/>
+            <a:ext cx="914400" cy="274320"/>
           </a:xfrm>
           <a:prstGeom prst="rect">
             <a:avLst/>
@@ -7705,10 +8425,13 @@
           <a:bodyPr/>
           <a:lstStyle>
             <a:lvl1pPr>
-              <a:defRPr sz="1000">
-                <a:solidFill>
-                  <a:srgbClr val="6B7280"/>
-                </a:solidFill>
+              <a:defRPr sz="900">
+                <a:solidFill>
+                  <a:srgbClr val="5F6B76"/>
+                </a:solidFill>
+                <a:latin typeface="Corbel"/>
+                <a:ea typeface="Corbel"/>
+                <a:cs typeface="Corbel"/>
               </a:defRPr>
             </a:lvl1pPr>
           </a:lstStyle>
@@ -7755,8 +8478,8 @@
         </p:nvSpPr>
         <p:spPr>
           <a:xfrm>
-            <a:off x="502920" y="292608"/>
-            <a:ext cx="8046720" cy="228600"/>
+            <a:off x="566928" y="384048"/>
+            <a:ext cx="7772400" cy="237744"/>
           </a:xfrm>
           <a:prstGeom prst="rect">
             <a:avLst/>
@@ -7772,14 +8495,17 @@
               <a:buNone/>
             </a:pPr>
             <a:r>
-              <a:rPr lang="en-US" sz="1100" b="1" spc="150" kern="0" dirty="0">
-                <a:solidFill>
-                  <a:srgbClr val="0066CC"/>
-                </a:solidFill>
+              <a:rPr lang="en-US" sz="1000" spc="200" kern="0" dirty="0">
+                <a:solidFill>
+                  <a:srgbClr val="9A6A3C"/>
+                </a:solidFill>
+                <a:latin typeface="Corbel" pitchFamily="34" charset="0"/>
+                <a:ea typeface="Corbel" pitchFamily="34" charset="-122"/>
+                <a:cs typeface="Corbel" pitchFamily="34" charset="-120"/>
               </a:rPr>
               <a:t>UNIT 3</a:t>
             </a:r>
-            <a:endParaRPr lang="en-US" sz="1100" dirty="0"/>
+            <a:endParaRPr lang="en-US" sz="1000" dirty="0"/>
           </a:p>
         </p:txBody>
       </p:sp>
@@ -7791,8 +8517,8 @@
         </p:nvSpPr>
         <p:spPr>
           <a:xfrm>
-            <a:off x="502920" y="548640"/>
-            <a:ext cx="8046720" cy="640080"/>
+            <a:off x="566928" y="658368"/>
+            <a:ext cx="7772400" cy="658368"/>
           </a:xfrm>
           <a:prstGeom prst="rect">
             <a:avLst/>
@@ -7805,30 +8531,56 @@
           <a:lstStyle/>
           <a:p>
             <a:pPr indent="0" marL="0">
+              <a:lnSpc>
+                <a:spcPct val="100000"/>
+              </a:lnSpc>
               <a:buNone/>
             </a:pPr>
             <a:r>
-              <a:rPr lang="en-US" sz="2400" b="1" dirty="0">
-                <a:solidFill>
-                  <a:srgbClr val="111827"/>
-                </a:solidFill>
+              <a:rPr lang="en-US" sz="2500" dirty="0">
+                <a:solidFill>
+                  <a:srgbClr val="1C3140"/>
+                </a:solidFill>
+                <a:latin typeface="Constantia" pitchFamily="34" charset="0"/>
+                <a:ea typeface="Constantia" pitchFamily="34" charset="-122"/>
+                <a:cs typeface="Constantia" pitchFamily="34" charset="-120"/>
               </a:rPr>
               <a:t>Building the review (2/2)</a:t>
             </a:r>
-            <a:endParaRPr lang="en-US" sz="2400" dirty="0"/>
-          </a:p>
-        </p:txBody>
-      </p:sp>
-      <p:sp>
-        <p:nvSpPr>
-          <p:cNvPr id="4" name="Text 2"/>
+            <a:endParaRPr lang="en-US" sz="2500" dirty="0"/>
+          </a:p>
+        </p:txBody>
+      </p:sp>
+      <p:sp>
+        <p:nvSpPr>
+          <p:cNvPr id="4" name="Shape 2"/>
           <p:cNvSpPr/>
           <p:nvPr/>
         </p:nvSpPr>
         <p:spPr>
           <a:xfrm>
-            <a:off x="685800" y="1325880"/>
-            <a:ext cx="7772400" cy="3200400"/>
+            <a:off x="566928" y="1335024"/>
+            <a:ext cx="566928" cy="20117"/>
+          </a:xfrm>
+          <a:prstGeom prst="rect">
+            <a:avLst/>
+          </a:prstGeom>
+          <a:solidFill>
+            <a:srgbClr val="9A6A3C"/>
+          </a:solidFill>
+          <a:ln/>
+        </p:spPr>
+      </p:sp>
+      <p:sp>
+        <p:nvSpPr>
+          <p:cNvPr id="5" name="Text 3"/>
+          <p:cNvSpPr/>
+          <p:nvPr/>
+        </p:nvSpPr>
+        <p:spPr>
+          <a:xfrm>
+            <a:off x="713232" y="1664208"/>
+            <a:ext cx="7498080" cy="2788920"/>
           </a:xfrm>
           <a:prstGeom prst="rect">
             <a:avLst/>
@@ -7842,44 +8594,50 @@
           <a:p>
             <a:pPr marL="342900" indent="-342900">
               <a:lnSpc>
-                <a:spcPct val="125000"/>
+                <a:spcPct val="130000"/>
               </a:lnSpc>
               <a:spcAft>
-                <a:spcPts val="800"/>
+                <a:spcPts val="1100"/>
               </a:spcAft>
               <a:buSzPct val="100000"/>
-              <a:buChar char="•"/>
-            </a:pPr>
-            <a:r>
-              <a:rPr lang="en-US" sz="1700" dirty="0">
-                <a:solidFill>
-                  <a:srgbClr val="374151"/>
-                </a:solidFill>
+              <a:buChar char="–"/>
+            </a:pPr>
+            <a:r>
+              <a:rPr lang="en-US" sz="1650" dirty="0">
+                <a:solidFill>
+                  <a:srgbClr val="23282E"/>
+                </a:solidFill>
+                <a:latin typeface="Corbel" pitchFamily="34" charset="0"/>
+                <a:ea typeface="Corbel" pitchFamily="34" charset="-122"/>
+                <a:cs typeface="Corbel" pitchFamily="34" charset="-120"/>
               </a:rPr>
               <a:t>Reading the matrix down the columns rather than across the rows is what turns reading into synthesis</a:t>
             </a:r>
-            <a:endParaRPr lang="en-US" sz="1700" dirty="0"/>
+            <a:endParaRPr lang="en-US" sz="1650" dirty="0"/>
           </a:p>
           <a:p>
             <a:pPr marL="342900" indent="-342900">
               <a:lnSpc>
-                <a:spcPct val="125000"/>
+                <a:spcPct val="130000"/>
               </a:lnSpc>
               <a:spcAft>
-                <a:spcPts val="800"/>
+                <a:spcPts val="1100"/>
               </a:spcAft>
               <a:buSzPct val="100000"/>
-              <a:buChar char="•"/>
-            </a:pPr>
-            <a:r>
-              <a:rPr lang="en-US" sz="1700" dirty="0">
-                <a:solidFill>
-                  <a:srgbClr val="374151"/>
-                </a:solidFill>
+              <a:buChar char="–"/>
+            </a:pPr>
+            <a:r>
+              <a:rPr lang="en-US" sz="1650" dirty="0">
+                <a:solidFill>
+                  <a:srgbClr val="23282E"/>
+                </a:solidFill>
+                <a:latin typeface="Corbel" pitchFamily="34" charset="0"/>
+                <a:ea typeface="Corbel" pitchFamily="34" charset="-122"/>
+                <a:cs typeface="Corbel" pitchFamily="34" charset="-120"/>
               </a:rPr>
               <a:t>Organise the written review by theme, debate or chronology of ideas — never by author</a:t>
             </a:r>
-            <a:endParaRPr lang="en-US" sz="1700" dirty="0"/>
+            <a:endParaRPr lang="en-US" sz="1650" dirty="0"/>
           </a:p>
         </p:txBody>
       </p:sp>
@@ -7895,8 +8653,8 @@
         </p:nvSpPr>
         <p:spPr>
           <a:xfrm>
-            <a:off x="8503920" y="4709160"/>
-            <a:ext cx="800000" cy="300000"/>
+            <a:off x="566928" y="4700016"/>
+            <a:ext cx="914400" cy="274320"/>
           </a:xfrm>
           <a:prstGeom prst="rect">
             <a:avLst/>
@@ -7911,10 +8669,13 @@
           <a:bodyPr/>
           <a:lstStyle>
             <a:lvl1pPr>
-              <a:defRPr sz="1000">
-                <a:solidFill>
-                  <a:srgbClr val="6B7280"/>
-                </a:solidFill>
+              <a:defRPr sz="900">
+                <a:solidFill>
+                  <a:srgbClr val="5F6B76"/>
+                </a:solidFill>
+                <a:latin typeface="Corbel"/>
+                <a:ea typeface="Corbel"/>
+                <a:cs typeface="Corbel"/>
               </a:defRPr>
             </a:lvl1pPr>
           </a:lstStyle>
@@ -7979,7 +8740,7 @@
     </a:clrScheme>
     <a:fontScheme name="Office">
       <a:majorFont>
-        <a:latin typeface="Calibri Light" panose="020F0302020204030204"/>
+        <a:latin typeface="Constantia"/>
         <a:ea typeface=""/>
         <a:cs typeface=""/>
         <a:font script="Jpan" typeface="游ゴシック Light"/>
@@ -8031,7 +8792,7 @@
         <a:font script="Tfng" typeface="Ebrima"/>
       </a:majorFont>
       <a:minorFont>
-        <a:latin typeface="Calibri" panose="020F0502020204030204"/>
+        <a:latin typeface="Corbel"/>
         <a:ea typeface=""/>
         <a:cs typeface=""/>
         <a:font script="Jpan" typeface="游ゴシック"/>
